--- a/output/inbox/tech-lead/ShopFlow-v2.6-技术负责人版.pptx
+++ b/output/inbox/tech-lead/ShopFlow-v2.6-技术负责人版.pptx
@@ -2,19 +2,19 @@
 <file path=ppt/presentation.xml><?xml version="1.0" encoding="utf-8"?>
 <p:presentation xmlns:p="http://schemas.openxmlformats.org/presentationml/2006/main">
   <p:sldMasterIdLst>
-    <p:sldMasterId xmlns:r="http://schemas.openxmlformats.org/officeDocument/2006/relationships" id="2147483648" r:id="R88385fc837b34c96"/>
+    <p:sldMasterId xmlns:r="http://schemas.openxmlformats.org/officeDocument/2006/relationships" id="2147483648" r:id="R5c78dc28bd324250"/>
   </p:sldMasterIdLst>
   <p:notesMasterIdLst>
-    <p:notesMasterId xmlns:r="http://schemas.openxmlformats.org/officeDocument/2006/relationships" r:id="R0dab9fa67d954c20"/>
+    <p:notesMasterId xmlns:r="http://schemas.openxmlformats.org/officeDocument/2006/relationships" r:id="R6e4f40d358074da9"/>
   </p:notesMasterIdLst>
   <p:sldIdLst>
-    <p:sldId xmlns:r="http://schemas.openxmlformats.org/officeDocument/2006/relationships" id="256" r:id="R77da079a83b6462c"/>
-    <p:sldId xmlns:r="http://schemas.openxmlformats.org/officeDocument/2006/relationships" id="257" r:id="Ra3b65b27b81c4824"/>
-    <p:sldId xmlns:r="http://schemas.openxmlformats.org/officeDocument/2006/relationships" id="258" r:id="R9511bd02a0884e43"/>
-    <p:sldId xmlns:r="http://schemas.openxmlformats.org/officeDocument/2006/relationships" id="259" r:id="Ra4788b7d10e04b3e"/>
-    <p:sldId xmlns:r="http://schemas.openxmlformats.org/officeDocument/2006/relationships" id="260" r:id="R1ad10a499b7f40cf"/>
-    <p:sldId xmlns:r="http://schemas.openxmlformats.org/officeDocument/2006/relationships" id="261" r:id="R7181c854eab14264"/>
-    <p:sldId xmlns:r="http://schemas.openxmlformats.org/officeDocument/2006/relationships" id="262" r:id="Rcfba2cc830a84483"/>
+    <p:sldId xmlns:r="http://schemas.openxmlformats.org/officeDocument/2006/relationships" id="256" r:id="Reb943e6aab4e4af2"/>
+    <p:sldId xmlns:r="http://schemas.openxmlformats.org/officeDocument/2006/relationships" id="257" r:id="R0c49d8dff3624a22"/>
+    <p:sldId xmlns:r="http://schemas.openxmlformats.org/officeDocument/2006/relationships" id="258" r:id="R153e9d60c57b4d0f"/>
+    <p:sldId xmlns:r="http://schemas.openxmlformats.org/officeDocument/2006/relationships" id="259" r:id="R127c4c29e16941a9"/>
+    <p:sldId xmlns:r="http://schemas.openxmlformats.org/officeDocument/2006/relationships" id="260" r:id="R504dfdf8338f483b"/>
+    <p:sldId xmlns:r="http://schemas.openxmlformats.org/officeDocument/2006/relationships" id="261" r:id="R1275a738c5b447b3"/>
+    <p:sldId xmlns:r="http://schemas.openxmlformats.org/officeDocument/2006/relationships" id="262" r:id="Ra2365fece6a24986"/>
   </p:sldIdLst>
   <p:sldSz cx="12192000" cy="6858000"/>
   <p:notesSz cx="6858000" cy="9144000"/>
@@ -458,7 +458,7 @@
           </a:p>
           <a:p xmlns:a="http://schemas.openxmlformats.org/drawingml/2006/main">
             <a:r>
-              <a:t>- git://shopflow/main@8b67e3d750386b4c993fed848298fa54ff6e2bea</a:t>
+              <a:t>- git://shopflow/product-main@8b67e3d750386b4c993fed848298fa54ff6e2bea</a:t>
             </a:r>
           </a:p>
           <a:p xmlns:a="http://schemas.openxmlformats.org/drawingml/2006/main">
@@ -548,7 +548,7 @@
           </a:p>
           <a:p xmlns:a="http://schemas.openxmlformats.org/drawingml/2006/main">
             <a:r>
-              <a:t>- git://shopflow/main@8b67e3d750386b4c993fed848298fa54ff6e2bea</a:t>
+              <a:t>- git://shopflow/product-main@8b67e3d750386b4c993fed848298fa54ff6e2bea</a:t>
             </a:r>
           </a:p>
           <a:p xmlns:a="http://schemas.openxmlformats.org/drawingml/2006/main">
@@ -713,7 +713,7 @@
           </a:p>
           <a:p xmlns:a="http://schemas.openxmlformats.org/drawingml/2006/main">
             <a:r>
-              <a:t>- git://shopflow/main@8b67e3d750386b4c993fed848298fa54ff6e2bea</a:t>
+              <a:t>- git://shopflow/product-main@8b67e3d750386b4c993fed848298fa54ff6e2bea</a:t>
             </a:r>
           </a:p>
           <a:p xmlns:a="http://schemas.openxmlformats.org/drawingml/2006/main">
@@ -798,7 +798,7 @@
           </a:p>
           <a:p xmlns:a="http://schemas.openxmlformats.org/drawingml/2006/main">
             <a:r>
-              <a:t>- git://shopflow/main@8b67e3d750386b4c993fed848298fa54ff6e2bea</a:t>
+              <a:t>- git://shopflow/product-main@8b67e3d750386b4c993fed848298fa54ff6e2bea</a:t>
             </a:r>
           </a:p>
         </p:txBody>
@@ -1031,7 +1031,7 @@
   </p:cSld>
   <p:clrMap bg1="lt1" tx1="dk1" bg2="lt2" tx2="dk2" accent1="accent1" accent2="accent2" accent3="accent3" accent4="accent4" accent5="accent5" accent6="accent6" hlink="hlink" folHlink="folHlink"/>
   <p:sldLayoutIdLst>
-    <p:sldLayoutId xmlns:r="http://schemas.openxmlformats.org/officeDocument/2006/relationships" id="2147483649" r:id="R4503537325d643a1"/>
+    <p:sldLayoutId xmlns:r="http://schemas.openxmlformats.org/officeDocument/2006/relationships" id="2147483649" r:id="R0f9f06b2fa6e4e19"/>
   </p:sldLayoutIdLst>
   <p:txStyles>
     <p:titleStyle>
@@ -1582,7 +1582,7 @@
           <p:cNvPr id="7" name="cover-kicker">
             <a:extLst xmlns:a="http://schemas.openxmlformats.org/drawingml/2006/main">
               <a:ext uri="{FF2B5EF4-FFF2-40B4-BE49-F238E27FC236}">
-                <a16:creationId xmlns:a16="http://schemas.microsoft.com/office/drawing/2014/main" id="{9FAD363C-CE9A-4246-A1C6-F3B29221E289}"/>
+                <a16:creationId xmlns:a16="http://schemas.microsoft.com/office/drawing/2014/main" id="{9B861FB2-7F3F-43A3-ADA0-AAC1971E4626}"/>
               </a:ext>
             </a:extLst>
           </p:cNvPr>
@@ -1640,7 +1640,7 @@
           <p:cNvPr id="2" name="cover-title">
             <a:extLst xmlns:a="http://schemas.openxmlformats.org/drawingml/2006/main">
               <a:ext uri="{FF2B5EF4-FFF2-40B4-BE49-F238E27FC236}">
-                <a16:creationId xmlns:a16="http://schemas.microsoft.com/office/drawing/2014/main" id="{D04B86FC-08D8-44B1-A107-5836ABF410B7}"/>
+                <a16:creationId xmlns:a16="http://schemas.microsoft.com/office/drawing/2014/main" id="{C5DC44B0-AAB6-47CE-ADA6-1A95868B2249}"/>
               </a:ext>
             </a:extLst>
           </p:cNvPr>
@@ -1721,7 +1721,7 @@
           <p:cNvPr id="3" name="cover-rule">
             <a:extLst xmlns:a="http://schemas.openxmlformats.org/drawingml/2006/main">
               <a:ext uri="{FF2B5EF4-FFF2-40B4-BE49-F238E27FC236}">
-                <a16:creationId xmlns:a16="http://schemas.microsoft.com/office/drawing/2014/main" id="{D99F4F67-296D-45E6-B6CF-CAF005793BC6}"/>
+                <a16:creationId xmlns:a16="http://schemas.microsoft.com/office/drawing/2014/main" id="{EBCAB6B3-68B9-4005-8257-2F65C6CEEBF2}"/>
               </a:ext>
             </a:extLst>
           </p:cNvPr>
@@ -1752,7 +1752,7 @@
           <p:cNvPr id="4" name="cover-audience">
             <a:extLst xmlns:a="http://schemas.openxmlformats.org/drawingml/2006/main">
               <a:ext uri="{FF2B5EF4-FFF2-40B4-BE49-F238E27FC236}">
-                <a16:creationId xmlns:a16="http://schemas.microsoft.com/office/drawing/2014/main" id="{45FA8B3C-D5AA-4204-A7FD-5288E736DF2E}"/>
+                <a16:creationId xmlns:a16="http://schemas.microsoft.com/office/drawing/2014/main" id="{5C863E03-EEB8-44D0-94C3-32F30EF390F5}"/>
               </a:ext>
             </a:extLst>
           </p:cNvPr>
@@ -1810,7 +1810,7 @@
           <p:cNvPr id="5" name="cover-meta">
             <a:extLst xmlns:a="http://schemas.openxmlformats.org/drawingml/2006/main">
               <a:ext uri="{FF2B5EF4-FFF2-40B4-BE49-F238E27FC236}">
-                <a16:creationId xmlns:a16="http://schemas.microsoft.com/office/drawing/2014/main" id="{98D6F916-74CC-422E-9CB4-49682D9F928D}"/>
+                <a16:creationId xmlns:a16="http://schemas.microsoft.com/office/drawing/2014/main" id="{A1FB9938-6605-4E42-89EF-39EFB8B330EA}"/>
               </a:ext>
             </a:extLst>
           </p:cNvPr>
@@ -1904,7 +1904,7 @@
                 <a:ea typeface="PingFang SC"/>
                 <a:cs typeface="PingFang SC"/>
               </a:rPr>
-              <a:t>证据快照  shopflow-5bfd99fc6000</a:t>
+              <a:t>证据快照  shopflow-41d613d1137b</a:t>
             </a:r>
           </a:p>
         </p:txBody>
@@ -1914,7 +1914,7 @@
           <p:cNvPr id="6" name="cover-health">
             <a:extLst xmlns:a="http://schemas.openxmlformats.org/drawingml/2006/main">
               <a:ext uri="{FF2B5EF4-FFF2-40B4-BE49-F238E27FC236}">
-                <a16:creationId xmlns:a16="http://schemas.microsoft.com/office/drawing/2014/main" id="{6DE0155A-38AC-4A25-8844-19D51730A952}"/>
+                <a16:creationId xmlns:a16="http://schemas.microsoft.com/office/drawing/2014/main" id="{A23DCE96-9401-400B-B916-28372B0F3A80}"/>
               </a:ext>
             </a:extLst>
           </p:cNvPr>
@@ -1970,7 +1970,7 @@
     </p:spTree>
     <p:extLst>
       <p:ext uri="{BB962C8B-B14F-4D97-AF65-F5344CB8AC3E}">
-        <p14:creationId xmlns:p14="http://schemas.microsoft.com/office/powerpoint/2010/main" val="1095702353"/>
+        <p14:creationId xmlns:p14="http://schemas.microsoft.com/office/powerpoint/2010/main" val="1173269623"/>
       </p:ext>
     </p:extLst>
   </p:cSld>
@@ -2001,7 +2001,7 @@
           <p:cNvPr id="19" name="title-2">
             <a:extLst xmlns:a="http://schemas.openxmlformats.org/drawingml/2006/main">
               <a:ext uri="{FF2B5EF4-FFF2-40B4-BE49-F238E27FC236}">
-                <a16:creationId xmlns:a16="http://schemas.microsoft.com/office/drawing/2014/main" id="{82D8B159-91AD-411C-AE63-22977283B1C7}"/>
+                <a16:creationId xmlns:a16="http://schemas.microsoft.com/office/drawing/2014/main" id="{705E66F3-9BC8-43F3-93C2-737B23BA2A4B}"/>
               </a:ext>
             </a:extLst>
           </p:cNvPr>
@@ -2059,7 +2059,7 @@
           <p:cNvPr id="2" name="subtitle-2">
             <a:extLst xmlns:a="http://schemas.openxmlformats.org/drawingml/2006/main">
               <a:ext uri="{FF2B5EF4-FFF2-40B4-BE49-F238E27FC236}">
-                <a16:creationId xmlns:a16="http://schemas.microsoft.com/office/drawing/2014/main" id="{A96FDF74-002E-48A2-9484-AC797964FC6C}"/>
+                <a16:creationId xmlns:a16="http://schemas.microsoft.com/office/drawing/2014/main" id="{EDFCEB0F-35B8-4E86-BC72-9E763E16CA4B}"/>
               </a:ext>
             </a:extLst>
           </p:cNvPr>
@@ -2117,7 +2117,7 @@
           <p:cNvPr id="3" name="footer-2">
             <a:extLst xmlns:a="http://schemas.openxmlformats.org/drawingml/2006/main">
               <a:ext uri="{FF2B5EF4-FFF2-40B4-BE49-F238E27FC236}">
-                <a16:creationId xmlns:a16="http://schemas.microsoft.com/office/drawing/2014/main" id="{242B5152-A152-4048-B102-CA316F44D834}"/>
+                <a16:creationId xmlns:a16="http://schemas.microsoft.com/office/drawing/2014/main" id="{AF236B72-D2D7-42B1-BF12-342E6AE1C8C5}"/>
               </a:ext>
             </a:extLst>
           </p:cNvPr>
@@ -2165,7 +2165,7 @@
                 <a:ea typeface="PingFang SC"/>
                 <a:cs typeface="PingFang SC"/>
               </a:rPr>
-              <a:t>ShopFlow v2.6  |  shopflow-5bfd99fc6000</a:t>
+              <a:t>ShopFlow v2.6  |  shopflow-41d613d1137b</a:t>
             </a:r>
           </a:p>
         </p:txBody>
@@ -2175,7 +2175,7 @@
           <p:cNvPr id="4" name="page-2">
             <a:extLst xmlns:a="http://schemas.openxmlformats.org/drawingml/2006/main">
               <a:ext uri="{FF2B5EF4-FFF2-40B4-BE49-F238E27FC236}">
-                <a16:creationId xmlns:a16="http://schemas.microsoft.com/office/drawing/2014/main" id="{7EE9A318-00E2-401A-B002-D6765C4F0E4D}"/>
+                <a16:creationId xmlns:a16="http://schemas.microsoft.com/office/drawing/2014/main" id="{7C4C1844-88F0-43D0-9820-912175A8377C}"/>
               </a:ext>
             </a:extLst>
           </p:cNvPr>
@@ -2233,7 +2233,7 @@
           <p:cNvPr id="5" name="progress-number">
             <a:extLst xmlns:a="http://schemas.openxmlformats.org/drawingml/2006/main">
               <a:ext uri="{FF2B5EF4-FFF2-40B4-BE49-F238E27FC236}">
-                <a16:creationId xmlns:a16="http://schemas.microsoft.com/office/drawing/2014/main" id="{929D84DD-C29C-4B77-A5AF-2B71EF7F17A0}"/>
+                <a16:creationId xmlns:a16="http://schemas.microsoft.com/office/drawing/2014/main" id="{60D85456-0C54-4643-8689-A46888BEF350}"/>
               </a:ext>
             </a:extLst>
           </p:cNvPr>
@@ -2291,7 +2291,7 @@
           <p:cNvPr id="6" name="progress-base">
             <a:extLst xmlns:a="http://schemas.openxmlformats.org/drawingml/2006/main">
               <a:ext uri="{FF2B5EF4-FFF2-40B4-BE49-F238E27FC236}">
-                <a16:creationId xmlns:a16="http://schemas.microsoft.com/office/drawing/2014/main" id="{760CAA69-9471-40A7-9B27-650E867506D9}"/>
+                <a16:creationId xmlns:a16="http://schemas.microsoft.com/office/drawing/2014/main" id="{6649ACE9-1CAE-4CD7-983E-F73BB32E6CB6}"/>
               </a:ext>
             </a:extLst>
           </p:cNvPr>
@@ -2322,7 +2322,7 @@
           <p:cNvPr id="7" name="progress-fill">
             <a:extLst xmlns:a="http://schemas.openxmlformats.org/drawingml/2006/main">
               <a:ext uri="{FF2B5EF4-FFF2-40B4-BE49-F238E27FC236}">
-                <a16:creationId xmlns:a16="http://schemas.microsoft.com/office/drawing/2014/main" id="{886F8FA3-54F1-4850-A4F2-A71B6451FCE5}"/>
+                <a16:creationId xmlns:a16="http://schemas.microsoft.com/office/drawing/2014/main" id="{9AE2BD45-2957-4E48-9EF8-BE5DB7FB9D7A}"/>
               </a:ext>
             </a:extLst>
           </p:cNvPr>
@@ -2353,7 +2353,7 @@
           <p:cNvPr id="8" name="progress-label">
             <a:extLst xmlns:a="http://schemas.openxmlformats.org/drawingml/2006/main">
               <a:ext uri="{FF2B5EF4-FFF2-40B4-BE49-F238E27FC236}">
-                <a16:creationId xmlns:a16="http://schemas.microsoft.com/office/drawing/2014/main" id="{B30693F5-AD12-44BC-AEED-6CAA35664023}"/>
+                <a16:creationId xmlns:a16="http://schemas.microsoft.com/office/drawing/2014/main" id="{4F24829B-2B20-423D-952F-83893D2594D0}"/>
               </a:ext>
             </a:extLst>
           </p:cNvPr>
@@ -2411,7 +2411,7 @@
           <p:cNvPr id="9" name="stat-bg-0">
             <a:extLst xmlns:a="http://schemas.openxmlformats.org/drawingml/2006/main">
               <a:ext uri="{FF2B5EF4-FFF2-40B4-BE49-F238E27FC236}">
-                <a16:creationId xmlns:a16="http://schemas.microsoft.com/office/drawing/2014/main" id="{FA7F515D-3A50-4C74-93F4-2F47FF9A2457}"/>
+                <a16:creationId xmlns:a16="http://schemas.microsoft.com/office/drawing/2014/main" id="{8E546A17-355F-43E1-BE88-16129D2044D0}"/>
               </a:ext>
             </a:extLst>
           </p:cNvPr>
@@ -2442,7 +2442,7 @@
           <p:cNvPr id="10" name="stat-value-0">
             <a:extLst xmlns:a="http://schemas.openxmlformats.org/drawingml/2006/main">
               <a:ext uri="{FF2B5EF4-FFF2-40B4-BE49-F238E27FC236}">
-                <a16:creationId xmlns:a16="http://schemas.microsoft.com/office/drawing/2014/main" id="{CEB50D38-7975-47B6-8A99-B883FFFEFA83}"/>
+                <a16:creationId xmlns:a16="http://schemas.microsoft.com/office/drawing/2014/main" id="{404AFB2B-AB90-4470-B133-7FB3DA6C46DC}"/>
               </a:ext>
             </a:extLst>
           </p:cNvPr>
@@ -2500,7 +2500,7 @@
           <p:cNvPr id="11" name="stat-label-0">
             <a:extLst xmlns:a="http://schemas.openxmlformats.org/drawingml/2006/main">
               <a:ext uri="{FF2B5EF4-FFF2-40B4-BE49-F238E27FC236}">
-                <a16:creationId xmlns:a16="http://schemas.microsoft.com/office/drawing/2014/main" id="{F3BA3C7D-4F68-4A0C-A00B-4EA5860E5AC0}"/>
+                <a16:creationId xmlns:a16="http://schemas.microsoft.com/office/drawing/2014/main" id="{7A685DFA-DCDD-4EE5-9ED0-08987674AB62}"/>
               </a:ext>
             </a:extLst>
           </p:cNvPr>
@@ -2558,7 +2558,7 @@
           <p:cNvPr id="12" name="stat-bg-1">
             <a:extLst xmlns:a="http://schemas.openxmlformats.org/drawingml/2006/main">
               <a:ext uri="{FF2B5EF4-FFF2-40B4-BE49-F238E27FC236}">
-                <a16:creationId xmlns:a16="http://schemas.microsoft.com/office/drawing/2014/main" id="{FB928CE4-9417-445E-831C-AF91C7FB3DA0}"/>
+                <a16:creationId xmlns:a16="http://schemas.microsoft.com/office/drawing/2014/main" id="{07668D9F-8DCA-4F13-A942-872C2DEFF085}"/>
               </a:ext>
             </a:extLst>
           </p:cNvPr>
@@ -2589,7 +2589,7 @@
           <p:cNvPr id="13" name="stat-value-1">
             <a:extLst xmlns:a="http://schemas.openxmlformats.org/drawingml/2006/main">
               <a:ext uri="{FF2B5EF4-FFF2-40B4-BE49-F238E27FC236}">
-                <a16:creationId xmlns:a16="http://schemas.microsoft.com/office/drawing/2014/main" id="{EEE2204D-4778-4EF3-B77B-A5B28DD470DE}"/>
+                <a16:creationId xmlns:a16="http://schemas.microsoft.com/office/drawing/2014/main" id="{F730E821-2CBD-4C5A-ADF7-4E93D0214656}"/>
               </a:ext>
             </a:extLst>
           </p:cNvPr>
@@ -2647,7 +2647,7 @@
           <p:cNvPr id="14" name="stat-label-1">
             <a:extLst xmlns:a="http://schemas.openxmlformats.org/drawingml/2006/main">
               <a:ext uri="{FF2B5EF4-FFF2-40B4-BE49-F238E27FC236}">
-                <a16:creationId xmlns:a16="http://schemas.microsoft.com/office/drawing/2014/main" id="{E4373068-8A37-40E8-81FE-6D517BD73473}"/>
+                <a16:creationId xmlns:a16="http://schemas.microsoft.com/office/drawing/2014/main" id="{FBAE5D44-6847-467D-80E7-1CC6CFE3B5F4}"/>
               </a:ext>
             </a:extLst>
           </p:cNvPr>
@@ -2705,7 +2705,7 @@
           <p:cNvPr id="15" name="stat-bg-2">
             <a:extLst xmlns:a="http://schemas.openxmlformats.org/drawingml/2006/main">
               <a:ext uri="{FF2B5EF4-FFF2-40B4-BE49-F238E27FC236}">
-                <a16:creationId xmlns:a16="http://schemas.microsoft.com/office/drawing/2014/main" id="{CBD4AF64-3CE6-48E9-A702-28BC5B6E730D}"/>
+                <a16:creationId xmlns:a16="http://schemas.microsoft.com/office/drawing/2014/main" id="{394AD0C4-594A-4320-9F0A-D497DEEDA06F}"/>
               </a:ext>
             </a:extLst>
           </p:cNvPr>
@@ -2736,7 +2736,7 @@
           <p:cNvPr id="16" name="stat-value-2">
             <a:extLst xmlns:a="http://schemas.openxmlformats.org/drawingml/2006/main">
               <a:ext uri="{FF2B5EF4-FFF2-40B4-BE49-F238E27FC236}">
-                <a16:creationId xmlns:a16="http://schemas.microsoft.com/office/drawing/2014/main" id="{C80188A2-2186-4123-B6BF-08E966979F05}"/>
+                <a16:creationId xmlns:a16="http://schemas.microsoft.com/office/drawing/2014/main" id="{229AB07F-7788-4A9C-B813-099EE12CD711}"/>
               </a:ext>
             </a:extLst>
           </p:cNvPr>
@@ -2794,7 +2794,7 @@
           <p:cNvPr id="17" name="stat-label-2">
             <a:extLst xmlns:a="http://schemas.openxmlformats.org/drawingml/2006/main">
               <a:ext uri="{FF2B5EF4-FFF2-40B4-BE49-F238E27FC236}">
-                <a16:creationId xmlns:a16="http://schemas.microsoft.com/office/drawing/2014/main" id="{5299C8FB-5F6C-4CA0-B9A2-A4AC796D8956}"/>
+                <a16:creationId xmlns:a16="http://schemas.microsoft.com/office/drawing/2014/main" id="{D28AD23D-3C83-4F30-B500-9BF268203EC7}"/>
               </a:ext>
             </a:extLst>
           </p:cNvPr>
@@ -2852,7 +2852,7 @@
           <p:cNvPr id="18" name="health-conclusion">
             <a:extLst xmlns:a="http://schemas.openxmlformats.org/drawingml/2006/main">
               <a:ext uri="{FF2B5EF4-FFF2-40B4-BE49-F238E27FC236}">
-                <a16:creationId xmlns:a16="http://schemas.microsoft.com/office/drawing/2014/main" id="{468DD03D-727D-4F65-AC6A-F58B32732698}"/>
+                <a16:creationId xmlns:a16="http://schemas.microsoft.com/office/drawing/2014/main" id="{EAD6BBC3-8A5F-4A00-AA38-1EDA04E816C4}"/>
               </a:ext>
             </a:extLst>
           </p:cNvPr>
@@ -2908,7 +2908,7 @@
     </p:spTree>
     <p:extLst>
       <p:ext uri="{BB962C8B-B14F-4D97-AF65-F5344CB8AC3E}">
-        <p14:creationId xmlns:p14="http://schemas.microsoft.com/office/powerpoint/2010/main" val="959416861"/>
+        <p14:creationId xmlns:p14="http://schemas.microsoft.com/office/powerpoint/2010/main" val="1245091803"/>
       </p:ext>
     </p:extLst>
   </p:cSld>
@@ -2939,7 +2939,7 @@
           <p:cNvPr id="65" name="title-3">
             <a:extLst xmlns:a="http://schemas.openxmlformats.org/drawingml/2006/main">
               <a:ext uri="{FF2B5EF4-FFF2-40B4-BE49-F238E27FC236}">
-                <a16:creationId xmlns:a16="http://schemas.microsoft.com/office/drawing/2014/main" id="{BEBF4918-F11F-44F4-A02B-B32411E13953}"/>
+                <a16:creationId xmlns:a16="http://schemas.microsoft.com/office/drawing/2014/main" id="{F3922E91-398F-4DCA-AC44-CEA7834230C6}"/>
               </a:ext>
             </a:extLst>
           </p:cNvPr>
@@ -2997,7 +2997,7 @@
           <p:cNvPr id="2" name="subtitle-3">
             <a:extLst xmlns:a="http://schemas.openxmlformats.org/drawingml/2006/main">
               <a:ext uri="{FF2B5EF4-FFF2-40B4-BE49-F238E27FC236}">
-                <a16:creationId xmlns:a16="http://schemas.microsoft.com/office/drawing/2014/main" id="{15405B93-D6FA-476B-837D-529C73A8B53C}"/>
+                <a16:creationId xmlns:a16="http://schemas.microsoft.com/office/drawing/2014/main" id="{1FAA0CC0-9F0E-457E-B195-643D016B361A}"/>
               </a:ext>
             </a:extLst>
           </p:cNvPr>
@@ -3055,7 +3055,7 @@
           <p:cNvPr id="3" name="footer-3">
             <a:extLst xmlns:a="http://schemas.openxmlformats.org/drawingml/2006/main">
               <a:ext uri="{FF2B5EF4-FFF2-40B4-BE49-F238E27FC236}">
-                <a16:creationId xmlns:a16="http://schemas.microsoft.com/office/drawing/2014/main" id="{08F72DEF-4F50-4440-99E4-AA0CC9CA02B1}"/>
+                <a16:creationId xmlns:a16="http://schemas.microsoft.com/office/drawing/2014/main" id="{D85D72D1-2931-489B-9BF4-DC23E693343C}"/>
               </a:ext>
             </a:extLst>
           </p:cNvPr>
@@ -3103,7 +3103,7 @@
                 <a:ea typeface="PingFang SC"/>
                 <a:cs typeface="PingFang SC"/>
               </a:rPr>
-              <a:t>ShopFlow v2.6  |  shopflow-5bfd99fc6000</a:t>
+              <a:t>ShopFlow v2.6  |  shopflow-41d613d1137b</a:t>
             </a:r>
           </a:p>
         </p:txBody>
@@ -3113,7 +3113,7 @@
           <p:cNvPr id="4" name="page-3">
             <a:extLst xmlns:a="http://schemas.openxmlformats.org/drawingml/2006/main">
               <a:ext uri="{FF2B5EF4-FFF2-40B4-BE49-F238E27FC236}">
-                <a16:creationId xmlns:a16="http://schemas.microsoft.com/office/drawing/2014/main" id="{C7149DC3-D3FA-400A-A33B-1974C41E33DF}"/>
+                <a16:creationId xmlns:a16="http://schemas.microsoft.com/office/drawing/2014/main" id="{412BC84E-EADD-4D42-8153-D687258A8BA8}"/>
               </a:ext>
             </a:extLst>
           </p:cNvPr>
@@ -3171,7 +3171,7 @@
           <p:cNvPr id="5" name="header-bg-0-180">
             <a:extLst xmlns:a="http://schemas.openxmlformats.org/drawingml/2006/main">
               <a:ext uri="{FF2B5EF4-FFF2-40B4-BE49-F238E27FC236}">
-                <a16:creationId xmlns:a16="http://schemas.microsoft.com/office/drawing/2014/main" id="{10AEA4A3-ABB7-4E02-9D10-B5DA4F68AA99}"/>
+                <a16:creationId xmlns:a16="http://schemas.microsoft.com/office/drawing/2014/main" id="{B16D3297-92E1-4D72-BF46-834D1C09E0C3}"/>
               </a:ext>
             </a:extLst>
           </p:cNvPr>
@@ -3202,7 +3202,7 @@
           <p:cNvPr id="6" name="header-0-180">
             <a:extLst xmlns:a="http://schemas.openxmlformats.org/drawingml/2006/main">
               <a:ext uri="{FF2B5EF4-FFF2-40B4-BE49-F238E27FC236}">
-                <a16:creationId xmlns:a16="http://schemas.microsoft.com/office/drawing/2014/main" id="{CA03D595-F4AB-409A-99A3-8C98AB46BCC7}"/>
+                <a16:creationId xmlns:a16="http://schemas.microsoft.com/office/drawing/2014/main" id="{05FD97E8-52FA-4205-AAB4-9C13768A6DCE}"/>
               </a:ext>
             </a:extLst>
           </p:cNvPr>
@@ -3260,7 +3260,7 @@
           <p:cNvPr id="7" name="header-bg-1-180">
             <a:extLst xmlns:a="http://schemas.openxmlformats.org/drawingml/2006/main">
               <a:ext uri="{FF2B5EF4-FFF2-40B4-BE49-F238E27FC236}">
-                <a16:creationId xmlns:a16="http://schemas.microsoft.com/office/drawing/2014/main" id="{F7C04062-4490-48F5-B7B3-11AE8DE2BB1D}"/>
+                <a16:creationId xmlns:a16="http://schemas.microsoft.com/office/drawing/2014/main" id="{19CB7986-7221-44FD-B4CB-3A75BB6CD2B0}"/>
               </a:ext>
             </a:extLst>
           </p:cNvPr>
@@ -3291,7 +3291,7 @@
           <p:cNvPr id="8" name="header-1-180">
             <a:extLst xmlns:a="http://schemas.openxmlformats.org/drawingml/2006/main">
               <a:ext uri="{FF2B5EF4-FFF2-40B4-BE49-F238E27FC236}">
-                <a16:creationId xmlns:a16="http://schemas.microsoft.com/office/drawing/2014/main" id="{F2800DA2-96AD-4E5C-9090-D3DFFE2B237D}"/>
+                <a16:creationId xmlns:a16="http://schemas.microsoft.com/office/drawing/2014/main" id="{87657821-12E1-4775-B0D2-53CB2A2C1CD4}"/>
               </a:ext>
             </a:extLst>
           </p:cNvPr>
@@ -3349,7 +3349,7 @@
           <p:cNvPr id="9" name="header-bg-2-180">
             <a:extLst xmlns:a="http://schemas.openxmlformats.org/drawingml/2006/main">
               <a:ext uri="{FF2B5EF4-FFF2-40B4-BE49-F238E27FC236}">
-                <a16:creationId xmlns:a16="http://schemas.microsoft.com/office/drawing/2014/main" id="{2C393104-EA43-4BDA-88BC-AC1FAADCB785}"/>
+                <a16:creationId xmlns:a16="http://schemas.microsoft.com/office/drawing/2014/main" id="{7E8F952B-5680-4023-AD79-1F92AA34C73C}"/>
               </a:ext>
             </a:extLst>
           </p:cNvPr>
@@ -3380,7 +3380,7 @@
           <p:cNvPr id="10" name="header-2-180">
             <a:extLst xmlns:a="http://schemas.openxmlformats.org/drawingml/2006/main">
               <a:ext uri="{FF2B5EF4-FFF2-40B4-BE49-F238E27FC236}">
-                <a16:creationId xmlns:a16="http://schemas.microsoft.com/office/drawing/2014/main" id="{3B24805D-99CD-439D-A14E-DDBE93B13593}"/>
+                <a16:creationId xmlns:a16="http://schemas.microsoft.com/office/drawing/2014/main" id="{B0F729D5-B189-4880-8054-6B5D960843ED}"/>
               </a:ext>
             </a:extLst>
           </p:cNvPr>
@@ -3438,7 +3438,7 @@
           <p:cNvPr id="11" name="header-bg-3-180">
             <a:extLst xmlns:a="http://schemas.openxmlformats.org/drawingml/2006/main">
               <a:ext uri="{FF2B5EF4-FFF2-40B4-BE49-F238E27FC236}">
-                <a16:creationId xmlns:a16="http://schemas.microsoft.com/office/drawing/2014/main" id="{5D3BD063-BDE7-4E43-8500-CDFC34070CD7}"/>
+                <a16:creationId xmlns:a16="http://schemas.microsoft.com/office/drawing/2014/main" id="{8EEA5A69-53AC-4DA6-9617-E9B53F838ED3}"/>
               </a:ext>
             </a:extLst>
           </p:cNvPr>
@@ -3469,7 +3469,7 @@
           <p:cNvPr id="12" name="header-3-180">
             <a:extLst xmlns:a="http://schemas.openxmlformats.org/drawingml/2006/main">
               <a:ext uri="{FF2B5EF4-FFF2-40B4-BE49-F238E27FC236}">
-                <a16:creationId xmlns:a16="http://schemas.microsoft.com/office/drawing/2014/main" id="{59E2E87C-7841-4692-A98B-F49FAED3BA9D}"/>
+                <a16:creationId xmlns:a16="http://schemas.microsoft.com/office/drawing/2014/main" id="{C8723A55-EFA5-446B-8822-679DCC9B2152}"/>
               </a:ext>
             </a:extLst>
           </p:cNvPr>
@@ -3527,7 +3527,7 @@
           <p:cNvPr id="13" name="header-bg-4-180">
             <a:extLst xmlns:a="http://schemas.openxmlformats.org/drawingml/2006/main">
               <a:ext uri="{FF2B5EF4-FFF2-40B4-BE49-F238E27FC236}">
-                <a16:creationId xmlns:a16="http://schemas.microsoft.com/office/drawing/2014/main" id="{1797E49E-338E-48DB-B1BB-0DD79E67A30E}"/>
+                <a16:creationId xmlns:a16="http://schemas.microsoft.com/office/drawing/2014/main" id="{02A4FA6D-7922-4876-B3EF-5E8917ADE762}"/>
               </a:ext>
             </a:extLst>
           </p:cNvPr>
@@ -3558,7 +3558,7 @@
           <p:cNvPr id="14" name="header-4-180">
             <a:extLst xmlns:a="http://schemas.openxmlformats.org/drawingml/2006/main">
               <a:ext uri="{FF2B5EF4-FFF2-40B4-BE49-F238E27FC236}">
-                <a16:creationId xmlns:a16="http://schemas.microsoft.com/office/drawing/2014/main" id="{BB7F0A14-8146-4B0F-B7A6-35BF0DFA5AB0}"/>
+                <a16:creationId xmlns:a16="http://schemas.microsoft.com/office/drawing/2014/main" id="{8C0C7093-5422-40BB-A3E9-52FF61AE5A85}"/>
               </a:ext>
             </a:extLst>
           </p:cNvPr>
@@ -3616,7 +3616,7 @@
           <p:cNvPr id="15" name="cell-bg-0-0-180">
             <a:extLst xmlns:a="http://schemas.openxmlformats.org/drawingml/2006/main">
               <a:ext uri="{FF2B5EF4-FFF2-40B4-BE49-F238E27FC236}">
-                <a16:creationId xmlns:a16="http://schemas.microsoft.com/office/drawing/2014/main" id="{B51AE2A3-E568-4A64-AACA-2E85B5077B85}"/>
+                <a16:creationId xmlns:a16="http://schemas.microsoft.com/office/drawing/2014/main" id="{8618E437-5789-46A1-9828-A90E034808C1}"/>
               </a:ext>
             </a:extLst>
           </p:cNvPr>
@@ -3649,7 +3649,7 @@
           <p:cNvPr id="16" name="cell-0-0-180">
             <a:extLst xmlns:a="http://schemas.openxmlformats.org/drawingml/2006/main">
               <a:ext uri="{FF2B5EF4-FFF2-40B4-BE49-F238E27FC236}">
-                <a16:creationId xmlns:a16="http://schemas.microsoft.com/office/drawing/2014/main" id="{4C6EC0CF-B557-45C3-A2B3-FCDF9E5864A3}"/>
+                <a16:creationId xmlns:a16="http://schemas.microsoft.com/office/drawing/2014/main" id="{5215514D-DC50-4E19-A5B3-103A747F1EE5}"/>
               </a:ext>
             </a:extLst>
           </p:cNvPr>
@@ -3707,7 +3707,7 @@
           <p:cNvPr id="17" name="cell-bg-0-1-180">
             <a:extLst xmlns:a="http://schemas.openxmlformats.org/drawingml/2006/main">
               <a:ext uri="{FF2B5EF4-FFF2-40B4-BE49-F238E27FC236}">
-                <a16:creationId xmlns:a16="http://schemas.microsoft.com/office/drawing/2014/main" id="{C74F4E0B-323A-4326-B242-1D7934235F68}"/>
+                <a16:creationId xmlns:a16="http://schemas.microsoft.com/office/drawing/2014/main" id="{9AEDE656-30E4-49E7-B4BF-3277BB375F85}"/>
               </a:ext>
             </a:extLst>
           </p:cNvPr>
@@ -3740,7 +3740,7 @@
           <p:cNvPr id="18" name="cell-0-1-180">
             <a:extLst xmlns:a="http://schemas.openxmlformats.org/drawingml/2006/main">
               <a:ext uri="{FF2B5EF4-FFF2-40B4-BE49-F238E27FC236}">
-                <a16:creationId xmlns:a16="http://schemas.microsoft.com/office/drawing/2014/main" id="{353F51C5-1294-4BB3-8F11-67E63AEB7B8E}"/>
+                <a16:creationId xmlns:a16="http://schemas.microsoft.com/office/drawing/2014/main" id="{4D890539-52CC-40D4-994C-F7E5D547BE8F}"/>
               </a:ext>
             </a:extLst>
           </p:cNvPr>
@@ -3798,7 +3798,7 @@
           <p:cNvPr id="19" name="cell-bg-0-2-180">
             <a:extLst xmlns:a="http://schemas.openxmlformats.org/drawingml/2006/main">
               <a:ext uri="{FF2B5EF4-FFF2-40B4-BE49-F238E27FC236}">
-                <a16:creationId xmlns:a16="http://schemas.microsoft.com/office/drawing/2014/main" id="{2B839A0D-2C2D-4EF9-B011-B6EB37ADAEEE}"/>
+                <a16:creationId xmlns:a16="http://schemas.microsoft.com/office/drawing/2014/main" id="{AE4385F4-C905-40D4-BEB5-BD59933B9538}"/>
               </a:ext>
             </a:extLst>
           </p:cNvPr>
@@ -3831,7 +3831,7 @@
           <p:cNvPr id="20" name="cell-0-2-180">
             <a:extLst xmlns:a="http://schemas.openxmlformats.org/drawingml/2006/main">
               <a:ext uri="{FF2B5EF4-FFF2-40B4-BE49-F238E27FC236}">
-                <a16:creationId xmlns:a16="http://schemas.microsoft.com/office/drawing/2014/main" id="{DAD31B0B-17C6-4C7A-97DC-9242994CFC73}"/>
+                <a16:creationId xmlns:a16="http://schemas.microsoft.com/office/drawing/2014/main" id="{EFC95DA8-E066-41E8-B5BA-3672FBF39DC2}"/>
               </a:ext>
             </a:extLst>
           </p:cNvPr>
@@ -3889,7 +3889,7 @@
           <p:cNvPr id="21" name="cell-bg-0-3-180">
             <a:extLst xmlns:a="http://schemas.openxmlformats.org/drawingml/2006/main">
               <a:ext uri="{FF2B5EF4-FFF2-40B4-BE49-F238E27FC236}">
-                <a16:creationId xmlns:a16="http://schemas.microsoft.com/office/drawing/2014/main" id="{A1ADACDE-3B9A-4258-AD43-EF7DE1AC7FAB}"/>
+                <a16:creationId xmlns:a16="http://schemas.microsoft.com/office/drawing/2014/main" id="{0BE0D1A0-9A9F-4C10-B214-6CDA972C3C81}"/>
               </a:ext>
             </a:extLst>
           </p:cNvPr>
@@ -3922,7 +3922,7 @@
           <p:cNvPr id="22" name="cell-0-3-180">
             <a:extLst xmlns:a="http://schemas.openxmlformats.org/drawingml/2006/main">
               <a:ext uri="{FF2B5EF4-FFF2-40B4-BE49-F238E27FC236}">
-                <a16:creationId xmlns:a16="http://schemas.microsoft.com/office/drawing/2014/main" id="{9FB5B957-C3E5-45D9-930B-0C1709D8669E}"/>
+                <a16:creationId xmlns:a16="http://schemas.microsoft.com/office/drawing/2014/main" id="{46DAFAC2-9928-448C-9AA3-9D8A24731624}"/>
               </a:ext>
             </a:extLst>
           </p:cNvPr>
@@ -3980,7 +3980,7 @@
           <p:cNvPr id="23" name="cell-bg-0-4-180">
             <a:extLst xmlns:a="http://schemas.openxmlformats.org/drawingml/2006/main">
               <a:ext uri="{FF2B5EF4-FFF2-40B4-BE49-F238E27FC236}">
-                <a16:creationId xmlns:a16="http://schemas.microsoft.com/office/drawing/2014/main" id="{3354246A-220F-4604-B02C-711D18F564D0}"/>
+                <a16:creationId xmlns:a16="http://schemas.microsoft.com/office/drawing/2014/main" id="{D60CE5F9-4292-4C32-B997-B32B7417688A}"/>
               </a:ext>
             </a:extLst>
           </p:cNvPr>
@@ -4013,7 +4013,7 @@
           <p:cNvPr id="24" name="cell-0-4-180">
             <a:extLst xmlns:a="http://schemas.openxmlformats.org/drawingml/2006/main">
               <a:ext uri="{FF2B5EF4-FFF2-40B4-BE49-F238E27FC236}">
-                <a16:creationId xmlns:a16="http://schemas.microsoft.com/office/drawing/2014/main" id="{9A587F2D-BC7F-4262-8F64-05CB05A7A558}"/>
+                <a16:creationId xmlns:a16="http://schemas.microsoft.com/office/drawing/2014/main" id="{F3660EF6-58DF-42B1-8098-B0770BD36DA5}"/>
               </a:ext>
             </a:extLst>
           </p:cNvPr>
@@ -4071,7 +4071,7 @@
           <p:cNvPr id="25" name="cell-bg-1-0-180">
             <a:extLst xmlns:a="http://schemas.openxmlformats.org/drawingml/2006/main">
               <a:ext uri="{FF2B5EF4-FFF2-40B4-BE49-F238E27FC236}">
-                <a16:creationId xmlns:a16="http://schemas.microsoft.com/office/drawing/2014/main" id="{676CCED7-D63B-4690-96DB-E8E3E5D74DCB}"/>
+                <a16:creationId xmlns:a16="http://schemas.microsoft.com/office/drawing/2014/main" id="{6AC71F95-D6F0-4603-B8D1-9A49B757A79B}"/>
               </a:ext>
             </a:extLst>
           </p:cNvPr>
@@ -4104,7 +4104,7 @@
           <p:cNvPr id="26" name="cell-1-0-180">
             <a:extLst xmlns:a="http://schemas.openxmlformats.org/drawingml/2006/main">
               <a:ext uri="{FF2B5EF4-FFF2-40B4-BE49-F238E27FC236}">
-                <a16:creationId xmlns:a16="http://schemas.microsoft.com/office/drawing/2014/main" id="{151891D3-6995-4E83-862B-61A6F56CA599}"/>
+                <a16:creationId xmlns:a16="http://schemas.microsoft.com/office/drawing/2014/main" id="{340E344A-34B5-4439-8E9B-0B268F3BAD1F}"/>
               </a:ext>
             </a:extLst>
           </p:cNvPr>
@@ -4162,7 +4162,7 @@
           <p:cNvPr id="27" name="cell-bg-1-1-180">
             <a:extLst xmlns:a="http://schemas.openxmlformats.org/drawingml/2006/main">
               <a:ext uri="{FF2B5EF4-FFF2-40B4-BE49-F238E27FC236}">
-                <a16:creationId xmlns:a16="http://schemas.microsoft.com/office/drawing/2014/main" id="{3AD88D1B-ED3B-426B-B875-0D5D24715265}"/>
+                <a16:creationId xmlns:a16="http://schemas.microsoft.com/office/drawing/2014/main" id="{2AE90C1C-A377-416B-AE3A-4CDDCAB31588}"/>
               </a:ext>
             </a:extLst>
           </p:cNvPr>
@@ -4195,7 +4195,7 @@
           <p:cNvPr id="28" name="cell-1-1-180">
             <a:extLst xmlns:a="http://schemas.openxmlformats.org/drawingml/2006/main">
               <a:ext uri="{FF2B5EF4-FFF2-40B4-BE49-F238E27FC236}">
-                <a16:creationId xmlns:a16="http://schemas.microsoft.com/office/drawing/2014/main" id="{4E40C91C-5534-4B7D-AEDC-1626E96CDDA4}"/>
+                <a16:creationId xmlns:a16="http://schemas.microsoft.com/office/drawing/2014/main" id="{611365E7-ACB9-4FDC-B3C2-43AA94753154}"/>
               </a:ext>
             </a:extLst>
           </p:cNvPr>
@@ -4253,7 +4253,7 @@
           <p:cNvPr id="29" name="cell-bg-1-2-180">
             <a:extLst xmlns:a="http://schemas.openxmlformats.org/drawingml/2006/main">
               <a:ext uri="{FF2B5EF4-FFF2-40B4-BE49-F238E27FC236}">
-                <a16:creationId xmlns:a16="http://schemas.microsoft.com/office/drawing/2014/main" id="{CAAD653D-F338-48EC-9A6E-C5096C89CE05}"/>
+                <a16:creationId xmlns:a16="http://schemas.microsoft.com/office/drawing/2014/main" id="{1B5EE02A-BAA9-4DA1-906C-B19D79E156A5}"/>
               </a:ext>
             </a:extLst>
           </p:cNvPr>
@@ -4286,7 +4286,7 @@
           <p:cNvPr id="30" name="cell-1-2-180">
             <a:extLst xmlns:a="http://schemas.openxmlformats.org/drawingml/2006/main">
               <a:ext uri="{FF2B5EF4-FFF2-40B4-BE49-F238E27FC236}">
-                <a16:creationId xmlns:a16="http://schemas.microsoft.com/office/drawing/2014/main" id="{2728CA46-A8A4-49A5-9C5D-3AA37C797618}"/>
+                <a16:creationId xmlns:a16="http://schemas.microsoft.com/office/drawing/2014/main" id="{6A591CD7-60EA-4772-B3F4-424F9A21FC0E}"/>
               </a:ext>
             </a:extLst>
           </p:cNvPr>
@@ -4344,7 +4344,7 @@
           <p:cNvPr id="31" name="cell-bg-1-3-180">
             <a:extLst xmlns:a="http://schemas.openxmlformats.org/drawingml/2006/main">
               <a:ext uri="{FF2B5EF4-FFF2-40B4-BE49-F238E27FC236}">
-                <a16:creationId xmlns:a16="http://schemas.microsoft.com/office/drawing/2014/main" id="{B4D53DF4-3A54-4744-939D-273E3EAEA16D}"/>
+                <a16:creationId xmlns:a16="http://schemas.microsoft.com/office/drawing/2014/main" id="{0F539DAC-6498-4E9D-B48B-B1119AC1461D}"/>
               </a:ext>
             </a:extLst>
           </p:cNvPr>
@@ -4377,7 +4377,7 @@
           <p:cNvPr id="32" name="cell-1-3-180">
             <a:extLst xmlns:a="http://schemas.openxmlformats.org/drawingml/2006/main">
               <a:ext uri="{FF2B5EF4-FFF2-40B4-BE49-F238E27FC236}">
-                <a16:creationId xmlns:a16="http://schemas.microsoft.com/office/drawing/2014/main" id="{FF628230-018E-4B37-9468-2B5F338CEA0B}"/>
+                <a16:creationId xmlns:a16="http://schemas.microsoft.com/office/drawing/2014/main" id="{18185C58-9C77-4594-8B84-7DC15B050AEF}"/>
               </a:ext>
             </a:extLst>
           </p:cNvPr>
@@ -4435,7 +4435,7 @@
           <p:cNvPr id="33" name="cell-bg-1-4-180">
             <a:extLst xmlns:a="http://schemas.openxmlformats.org/drawingml/2006/main">
               <a:ext uri="{FF2B5EF4-FFF2-40B4-BE49-F238E27FC236}">
-                <a16:creationId xmlns:a16="http://schemas.microsoft.com/office/drawing/2014/main" id="{B3AB93A4-2796-400B-B305-6142EB31E7A4}"/>
+                <a16:creationId xmlns:a16="http://schemas.microsoft.com/office/drawing/2014/main" id="{F81DD2AF-712F-4DB0-9875-3C5CD4B6DFD1}"/>
               </a:ext>
             </a:extLst>
           </p:cNvPr>
@@ -4468,7 +4468,7 @@
           <p:cNvPr id="34" name="cell-1-4-180">
             <a:extLst xmlns:a="http://schemas.openxmlformats.org/drawingml/2006/main">
               <a:ext uri="{FF2B5EF4-FFF2-40B4-BE49-F238E27FC236}">
-                <a16:creationId xmlns:a16="http://schemas.microsoft.com/office/drawing/2014/main" id="{DD050D5B-BFFE-4153-8BE3-6DA4DDF9879D}"/>
+                <a16:creationId xmlns:a16="http://schemas.microsoft.com/office/drawing/2014/main" id="{9F233C4D-9805-406B-9081-B1F52D244C90}"/>
               </a:ext>
             </a:extLst>
           </p:cNvPr>
@@ -4526,7 +4526,7 @@
           <p:cNvPr id="35" name="cell-bg-2-0-180">
             <a:extLst xmlns:a="http://schemas.openxmlformats.org/drawingml/2006/main">
               <a:ext uri="{FF2B5EF4-FFF2-40B4-BE49-F238E27FC236}">
-                <a16:creationId xmlns:a16="http://schemas.microsoft.com/office/drawing/2014/main" id="{9F26BDAD-1771-4E72-89D6-D747E448023A}"/>
+                <a16:creationId xmlns:a16="http://schemas.microsoft.com/office/drawing/2014/main" id="{FE96AFDA-75DB-4F92-BC46-C74C7F87587A}"/>
               </a:ext>
             </a:extLst>
           </p:cNvPr>
@@ -4559,7 +4559,7 @@
           <p:cNvPr id="36" name="cell-2-0-180">
             <a:extLst xmlns:a="http://schemas.openxmlformats.org/drawingml/2006/main">
               <a:ext uri="{FF2B5EF4-FFF2-40B4-BE49-F238E27FC236}">
-                <a16:creationId xmlns:a16="http://schemas.microsoft.com/office/drawing/2014/main" id="{6B19AEE4-E2F7-4B3B-AB8D-F3BF602A887A}"/>
+                <a16:creationId xmlns:a16="http://schemas.microsoft.com/office/drawing/2014/main" id="{9BFF0593-545B-4033-A432-17CDFDAA2667}"/>
               </a:ext>
             </a:extLst>
           </p:cNvPr>
@@ -4617,7 +4617,7 @@
           <p:cNvPr id="37" name="cell-bg-2-1-180">
             <a:extLst xmlns:a="http://schemas.openxmlformats.org/drawingml/2006/main">
               <a:ext uri="{FF2B5EF4-FFF2-40B4-BE49-F238E27FC236}">
-                <a16:creationId xmlns:a16="http://schemas.microsoft.com/office/drawing/2014/main" id="{A0742820-991A-4582-B027-B75E22D785A3}"/>
+                <a16:creationId xmlns:a16="http://schemas.microsoft.com/office/drawing/2014/main" id="{70F48857-D483-432A-8821-6FDD12242D74}"/>
               </a:ext>
             </a:extLst>
           </p:cNvPr>
@@ -4650,7 +4650,7 @@
           <p:cNvPr id="38" name="cell-2-1-180">
             <a:extLst xmlns:a="http://schemas.openxmlformats.org/drawingml/2006/main">
               <a:ext uri="{FF2B5EF4-FFF2-40B4-BE49-F238E27FC236}">
-                <a16:creationId xmlns:a16="http://schemas.microsoft.com/office/drawing/2014/main" id="{7341CDAC-6C6D-4EF2-BEF2-A536D458F7AE}"/>
+                <a16:creationId xmlns:a16="http://schemas.microsoft.com/office/drawing/2014/main" id="{3DC987D1-85EF-4520-AE02-08A050129840}"/>
               </a:ext>
             </a:extLst>
           </p:cNvPr>
@@ -4708,7 +4708,7 @@
           <p:cNvPr id="39" name="cell-bg-2-2-180">
             <a:extLst xmlns:a="http://schemas.openxmlformats.org/drawingml/2006/main">
               <a:ext uri="{FF2B5EF4-FFF2-40B4-BE49-F238E27FC236}">
-                <a16:creationId xmlns:a16="http://schemas.microsoft.com/office/drawing/2014/main" id="{38318F2A-B60B-4241-B972-B137CF8A235E}"/>
+                <a16:creationId xmlns:a16="http://schemas.microsoft.com/office/drawing/2014/main" id="{E3BDC137-3296-4350-94DA-B89F2DFD1B17}"/>
               </a:ext>
             </a:extLst>
           </p:cNvPr>
@@ -4741,7 +4741,7 @@
           <p:cNvPr id="40" name="cell-2-2-180">
             <a:extLst xmlns:a="http://schemas.openxmlformats.org/drawingml/2006/main">
               <a:ext uri="{FF2B5EF4-FFF2-40B4-BE49-F238E27FC236}">
-                <a16:creationId xmlns:a16="http://schemas.microsoft.com/office/drawing/2014/main" id="{C6D96E95-E48D-4417-95B4-483B97396592}"/>
+                <a16:creationId xmlns:a16="http://schemas.microsoft.com/office/drawing/2014/main" id="{AA31693A-BFCA-469F-BA50-F5F97D810567}"/>
               </a:ext>
             </a:extLst>
           </p:cNvPr>
@@ -4799,7 +4799,7 @@
           <p:cNvPr id="41" name="cell-bg-2-3-180">
             <a:extLst xmlns:a="http://schemas.openxmlformats.org/drawingml/2006/main">
               <a:ext uri="{FF2B5EF4-FFF2-40B4-BE49-F238E27FC236}">
-                <a16:creationId xmlns:a16="http://schemas.microsoft.com/office/drawing/2014/main" id="{82A86242-2966-4FE2-BDFC-54D2893E7FAA}"/>
+                <a16:creationId xmlns:a16="http://schemas.microsoft.com/office/drawing/2014/main" id="{15C1F4C9-6F11-49D5-9B28-4AFF863A9ABF}"/>
               </a:ext>
             </a:extLst>
           </p:cNvPr>
@@ -4832,7 +4832,7 @@
           <p:cNvPr id="42" name="cell-2-3-180">
             <a:extLst xmlns:a="http://schemas.openxmlformats.org/drawingml/2006/main">
               <a:ext uri="{FF2B5EF4-FFF2-40B4-BE49-F238E27FC236}">
-                <a16:creationId xmlns:a16="http://schemas.microsoft.com/office/drawing/2014/main" id="{0CD14F89-86EA-4AFB-9975-A5B48A18AE4B}"/>
+                <a16:creationId xmlns:a16="http://schemas.microsoft.com/office/drawing/2014/main" id="{1A65C379-0C09-4EE9-8568-A06376687E72}"/>
               </a:ext>
             </a:extLst>
           </p:cNvPr>
@@ -4890,7 +4890,7 @@
           <p:cNvPr id="43" name="cell-bg-2-4-180">
             <a:extLst xmlns:a="http://schemas.openxmlformats.org/drawingml/2006/main">
               <a:ext uri="{FF2B5EF4-FFF2-40B4-BE49-F238E27FC236}">
-                <a16:creationId xmlns:a16="http://schemas.microsoft.com/office/drawing/2014/main" id="{8E85C079-38C8-4C26-AACC-0C2F6CFD9D12}"/>
+                <a16:creationId xmlns:a16="http://schemas.microsoft.com/office/drawing/2014/main" id="{31F69324-6C32-4EFF-9748-5E735F6EBB09}"/>
               </a:ext>
             </a:extLst>
           </p:cNvPr>
@@ -4923,7 +4923,7 @@
           <p:cNvPr id="44" name="cell-2-4-180">
             <a:extLst xmlns:a="http://schemas.openxmlformats.org/drawingml/2006/main">
               <a:ext uri="{FF2B5EF4-FFF2-40B4-BE49-F238E27FC236}">
-                <a16:creationId xmlns:a16="http://schemas.microsoft.com/office/drawing/2014/main" id="{3B274624-918D-4A4D-8E11-E4ACA8C711B0}"/>
+                <a16:creationId xmlns:a16="http://schemas.microsoft.com/office/drawing/2014/main" id="{5F9BC63D-BDFC-4085-9CB4-F4C27EFD979C}"/>
               </a:ext>
             </a:extLst>
           </p:cNvPr>
@@ -4981,7 +4981,7 @@
           <p:cNvPr id="45" name="cell-bg-3-0-180">
             <a:extLst xmlns:a="http://schemas.openxmlformats.org/drawingml/2006/main">
               <a:ext uri="{FF2B5EF4-FFF2-40B4-BE49-F238E27FC236}">
-                <a16:creationId xmlns:a16="http://schemas.microsoft.com/office/drawing/2014/main" id="{6D8E7898-EEC0-4160-B837-6A3A67C7423B}"/>
+                <a16:creationId xmlns:a16="http://schemas.microsoft.com/office/drawing/2014/main" id="{F8E932C7-153D-4B9E-B757-4FFB1ACED18A}"/>
               </a:ext>
             </a:extLst>
           </p:cNvPr>
@@ -5014,7 +5014,7 @@
           <p:cNvPr id="46" name="cell-3-0-180">
             <a:extLst xmlns:a="http://schemas.openxmlformats.org/drawingml/2006/main">
               <a:ext uri="{FF2B5EF4-FFF2-40B4-BE49-F238E27FC236}">
-                <a16:creationId xmlns:a16="http://schemas.microsoft.com/office/drawing/2014/main" id="{E5C5771C-E084-417B-815B-10233E64F817}"/>
+                <a16:creationId xmlns:a16="http://schemas.microsoft.com/office/drawing/2014/main" id="{053B544A-5BDC-4838-A702-DE6005CC3C4C}"/>
               </a:ext>
             </a:extLst>
           </p:cNvPr>
@@ -5072,7 +5072,7 @@
           <p:cNvPr id="47" name="cell-bg-3-1-180">
             <a:extLst xmlns:a="http://schemas.openxmlformats.org/drawingml/2006/main">
               <a:ext uri="{FF2B5EF4-FFF2-40B4-BE49-F238E27FC236}">
-                <a16:creationId xmlns:a16="http://schemas.microsoft.com/office/drawing/2014/main" id="{D4F644B1-5774-4D94-B09F-07D3C1E4A0CA}"/>
+                <a16:creationId xmlns:a16="http://schemas.microsoft.com/office/drawing/2014/main" id="{1F202CC8-62AC-4F75-937A-A6018B2B79A7}"/>
               </a:ext>
             </a:extLst>
           </p:cNvPr>
@@ -5105,7 +5105,7 @@
           <p:cNvPr id="48" name="cell-3-1-180">
             <a:extLst xmlns:a="http://schemas.openxmlformats.org/drawingml/2006/main">
               <a:ext uri="{FF2B5EF4-FFF2-40B4-BE49-F238E27FC236}">
-                <a16:creationId xmlns:a16="http://schemas.microsoft.com/office/drawing/2014/main" id="{3859FD9F-E66E-458B-B4A8-0686D728A653}"/>
+                <a16:creationId xmlns:a16="http://schemas.microsoft.com/office/drawing/2014/main" id="{56E7BC66-B149-4794-8AF6-56F8279519A3}"/>
               </a:ext>
             </a:extLst>
           </p:cNvPr>
@@ -5163,7 +5163,7 @@
           <p:cNvPr id="49" name="cell-bg-3-2-180">
             <a:extLst xmlns:a="http://schemas.openxmlformats.org/drawingml/2006/main">
               <a:ext uri="{FF2B5EF4-FFF2-40B4-BE49-F238E27FC236}">
-                <a16:creationId xmlns:a16="http://schemas.microsoft.com/office/drawing/2014/main" id="{1118B31B-F338-4F13-9747-39ADEF500B7C}"/>
+                <a16:creationId xmlns:a16="http://schemas.microsoft.com/office/drawing/2014/main" id="{A7DC81B9-F3FF-4FC2-A577-BAACEA09CDD1}"/>
               </a:ext>
             </a:extLst>
           </p:cNvPr>
@@ -5196,7 +5196,7 @@
           <p:cNvPr id="50" name="cell-3-2-180">
             <a:extLst xmlns:a="http://schemas.openxmlformats.org/drawingml/2006/main">
               <a:ext uri="{FF2B5EF4-FFF2-40B4-BE49-F238E27FC236}">
-                <a16:creationId xmlns:a16="http://schemas.microsoft.com/office/drawing/2014/main" id="{10C81CAD-C790-4629-AF2E-55991DC05318}"/>
+                <a16:creationId xmlns:a16="http://schemas.microsoft.com/office/drawing/2014/main" id="{34FB225A-0191-4E35-B591-C618481F01EB}"/>
               </a:ext>
             </a:extLst>
           </p:cNvPr>
@@ -5254,7 +5254,7 @@
           <p:cNvPr id="51" name="cell-bg-3-3-180">
             <a:extLst xmlns:a="http://schemas.openxmlformats.org/drawingml/2006/main">
               <a:ext uri="{FF2B5EF4-FFF2-40B4-BE49-F238E27FC236}">
-                <a16:creationId xmlns:a16="http://schemas.microsoft.com/office/drawing/2014/main" id="{8AA2EA77-D72F-4C13-AE15-F0AFFA1A37C4}"/>
+                <a16:creationId xmlns:a16="http://schemas.microsoft.com/office/drawing/2014/main" id="{E9F31D97-4F88-4F40-B38D-A402CFAA39E4}"/>
               </a:ext>
             </a:extLst>
           </p:cNvPr>
@@ -5287,7 +5287,7 @@
           <p:cNvPr id="52" name="cell-3-3-180">
             <a:extLst xmlns:a="http://schemas.openxmlformats.org/drawingml/2006/main">
               <a:ext uri="{FF2B5EF4-FFF2-40B4-BE49-F238E27FC236}">
-                <a16:creationId xmlns:a16="http://schemas.microsoft.com/office/drawing/2014/main" id="{628AAE01-950E-4701-9918-5550AD14EDAF}"/>
+                <a16:creationId xmlns:a16="http://schemas.microsoft.com/office/drawing/2014/main" id="{E45D5C21-0096-4FB3-B2CD-2295C0D377E3}"/>
               </a:ext>
             </a:extLst>
           </p:cNvPr>
@@ -5345,7 +5345,7 @@
           <p:cNvPr id="53" name="cell-bg-3-4-180">
             <a:extLst xmlns:a="http://schemas.openxmlformats.org/drawingml/2006/main">
               <a:ext uri="{FF2B5EF4-FFF2-40B4-BE49-F238E27FC236}">
-                <a16:creationId xmlns:a16="http://schemas.microsoft.com/office/drawing/2014/main" id="{C006753F-FD68-4F1C-A778-DD6B7FA9FDC6}"/>
+                <a16:creationId xmlns:a16="http://schemas.microsoft.com/office/drawing/2014/main" id="{9E0074B1-8B6A-4521-A989-51607ADFE73B}"/>
               </a:ext>
             </a:extLst>
           </p:cNvPr>
@@ -5378,7 +5378,7 @@
           <p:cNvPr id="54" name="cell-3-4-180">
             <a:extLst xmlns:a="http://schemas.openxmlformats.org/drawingml/2006/main">
               <a:ext uri="{FF2B5EF4-FFF2-40B4-BE49-F238E27FC236}">
-                <a16:creationId xmlns:a16="http://schemas.microsoft.com/office/drawing/2014/main" id="{34D55231-56AF-445D-8BFB-146078647303}"/>
+                <a16:creationId xmlns:a16="http://schemas.microsoft.com/office/drawing/2014/main" id="{63A3D6C2-2CD0-44DA-BE84-3B37CE1C088B}"/>
               </a:ext>
             </a:extLst>
           </p:cNvPr>
@@ -5436,7 +5436,7 @@
           <p:cNvPr id="55" name="cell-bg-4-0-180">
             <a:extLst xmlns:a="http://schemas.openxmlformats.org/drawingml/2006/main">
               <a:ext uri="{FF2B5EF4-FFF2-40B4-BE49-F238E27FC236}">
-                <a16:creationId xmlns:a16="http://schemas.microsoft.com/office/drawing/2014/main" id="{C128CC92-79A9-4F29-BD72-61C3D7C72A89}"/>
+                <a16:creationId xmlns:a16="http://schemas.microsoft.com/office/drawing/2014/main" id="{4FBCB7A8-978C-467D-BDFE-2470AFD9834C}"/>
               </a:ext>
             </a:extLst>
           </p:cNvPr>
@@ -5469,7 +5469,7 @@
           <p:cNvPr id="56" name="cell-4-0-180">
             <a:extLst xmlns:a="http://schemas.openxmlformats.org/drawingml/2006/main">
               <a:ext uri="{FF2B5EF4-FFF2-40B4-BE49-F238E27FC236}">
-                <a16:creationId xmlns:a16="http://schemas.microsoft.com/office/drawing/2014/main" id="{3792ECCD-055B-4354-B212-4D2A37AA0B7C}"/>
+                <a16:creationId xmlns:a16="http://schemas.microsoft.com/office/drawing/2014/main" id="{273406F5-90C1-463B-857B-4DE68EA620CB}"/>
               </a:ext>
             </a:extLst>
           </p:cNvPr>
@@ -5527,7 +5527,7 @@
           <p:cNvPr id="57" name="cell-bg-4-1-180">
             <a:extLst xmlns:a="http://schemas.openxmlformats.org/drawingml/2006/main">
               <a:ext uri="{FF2B5EF4-FFF2-40B4-BE49-F238E27FC236}">
-                <a16:creationId xmlns:a16="http://schemas.microsoft.com/office/drawing/2014/main" id="{949FD222-F2C8-4A99-8676-46A189561B47}"/>
+                <a16:creationId xmlns:a16="http://schemas.microsoft.com/office/drawing/2014/main" id="{2DEF9992-54B9-40B8-A88B-9A0B5A569017}"/>
               </a:ext>
             </a:extLst>
           </p:cNvPr>
@@ -5560,7 +5560,7 @@
           <p:cNvPr id="58" name="cell-4-1-180">
             <a:extLst xmlns:a="http://schemas.openxmlformats.org/drawingml/2006/main">
               <a:ext uri="{FF2B5EF4-FFF2-40B4-BE49-F238E27FC236}">
-                <a16:creationId xmlns:a16="http://schemas.microsoft.com/office/drawing/2014/main" id="{100DB1AF-52AD-4585-BD29-A5325C474B10}"/>
+                <a16:creationId xmlns:a16="http://schemas.microsoft.com/office/drawing/2014/main" id="{9BB09770-827E-4A2D-8249-85D7C654A428}"/>
               </a:ext>
             </a:extLst>
           </p:cNvPr>
@@ -5618,7 +5618,7 @@
           <p:cNvPr id="59" name="cell-bg-4-2-180">
             <a:extLst xmlns:a="http://schemas.openxmlformats.org/drawingml/2006/main">
               <a:ext uri="{FF2B5EF4-FFF2-40B4-BE49-F238E27FC236}">
-                <a16:creationId xmlns:a16="http://schemas.microsoft.com/office/drawing/2014/main" id="{8093B444-8B5E-419F-A904-2130CE1A4F0A}"/>
+                <a16:creationId xmlns:a16="http://schemas.microsoft.com/office/drawing/2014/main" id="{CC7D763C-4162-4324-A5B1-0AA3F53C3D44}"/>
               </a:ext>
             </a:extLst>
           </p:cNvPr>
@@ -5651,7 +5651,7 @@
           <p:cNvPr id="60" name="cell-4-2-180">
             <a:extLst xmlns:a="http://schemas.openxmlformats.org/drawingml/2006/main">
               <a:ext uri="{FF2B5EF4-FFF2-40B4-BE49-F238E27FC236}">
-                <a16:creationId xmlns:a16="http://schemas.microsoft.com/office/drawing/2014/main" id="{655E15DE-1478-413D-B2B0-E53D65136ECC}"/>
+                <a16:creationId xmlns:a16="http://schemas.microsoft.com/office/drawing/2014/main" id="{482C8B64-8A2A-4459-9E44-158315DF05AC}"/>
               </a:ext>
             </a:extLst>
           </p:cNvPr>
@@ -5709,7 +5709,7 @@
           <p:cNvPr id="61" name="cell-bg-4-3-180">
             <a:extLst xmlns:a="http://schemas.openxmlformats.org/drawingml/2006/main">
               <a:ext uri="{FF2B5EF4-FFF2-40B4-BE49-F238E27FC236}">
-                <a16:creationId xmlns:a16="http://schemas.microsoft.com/office/drawing/2014/main" id="{049C1647-E096-4EBD-9A75-7E164129200E}"/>
+                <a16:creationId xmlns:a16="http://schemas.microsoft.com/office/drawing/2014/main" id="{4A36B871-1F3A-454B-8C18-6CEE0D2893AD}"/>
               </a:ext>
             </a:extLst>
           </p:cNvPr>
@@ -5742,7 +5742,7 @@
           <p:cNvPr id="62" name="cell-4-3-180">
             <a:extLst xmlns:a="http://schemas.openxmlformats.org/drawingml/2006/main">
               <a:ext uri="{FF2B5EF4-FFF2-40B4-BE49-F238E27FC236}">
-                <a16:creationId xmlns:a16="http://schemas.microsoft.com/office/drawing/2014/main" id="{C20BEDC8-8EDF-45E2-B777-4D2370405AF0}"/>
+                <a16:creationId xmlns:a16="http://schemas.microsoft.com/office/drawing/2014/main" id="{F5C88A1F-D18A-4B22-BD56-47C153373262}"/>
               </a:ext>
             </a:extLst>
           </p:cNvPr>
@@ -5800,7 +5800,7 @@
           <p:cNvPr id="63" name="cell-bg-4-4-180">
             <a:extLst xmlns:a="http://schemas.openxmlformats.org/drawingml/2006/main">
               <a:ext uri="{FF2B5EF4-FFF2-40B4-BE49-F238E27FC236}">
-                <a16:creationId xmlns:a16="http://schemas.microsoft.com/office/drawing/2014/main" id="{493686B1-C565-4DF3-9187-E30D97416828}"/>
+                <a16:creationId xmlns:a16="http://schemas.microsoft.com/office/drawing/2014/main" id="{9E221E3F-2315-4490-B6A9-771D16069612}"/>
               </a:ext>
             </a:extLst>
           </p:cNvPr>
@@ -5833,7 +5833,7 @@
           <p:cNvPr id="64" name="cell-4-4-180">
             <a:extLst xmlns:a="http://schemas.openxmlformats.org/drawingml/2006/main">
               <a:ext uri="{FF2B5EF4-FFF2-40B4-BE49-F238E27FC236}">
-                <a16:creationId xmlns:a16="http://schemas.microsoft.com/office/drawing/2014/main" id="{B0C15E9F-6F1F-4164-B8AD-3F1FF12B75AA}"/>
+                <a16:creationId xmlns:a16="http://schemas.microsoft.com/office/drawing/2014/main" id="{CBB381AE-C222-4415-929A-7426468D624C}"/>
               </a:ext>
             </a:extLst>
           </p:cNvPr>
@@ -5889,7 +5889,7 @@
     </p:spTree>
     <p:extLst>
       <p:ext uri="{BB962C8B-B14F-4D97-AF65-F5344CB8AC3E}">
-        <p14:creationId xmlns:p14="http://schemas.microsoft.com/office/powerpoint/2010/main" val="2128997644"/>
+        <p14:creationId xmlns:p14="http://schemas.microsoft.com/office/powerpoint/2010/main" val="1254271625"/>
       </p:ext>
     </p:extLst>
   </p:cSld>
@@ -5920,7 +5920,7 @@
           <p:cNvPr id="13" name="title-4">
             <a:extLst xmlns:a="http://schemas.openxmlformats.org/drawingml/2006/main">
               <a:ext uri="{FF2B5EF4-FFF2-40B4-BE49-F238E27FC236}">
-                <a16:creationId xmlns:a16="http://schemas.microsoft.com/office/drawing/2014/main" id="{7754C07B-ECC6-412E-A837-59502A4CF3D1}"/>
+                <a16:creationId xmlns:a16="http://schemas.microsoft.com/office/drawing/2014/main" id="{AC0E2F33-8AB5-465C-BB5C-C81D21A6E25D}"/>
               </a:ext>
             </a:extLst>
           </p:cNvPr>
@@ -5978,7 +5978,7 @@
           <p:cNvPr id="2" name="subtitle-4">
             <a:extLst xmlns:a="http://schemas.openxmlformats.org/drawingml/2006/main">
               <a:ext uri="{FF2B5EF4-FFF2-40B4-BE49-F238E27FC236}">
-                <a16:creationId xmlns:a16="http://schemas.microsoft.com/office/drawing/2014/main" id="{D3B39A52-DF44-401C-A417-D50D983E233C}"/>
+                <a16:creationId xmlns:a16="http://schemas.microsoft.com/office/drawing/2014/main" id="{EBC86A83-34B3-46D9-8412-2C4FF4843AF9}"/>
               </a:ext>
             </a:extLst>
           </p:cNvPr>
@@ -6036,7 +6036,7 @@
           <p:cNvPr id="3" name="footer-4">
             <a:extLst xmlns:a="http://schemas.openxmlformats.org/drawingml/2006/main">
               <a:ext uri="{FF2B5EF4-FFF2-40B4-BE49-F238E27FC236}">
-                <a16:creationId xmlns:a16="http://schemas.microsoft.com/office/drawing/2014/main" id="{74AC895B-0396-4F5B-A9BD-0F208B0FCE61}"/>
+                <a16:creationId xmlns:a16="http://schemas.microsoft.com/office/drawing/2014/main" id="{F3FDE462-E6AE-4304-9F1B-6169646535B5}"/>
               </a:ext>
             </a:extLst>
           </p:cNvPr>
@@ -6084,7 +6084,7 @@
                 <a:ea typeface="PingFang SC"/>
                 <a:cs typeface="PingFang SC"/>
               </a:rPr>
-              <a:t>ShopFlow v2.6  |  shopflow-5bfd99fc6000</a:t>
+              <a:t>ShopFlow v2.6  |  shopflow-41d613d1137b</a:t>
             </a:r>
           </a:p>
         </p:txBody>
@@ -6094,7 +6094,7 @@
           <p:cNvPr id="4" name="page-4">
             <a:extLst xmlns:a="http://schemas.openxmlformats.org/drawingml/2006/main">
               <a:ext uri="{FF2B5EF4-FFF2-40B4-BE49-F238E27FC236}">
-                <a16:creationId xmlns:a16="http://schemas.microsoft.com/office/drawing/2014/main" id="{842B40C7-4C2E-4512-B58B-FAB7AAF23D57}"/>
+                <a16:creationId xmlns:a16="http://schemas.microsoft.com/office/drawing/2014/main" id="{744CD394-9E80-4A73-9C6E-49F2E3D8ADA6}"/>
               </a:ext>
             </a:extLst>
           </p:cNvPr>
@@ -6152,7 +6152,7 @@
           <p:cNvPr id="5" name="bug-left">
             <a:extLst xmlns:a="http://schemas.openxmlformats.org/drawingml/2006/main">
               <a:ext uri="{FF2B5EF4-FFF2-40B4-BE49-F238E27FC236}">
-                <a16:creationId xmlns:a16="http://schemas.microsoft.com/office/drawing/2014/main" id="{60F171AD-442B-4135-84D8-6AF20E3C8266}"/>
+                <a16:creationId xmlns:a16="http://schemas.microsoft.com/office/drawing/2014/main" id="{C9F47268-F66B-4F0C-9F0F-FB64E33D94A3}"/>
               </a:ext>
             </a:extLst>
           </p:cNvPr>
@@ -6183,7 +6183,7 @@
           <p:cNvPr id="6" name="bug-code-title">
             <a:extLst xmlns:a="http://schemas.openxmlformats.org/drawingml/2006/main">
               <a:ext uri="{FF2B5EF4-FFF2-40B4-BE49-F238E27FC236}">
-                <a16:creationId xmlns:a16="http://schemas.microsoft.com/office/drawing/2014/main" id="{47C1378D-377E-4D11-9498-4096679BA16D}"/>
+                <a16:creationId xmlns:a16="http://schemas.microsoft.com/office/drawing/2014/main" id="{9A04A521-A170-427A-9E8B-F15179A582DF}"/>
               </a:ext>
             </a:extLst>
           </p:cNvPr>
@@ -6241,7 +6241,7 @@
           <p:cNvPr id="7" name="bug-code">
             <a:extLst xmlns:a="http://schemas.openxmlformats.org/drawingml/2006/main">
               <a:ext uri="{FF2B5EF4-FFF2-40B4-BE49-F238E27FC236}">
-                <a16:creationId xmlns:a16="http://schemas.microsoft.com/office/drawing/2014/main" id="{352D6332-D1DD-4F30-AF10-AF8467066FDE}"/>
+                <a16:creationId xmlns:a16="http://schemas.microsoft.com/office/drawing/2014/main" id="{25D7741F-1B9D-47A4-A84D-7A7B302BA71C}"/>
               </a:ext>
             </a:extLst>
           </p:cNvPr>
@@ -6437,7 +6437,7 @@
           <p:cNvPr id="8" name="bug-risk">
             <a:extLst xmlns:a="http://schemas.openxmlformats.org/drawingml/2006/main">
               <a:ext uri="{FF2B5EF4-FFF2-40B4-BE49-F238E27FC236}">
-                <a16:creationId xmlns:a16="http://schemas.microsoft.com/office/drawing/2014/main" id="{80067787-8120-4441-B178-1BFE3352A798}"/>
+                <a16:creationId xmlns:a16="http://schemas.microsoft.com/office/drawing/2014/main" id="{B36FA824-AB22-4E70-BFDE-130506E160BA}"/>
               </a:ext>
             </a:extLst>
           </p:cNvPr>
@@ -6468,7 +6468,7 @@
           <p:cNvPr id="9" name="bug-risk-title">
             <a:extLst xmlns:a="http://schemas.openxmlformats.org/drawingml/2006/main">
               <a:ext uri="{FF2B5EF4-FFF2-40B4-BE49-F238E27FC236}">
-                <a16:creationId xmlns:a16="http://schemas.microsoft.com/office/drawing/2014/main" id="{2C1A327E-B292-49BB-BB72-3894AE36E11F}"/>
+                <a16:creationId xmlns:a16="http://schemas.microsoft.com/office/drawing/2014/main" id="{ADB6104B-933F-43E1-8761-31D33A409F65}"/>
               </a:ext>
             </a:extLst>
           </p:cNvPr>
@@ -6526,7 +6526,7 @@
           <p:cNvPr id="10" name="bug-risk-body">
             <a:extLst xmlns:a="http://schemas.openxmlformats.org/drawingml/2006/main">
               <a:ext uri="{FF2B5EF4-FFF2-40B4-BE49-F238E27FC236}">
-                <a16:creationId xmlns:a16="http://schemas.microsoft.com/office/drawing/2014/main" id="{92867282-4136-4305-A36D-79EC348C705D}"/>
+                <a16:creationId xmlns:a16="http://schemas.microsoft.com/office/drawing/2014/main" id="{DCEBFB52-33AD-49C8-B3F5-9FC9443E6566}"/>
               </a:ext>
             </a:extLst>
           </p:cNvPr>
@@ -6584,7 +6584,7 @@
           <p:cNvPr id="11" name="bug-action-title">
             <a:extLst xmlns:a="http://schemas.openxmlformats.org/drawingml/2006/main">
               <a:ext uri="{FF2B5EF4-FFF2-40B4-BE49-F238E27FC236}">
-                <a16:creationId xmlns:a16="http://schemas.microsoft.com/office/drawing/2014/main" id="{4917733C-1248-4070-9B8E-8BDF792A72A1}"/>
+                <a16:creationId xmlns:a16="http://schemas.microsoft.com/office/drawing/2014/main" id="{2443B965-2948-452E-B364-29DFE681507E}"/>
               </a:ext>
             </a:extLst>
           </p:cNvPr>
@@ -6642,7 +6642,7 @@
           <p:cNvPr id="12" name="bug-action-body">
             <a:extLst xmlns:a="http://schemas.openxmlformats.org/drawingml/2006/main">
               <a:ext uri="{FF2B5EF4-FFF2-40B4-BE49-F238E27FC236}">
-                <a16:creationId xmlns:a16="http://schemas.microsoft.com/office/drawing/2014/main" id="{BBE911F1-EF79-45AA-B94F-FBAEED8E4F83}"/>
+                <a16:creationId xmlns:a16="http://schemas.microsoft.com/office/drawing/2014/main" id="{10F74690-084A-43C3-B3E7-17E2569CDE43}"/>
               </a:ext>
             </a:extLst>
           </p:cNvPr>
@@ -6767,7 +6767,7 @@
     </p:spTree>
     <p:extLst>
       <p:ext uri="{BB962C8B-B14F-4D97-AF65-F5344CB8AC3E}">
-        <p14:creationId xmlns:p14="http://schemas.microsoft.com/office/powerpoint/2010/main" val="12648334"/>
+        <p14:creationId xmlns:p14="http://schemas.microsoft.com/office/powerpoint/2010/main" val="29300738"/>
       </p:ext>
     </p:extLst>
   </p:cSld>
@@ -6798,7 +6798,7 @@
           <p:cNvPr id="45" name="title-5">
             <a:extLst xmlns:a="http://schemas.openxmlformats.org/drawingml/2006/main">
               <a:ext uri="{FF2B5EF4-FFF2-40B4-BE49-F238E27FC236}">
-                <a16:creationId xmlns:a16="http://schemas.microsoft.com/office/drawing/2014/main" id="{1B946B46-CCCF-48EF-8417-A05FCABC722A}"/>
+                <a16:creationId xmlns:a16="http://schemas.microsoft.com/office/drawing/2014/main" id="{94B07579-9F7E-4086-9D42-844FDA2ACC78}"/>
               </a:ext>
             </a:extLst>
           </p:cNvPr>
@@ -6856,7 +6856,7 @@
           <p:cNvPr id="2" name="subtitle-5">
             <a:extLst xmlns:a="http://schemas.openxmlformats.org/drawingml/2006/main">
               <a:ext uri="{FF2B5EF4-FFF2-40B4-BE49-F238E27FC236}">
-                <a16:creationId xmlns:a16="http://schemas.microsoft.com/office/drawing/2014/main" id="{64849FDE-61EF-4CDC-A7F6-F72EEBA5BD9D}"/>
+                <a16:creationId xmlns:a16="http://schemas.microsoft.com/office/drawing/2014/main" id="{BEE1FCC3-68CD-4407-9B63-312A8B840D24}"/>
               </a:ext>
             </a:extLst>
           </p:cNvPr>
@@ -6914,7 +6914,7 @@
           <p:cNvPr id="3" name="footer-5">
             <a:extLst xmlns:a="http://schemas.openxmlformats.org/drawingml/2006/main">
               <a:ext uri="{FF2B5EF4-FFF2-40B4-BE49-F238E27FC236}">
-                <a16:creationId xmlns:a16="http://schemas.microsoft.com/office/drawing/2014/main" id="{E90E2DFE-F6B1-4157-AF71-FFB059C71B75}"/>
+                <a16:creationId xmlns:a16="http://schemas.microsoft.com/office/drawing/2014/main" id="{0CC35BBC-CA74-4FEF-980A-BA5E2FDAC072}"/>
               </a:ext>
             </a:extLst>
           </p:cNvPr>
@@ -6962,7 +6962,7 @@
                 <a:ea typeface="PingFang SC"/>
                 <a:cs typeface="PingFang SC"/>
               </a:rPr>
-              <a:t>ShopFlow v2.6  |  shopflow-5bfd99fc6000</a:t>
+              <a:t>ShopFlow v2.6  |  shopflow-41d613d1137b</a:t>
             </a:r>
           </a:p>
         </p:txBody>
@@ -6972,7 +6972,7 @@
           <p:cNvPr id="4" name="page-5">
             <a:extLst xmlns:a="http://schemas.openxmlformats.org/drawingml/2006/main">
               <a:ext uri="{FF2B5EF4-FFF2-40B4-BE49-F238E27FC236}">
-                <a16:creationId xmlns:a16="http://schemas.microsoft.com/office/drawing/2014/main" id="{D95F133C-BE77-4B67-BA05-7FFE4E68F460}"/>
+                <a16:creationId xmlns:a16="http://schemas.microsoft.com/office/drawing/2014/main" id="{C3D7BE62-0EC7-4826-8485-D17AC5B832B9}"/>
               </a:ext>
             </a:extLst>
           </p:cNvPr>
@@ -7030,7 +7030,7 @@
           <p:cNvPr id="5" name="impact-head-bg-0">
             <a:extLst xmlns:a="http://schemas.openxmlformats.org/drawingml/2006/main">
               <a:ext uri="{FF2B5EF4-FFF2-40B4-BE49-F238E27FC236}">
-                <a16:creationId xmlns:a16="http://schemas.microsoft.com/office/drawing/2014/main" id="{D3D332A2-DB0D-4A99-92B1-34C3B58E84CC}"/>
+                <a16:creationId xmlns:a16="http://schemas.microsoft.com/office/drawing/2014/main" id="{4646D9C7-F6B3-47AD-AA08-1C656EDCFC0D}"/>
               </a:ext>
             </a:extLst>
           </p:cNvPr>
@@ -7061,7 +7061,7 @@
           <p:cNvPr id="6" name="impact-head-0">
             <a:extLst xmlns:a="http://schemas.openxmlformats.org/drawingml/2006/main">
               <a:ext uri="{FF2B5EF4-FFF2-40B4-BE49-F238E27FC236}">
-                <a16:creationId xmlns:a16="http://schemas.microsoft.com/office/drawing/2014/main" id="{8ADB0978-C182-4F58-BCF0-B2C3374B85CF}"/>
+                <a16:creationId xmlns:a16="http://schemas.microsoft.com/office/drawing/2014/main" id="{CB92DB5F-D8B4-4EE6-AA74-0D192AADC2EB}"/>
               </a:ext>
             </a:extLst>
           </p:cNvPr>
@@ -7119,7 +7119,7 @@
           <p:cNvPr id="7" name="impact-head-bg-1">
             <a:extLst xmlns:a="http://schemas.openxmlformats.org/drawingml/2006/main">
               <a:ext uri="{FF2B5EF4-FFF2-40B4-BE49-F238E27FC236}">
-                <a16:creationId xmlns:a16="http://schemas.microsoft.com/office/drawing/2014/main" id="{9A3CCA03-8471-4AEA-A3D6-AEF115E2DCFD}"/>
+                <a16:creationId xmlns:a16="http://schemas.microsoft.com/office/drawing/2014/main" id="{EB85BFC5-030E-41F0-B008-C539F8382C94}"/>
               </a:ext>
             </a:extLst>
           </p:cNvPr>
@@ -7150,7 +7150,7 @@
           <p:cNvPr id="8" name="impact-head-1">
             <a:extLst xmlns:a="http://schemas.openxmlformats.org/drawingml/2006/main">
               <a:ext uri="{FF2B5EF4-FFF2-40B4-BE49-F238E27FC236}">
-                <a16:creationId xmlns:a16="http://schemas.microsoft.com/office/drawing/2014/main" id="{1E55A36C-BA37-4A62-B5CA-C50D4705D501}"/>
+                <a16:creationId xmlns:a16="http://schemas.microsoft.com/office/drawing/2014/main" id="{3D7801AA-7DD7-4B63-8802-F5EACF8F2D35}"/>
               </a:ext>
             </a:extLst>
           </p:cNvPr>
@@ -7208,7 +7208,7 @@
           <p:cNvPr id="9" name="impact-head-bg-2">
             <a:extLst xmlns:a="http://schemas.openxmlformats.org/drawingml/2006/main">
               <a:ext uri="{FF2B5EF4-FFF2-40B4-BE49-F238E27FC236}">
-                <a16:creationId xmlns:a16="http://schemas.microsoft.com/office/drawing/2014/main" id="{9EA38CCC-7511-4082-9C3D-41789C9D4B57}"/>
+                <a16:creationId xmlns:a16="http://schemas.microsoft.com/office/drawing/2014/main" id="{87E02FE9-33CF-4FA8-8ECE-D9C2795EA6C5}"/>
               </a:ext>
             </a:extLst>
           </p:cNvPr>
@@ -7239,7 +7239,7 @@
           <p:cNvPr id="10" name="impact-head-2">
             <a:extLst xmlns:a="http://schemas.openxmlformats.org/drawingml/2006/main">
               <a:ext uri="{FF2B5EF4-FFF2-40B4-BE49-F238E27FC236}">
-                <a16:creationId xmlns:a16="http://schemas.microsoft.com/office/drawing/2014/main" id="{7E175706-0D7E-4707-9726-E7B6DB28E916}"/>
+                <a16:creationId xmlns:a16="http://schemas.microsoft.com/office/drawing/2014/main" id="{E402667E-9611-4B76-84D4-C4C5D9C2BEBD}"/>
               </a:ext>
             </a:extLst>
           </p:cNvPr>
@@ -7297,7 +7297,7 @@
           <p:cNvPr id="11" name="impact-head-bg-3">
             <a:extLst xmlns:a="http://schemas.openxmlformats.org/drawingml/2006/main">
               <a:ext uri="{FF2B5EF4-FFF2-40B4-BE49-F238E27FC236}">
-                <a16:creationId xmlns:a16="http://schemas.microsoft.com/office/drawing/2014/main" id="{CBFBE9D7-9FF3-4068-9C06-D411B988AF3B}"/>
+                <a16:creationId xmlns:a16="http://schemas.microsoft.com/office/drawing/2014/main" id="{5C775133-1193-492B-97BA-34D784A7D971}"/>
               </a:ext>
             </a:extLst>
           </p:cNvPr>
@@ -7328,7 +7328,7 @@
           <p:cNvPr id="12" name="impact-head-3">
             <a:extLst xmlns:a="http://schemas.openxmlformats.org/drawingml/2006/main">
               <a:ext uri="{FF2B5EF4-FFF2-40B4-BE49-F238E27FC236}">
-                <a16:creationId xmlns:a16="http://schemas.microsoft.com/office/drawing/2014/main" id="{85AF7A73-C805-4E78-AD28-83F3750B2C6B}"/>
+                <a16:creationId xmlns:a16="http://schemas.microsoft.com/office/drawing/2014/main" id="{2C922B63-FE99-43B6-96FE-3C5C0B3F9FC6}"/>
               </a:ext>
             </a:extLst>
           </p:cNvPr>
@@ -7386,7 +7386,7 @@
           <p:cNvPr id="13" name="impact-bg-0-0">
             <a:extLst xmlns:a="http://schemas.openxmlformats.org/drawingml/2006/main">
               <a:ext uri="{FF2B5EF4-FFF2-40B4-BE49-F238E27FC236}">
-                <a16:creationId xmlns:a16="http://schemas.microsoft.com/office/drawing/2014/main" id="{BC5ADA12-6913-423B-96C0-ED3A043DCBE4}"/>
+                <a16:creationId xmlns:a16="http://schemas.microsoft.com/office/drawing/2014/main" id="{8520F993-567C-4C36-A343-FFC0F7EB49B0}"/>
               </a:ext>
             </a:extLst>
           </p:cNvPr>
@@ -7419,7 +7419,7 @@
           <p:cNvPr id="14" name="impact-0-0">
             <a:extLst xmlns:a="http://schemas.openxmlformats.org/drawingml/2006/main">
               <a:ext uri="{FF2B5EF4-FFF2-40B4-BE49-F238E27FC236}">
-                <a16:creationId xmlns:a16="http://schemas.microsoft.com/office/drawing/2014/main" id="{9BDC10ED-86E0-4DE8-ACD3-BB7F47BA9DDC}"/>
+                <a16:creationId xmlns:a16="http://schemas.microsoft.com/office/drawing/2014/main" id="{47BC976A-94B5-44C0-8D5A-FCA9E5927BAC}"/>
               </a:ext>
             </a:extLst>
           </p:cNvPr>
@@ -7477,7 +7477,7 @@
           <p:cNvPr id="15" name="impact-bg-0-1">
             <a:extLst xmlns:a="http://schemas.openxmlformats.org/drawingml/2006/main">
               <a:ext uri="{FF2B5EF4-FFF2-40B4-BE49-F238E27FC236}">
-                <a16:creationId xmlns:a16="http://schemas.microsoft.com/office/drawing/2014/main" id="{7D3077EE-1FAD-4404-BB46-EF06BBAEA64A}"/>
+                <a16:creationId xmlns:a16="http://schemas.microsoft.com/office/drawing/2014/main" id="{8CD1D23A-AB66-4331-A669-1400193E45EF}"/>
               </a:ext>
             </a:extLst>
           </p:cNvPr>
@@ -7510,7 +7510,7 @@
           <p:cNvPr id="16" name="impact-0-1">
             <a:extLst xmlns:a="http://schemas.openxmlformats.org/drawingml/2006/main">
               <a:ext uri="{FF2B5EF4-FFF2-40B4-BE49-F238E27FC236}">
-                <a16:creationId xmlns:a16="http://schemas.microsoft.com/office/drawing/2014/main" id="{9C855E76-1D84-429C-ABDC-CBAE5BBC316C}"/>
+                <a16:creationId xmlns:a16="http://schemas.microsoft.com/office/drawing/2014/main" id="{0986C5EC-210E-406E-9115-5DD0A45BD11F}"/>
               </a:ext>
             </a:extLst>
           </p:cNvPr>
@@ -7568,7 +7568,7 @@
           <p:cNvPr id="17" name="impact-bg-0-2">
             <a:extLst xmlns:a="http://schemas.openxmlformats.org/drawingml/2006/main">
               <a:ext uri="{FF2B5EF4-FFF2-40B4-BE49-F238E27FC236}">
-                <a16:creationId xmlns:a16="http://schemas.microsoft.com/office/drawing/2014/main" id="{FA83DBFA-6D29-486D-AE38-01636CFDBF10}"/>
+                <a16:creationId xmlns:a16="http://schemas.microsoft.com/office/drawing/2014/main" id="{4CF2ABFC-5D75-48FA-97B7-0FBE37AF31E1}"/>
               </a:ext>
             </a:extLst>
           </p:cNvPr>
@@ -7601,7 +7601,7 @@
           <p:cNvPr id="18" name="impact-0-2">
             <a:extLst xmlns:a="http://schemas.openxmlformats.org/drawingml/2006/main">
               <a:ext uri="{FF2B5EF4-FFF2-40B4-BE49-F238E27FC236}">
-                <a16:creationId xmlns:a16="http://schemas.microsoft.com/office/drawing/2014/main" id="{26B78C43-BF97-4EB1-BCD2-6BC517638FBC}"/>
+                <a16:creationId xmlns:a16="http://schemas.microsoft.com/office/drawing/2014/main" id="{C1B8C47C-4856-45AD-9D4E-1053B011B10F}"/>
               </a:ext>
             </a:extLst>
           </p:cNvPr>
@@ -7659,7 +7659,7 @@
           <p:cNvPr id="19" name="impact-bg-0-3">
             <a:extLst xmlns:a="http://schemas.openxmlformats.org/drawingml/2006/main">
               <a:ext uri="{FF2B5EF4-FFF2-40B4-BE49-F238E27FC236}">
-                <a16:creationId xmlns:a16="http://schemas.microsoft.com/office/drawing/2014/main" id="{4C9F0D52-9A2A-4D52-BEDD-E48F915C5C0E}"/>
+                <a16:creationId xmlns:a16="http://schemas.microsoft.com/office/drawing/2014/main" id="{7C5E73BC-70E8-4754-895B-97E393DA2D79}"/>
               </a:ext>
             </a:extLst>
           </p:cNvPr>
@@ -7692,7 +7692,7 @@
           <p:cNvPr id="20" name="impact-0-3">
             <a:extLst xmlns:a="http://schemas.openxmlformats.org/drawingml/2006/main">
               <a:ext uri="{FF2B5EF4-FFF2-40B4-BE49-F238E27FC236}">
-                <a16:creationId xmlns:a16="http://schemas.microsoft.com/office/drawing/2014/main" id="{82F32FAD-D0AB-4D14-8F95-D04E0A1A8BA7}"/>
+                <a16:creationId xmlns:a16="http://schemas.microsoft.com/office/drawing/2014/main" id="{96BAF71B-D689-402A-81C8-A2BB34D6E9BF}"/>
               </a:ext>
             </a:extLst>
           </p:cNvPr>
@@ -7750,7 +7750,7 @@
           <p:cNvPr id="21" name="impact-bg-1-0">
             <a:extLst xmlns:a="http://schemas.openxmlformats.org/drawingml/2006/main">
               <a:ext uri="{FF2B5EF4-FFF2-40B4-BE49-F238E27FC236}">
-                <a16:creationId xmlns:a16="http://schemas.microsoft.com/office/drawing/2014/main" id="{31C1B21C-AC1D-4466-B05E-DE0A74398E1F}"/>
+                <a16:creationId xmlns:a16="http://schemas.microsoft.com/office/drawing/2014/main" id="{15F0399D-54E7-495F-9217-CE73E13C4555}"/>
               </a:ext>
             </a:extLst>
           </p:cNvPr>
@@ -7783,7 +7783,7 @@
           <p:cNvPr id="22" name="impact-1-0">
             <a:extLst xmlns:a="http://schemas.openxmlformats.org/drawingml/2006/main">
               <a:ext uri="{FF2B5EF4-FFF2-40B4-BE49-F238E27FC236}">
-                <a16:creationId xmlns:a16="http://schemas.microsoft.com/office/drawing/2014/main" id="{1A371DA1-EAE0-4C7E-8736-AC0D9DEA0E50}"/>
+                <a16:creationId xmlns:a16="http://schemas.microsoft.com/office/drawing/2014/main" id="{3C66DE44-E535-4DA3-A6C6-CCDDF85AD581}"/>
               </a:ext>
             </a:extLst>
           </p:cNvPr>
@@ -7841,7 +7841,7 @@
           <p:cNvPr id="23" name="impact-bg-1-1">
             <a:extLst xmlns:a="http://schemas.openxmlformats.org/drawingml/2006/main">
               <a:ext uri="{FF2B5EF4-FFF2-40B4-BE49-F238E27FC236}">
-                <a16:creationId xmlns:a16="http://schemas.microsoft.com/office/drawing/2014/main" id="{FE3E9E9E-D096-451C-8E05-D1E1C8E7E00A}"/>
+                <a16:creationId xmlns:a16="http://schemas.microsoft.com/office/drawing/2014/main" id="{62A0971F-422C-4D8E-A967-9F352127B723}"/>
               </a:ext>
             </a:extLst>
           </p:cNvPr>
@@ -7874,7 +7874,7 @@
           <p:cNvPr id="24" name="impact-1-1">
             <a:extLst xmlns:a="http://schemas.openxmlformats.org/drawingml/2006/main">
               <a:ext uri="{FF2B5EF4-FFF2-40B4-BE49-F238E27FC236}">
-                <a16:creationId xmlns:a16="http://schemas.microsoft.com/office/drawing/2014/main" id="{247E7939-9521-4FC7-8CAC-98915C2820AF}"/>
+                <a16:creationId xmlns:a16="http://schemas.microsoft.com/office/drawing/2014/main" id="{57FC5EB3-EA3E-4CAB-9358-03581632029E}"/>
               </a:ext>
             </a:extLst>
           </p:cNvPr>
@@ -7932,7 +7932,7 @@
           <p:cNvPr id="25" name="impact-bg-1-2">
             <a:extLst xmlns:a="http://schemas.openxmlformats.org/drawingml/2006/main">
               <a:ext uri="{FF2B5EF4-FFF2-40B4-BE49-F238E27FC236}">
-                <a16:creationId xmlns:a16="http://schemas.microsoft.com/office/drawing/2014/main" id="{4DE9CBCF-12D5-41F4-820E-5197415D8319}"/>
+                <a16:creationId xmlns:a16="http://schemas.microsoft.com/office/drawing/2014/main" id="{DB489DFF-1395-4CE6-B446-E6A7641DE655}"/>
               </a:ext>
             </a:extLst>
           </p:cNvPr>
@@ -7965,7 +7965,7 @@
           <p:cNvPr id="26" name="impact-1-2">
             <a:extLst xmlns:a="http://schemas.openxmlformats.org/drawingml/2006/main">
               <a:ext uri="{FF2B5EF4-FFF2-40B4-BE49-F238E27FC236}">
-                <a16:creationId xmlns:a16="http://schemas.microsoft.com/office/drawing/2014/main" id="{574D481C-7576-45AD-BE13-CEF1A72FF740}"/>
+                <a16:creationId xmlns:a16="http://schemas.microsoft.com/office/drawing/2014/main" id="{3BB48E97-22B6-48C8-814D-22DE19CDF64D}"/>
               </a:ext>
             </a:extLst>
           </p:cNvPr>
@@ -8023,7 +8023,7 @@
           <p:cNvPr id="27" name="impact-bg-1-3">
             <a:extLst xmlns:a="http://schemas.openxmlformats.org/drawingml/2006/main">
               <a:ext uri="{FF2B5EF4-FFF2-40B4-BE49-F238E27FC236}">
-                <a16:creationId xmlns:a16="http://schemas.microsoft.com/office/drawing/2014/main" id="{9DDF0B82-96D2-4D6B-BBE1-CAD10120E63E}"/>
+                <a16:creationId xmlns:a16="http://schemas.microsoft.com/office/drawing/2014/main" id="{941BCE97-C64F-4E3F-9707-A1B86D1292FD}"/>
               </a:ext>
             </a:extLst>
           </p:cNvPr>
@@ -8056,7 +8056,7 @@
           <p:cNvPr id="28" name="impact-1-3">
             <a:extLst xmlns:a="http://schemas.openxmlformats.org/drawingml/2006/main">
               <a:ext uri="{FF2B5EF4-FFF2-40B4-BE49-F238E27FC236}">
-                <a16:creationId xmlns:a16="http://schemas.microsoft.com/office/drawing/2014/main" id="{135DE86E-012F-44E3-83B3-D5C3902ED54F}"/>
+                <a16:creationId xmlns:a16="http://schemas.microsoft.com/office/drawing/2014/main" id="{158B1E86-52B0-4062-ADD9-08BB4B13AAF7}"/>
               </a:ext>
             </a:extLst>
           </p:cNvPr>
@@ -8114,7 +8114,7 @@
           <p:cNvPr id="29" name="impact-bg-2-0">
             <a:extLst xmlns:a="http://schemas.openxmlformats.org/drawingml/2006/main">
               <a:ext uri="{FF2B5EF4-FFF2-40B4-BE49-F238E27FC236}">
-                <a16:creationId xmlns:a16="http://schemas.microsoft.com/office/drawing/2014/main" id="{5B3B2064-EEEE-4B8E-A251-E7E940B55D0B}"/>
+                <a16:creationId xmlns:a16="http://schemas.microsoft.com/office/drawing/2014/main" id="{96EA28BC-B7A3-4B8A-B2F9-C33E16E9F7BA}"/>
               </a:ext>
             </a:extLst>
           </p:cNvPr>
@@ -8147,7 +8147,7 @@
           <p:cNvPr id="30" name="impact-2-0">
             <a:extLst xmlns:a="http://schemas.openxmlformats.org/drawingml/2006/main">
               <a:ext uri="{FF2B5EF4-FFF2-40B4-BE49-F238E27FC236}">
-                <a16:creationId xmlns:a16="http://schemas.microsoft.com/office/drawing/2014/main" id="{D3D55391-A713-4EEF-9F52-00C63A58942D}"/>
+                <a16:creationId xmlns:a16="http://schemas.microsoft.com/office/drawing/2014/main" id="{778E6559-5586-4EBF-8923-174F1775A6E0}"/>
               </a:ext>
             </a:extLst>
           </p:cNvPr>
@@ -8205,7 +8205,7 @@
           <p:cNvPr id="31" name="impact-bg-2-1">
             <a:extLst xmlns:a="http://schemas.openxmlformats.org/drawingml/2006/main">
               <a:ext uri="{FF2B5EF4-FFF2-40B4-BE49-F238E27FC236}">
-                <a16:creationId xmlns:a16="http://schemas.microsoft.com/office/drawing/2014/main" id="{19048480-9988-47B2-8C69-00D2CE235E02}"/>
+                <a16:creationId xmlns:a16="http://schemas.microsoft.com/office/drawing/2014/main" id="{91346018-6AC0-4612-A1AC-7D837200BF20}"/>
               </a:ext>
             </a:extLst>
           </p:cNvPr>
@@ -8238,7 +8238,7 @@
           <p:cNvPr id="32" name="impact-2-1">
             <a:extLst xmlns:a="http://schemas.openxmlformats.org/drawingml/2006/main">
               <a:ext uri="{FF2B5EF4-FFF2-40B4-BE49-F238E27FC236}">
-                <a16:creationId xmlns:a16="http://schemas.microsoft.com/office/drawing/2014/main" id="{EF2A51F4-5AB4-4101-BCF7-EAAD558FC440}"/>
+                <a16:creationId xmlns:a16="http://schemas.microsoft.com/office/drawing/2014/main" id="{CBA646B6-BB07-4478-B314-B02901E7D4F7}"/>
               </a:ext>
             </a:extLst>
           </p:cNvPr>
@@ -8296,7 +8296,7 @@
           <p:cNvPr id="33" name="impact-bg-2-2">
             <a:extLst xmlns:a="http://schemas.openxmlformats.org/drawingml/2006/main">
               <a:ext uri="{FF2B5EF4-FFF2-40B4-BE49-F238E27FC236}">
-                <a16:creationId xmlns:a16="http://schemas.microsoft.com/office/drawing/2014/main" id="{4028F8F9-3CEA-42F9-AD44-C942E95FDF88}"/>
+                <a16:creationId xmlns:a16="http://schemas.microsoft.com/office/drawing/2014/main" id="{CCEDEB6D-C8E8-4D13-BEAF-C76543E26F54}"/>
               </a:ext>
             </a:extLst>
           </p:cNvPr>
@@ -8329,7 +8329,7 @@
           <p:cNvPr id="34" name="impact-2-2">
             <a:extLst xmlns:a="http://schemas.openxmlformats.org/drawingml/2006/main">
               <a:ext uri="{FF2B5EF4-FFF2-40B4-BE49-F238E27FC236}">
-                <a16:creationId xmlns:a16="http://schemas.microsoft.com/office/drawing/2014/main" id="{A370E755-80CC-445A-B4B3-09E73EB8B402}"/>
+                <a16:creationId xmlns:a16="http://schemas.microsoft.com/office/drawing/2014/main" id="{586FEE3E-AC93-454E-83C5-4F938FADC71E}"/>
               </a:ext>
             </a:extLst>
           </p:cNvPr>
@@ -8387,7 +8387,7 @@
           <p:cNvPr id="35" name="impact-bg-2-3">
             <a:extLst xmlns:a="http://schemas.openxmlformats.org/drawingml/2006/main">
               <a:ext uri="{FF2B5EF4-FFF2-40B4-BE49-F238E27FC236}">
-                <a16:creationId xmlns:a16="http://schemas.microsoft.com/office/drawing/2014/main" id="{70F19CA4-3695-4B14-9EF7-4238D89688E1}"/>
+                <a16:creationId xmlns:a16="http://schemas.microsoft.com/office/drawing/2014/main" id="{3223AC13-5D40-46ED-A74A-2F9911C304CB}"/>
               </a:ext>
             </a:extLst>
           </p:cNvPr>
@@ -8420,7 +8420,7 @@
           <p:cNvPr id="36" name="impact-2-3">
             <a:extLst xmlns:a="http://schemas.openxmlformats.org/drawingml/2006/main">
               <a:ext uri="{FF2B5EF4-FFF2-40B4-BE49-F238E27FC236}">
-                <a16:creationId xmlns:a16="http://schemas.microsoft.com/office/drawing/2014/main" id="{0388D732-3867-41AA-9D9E-34282EDC4DCB}"/>
+                <a16:creationId xmlns:a16="http://schemas.microsoft.com/office/drawing/2014/main" id="{C8F7464A-8760-47CC-A24E-FA25A5EF2FCA}"/>
               </a:ext>
             </a:extLst>
           </p:cNvPr>
@@ -8478,7 +8478,7 @@
           <p:cNvPr id="37" name="impact-bg-3-0">
             <a:extLst xmlns:a="http://schemas.openxmlformats.org/drawingml/2006/main">
               <a:ext uri="{FF2B5EF4-FFF2-40B4-BE49-F238E27FC236}">
-                <a16:creationId xmlns:a16="http://schemas.microsoft.com/office/drawing/2014/main" id="{54193179-0CB1-4BB5-8829-270C79CB66C6}"/>
+                <a16:creationId xmlns:a16="http://schemas.microsoft.com/office/drawing/2014/main" id="{A3CC654D-A6E5-4D90-AC18-28A80C9B7234}"/>
               </a:ext>
             </a:extLst>
           </p:cNvPr>
@@ -8511,7 +8511,7 @@
           <p:cNvPr id="38" name="impact-3-0">
             <a:extLst xmlns:a="http://schemas.openxmlformats.org/drawingml/2006/main">
               <a:ext uri="{FF2B5EF4-FFF2-40B4-BE49-F238E27FC236}">
-                <a16:creationId xmlns:a16="http://schemas.microsoft.com/office/drawing/2014/main" id="{DC6B7258-127C-49A1-B799-EFEBF665E1AD}"/>
+                <a16:creationId xmlns:a16="http://schemas.microsoft.com/office/drawing/2014/main" id="{D2183CB0-E306-401A-B1D2-0B5AE570BADC}"/>
               </a:ext>
             </a:extLst>
           </p:cNvPr>
@@ -8569,7 +8569,7 @@
           <p:cNvPr id="39" name="impact-bg-3-1">
             <a:extLst xmlns:a="http://schemas.openxmlformats.org/drawingml/2006/main">
               <a:ext uri="{FF2B5EF4-FFF2-40B4-BE49-F238E27FC236}">
-                <a16:creationId xmlns:a16="http://schemas.microsoft.com/office/drawing/2014/main" id="{FF0E7B12-DF76-4205-A68D-BC4B9BFBF2CB}"/>
+                <a16:creationId xmlns:a16="http://schemas.microsoft.com/office/drawing/2014/main" id="{F0DF3BDB-4E7D-4CA3-B289-C6303D01FD69}"/>
               </a:ext>
             </a:extLst>
           </p:cNvPr>
@@ -8602,7 +8602,7 @@
           <p:cNvPr id="40" name="impact-3-1">
             <a:extLst xmlns:a="http://schemas.openxmlformats.org/drawingml/2006/main">
               <a:ext uri="{FF2B5EF4-FFF2-40B4-BE49-F238E27FC236}">
-                <a16:creationId xmlns:a16="http://schemas.microsoft.com/office/drawing/2014/main" id="{938B097B-EB65-4312-81D7-709A796E2A61}"/>
+                <a16:creationId xmlns:a16="http://schemas.microsoft.com/office/drawing/2014/main" id="{7F864FAE-0E0D-4597-9724-04D45A9D5FE5}"/>
               </a:ext>
             </a:extLst>
           </p:cNvPr>
@@ -8660,7 +8660,7 @@
           <p:cNvPr id="41" name="impact-bg-3-2">
             <a:extLst xmlns:a="http://schemas.openxmlformats.org/drawingml/2006/main">
               <a:ext uri="{FF2B5EF4-FFF2-40B4-BE49-F238E27FC236}">
-                <a16:creationId xmlns:a16="http://schemas.microsoft.com/office/drawing/2014/main" id="{4F8D9166-696D-411F-A52B-17F90B8E7FB0}"/>
+                <a16:creationId xmlns:a16="http://schemas.microsoft.com/office/drawing/2014/main" id="{706CDC99-5E2A-48D9-BFA2-D87A8B974450}"/>
               </a:ext>
             </a:extLst>
           </p:cNvPr>
@@ -8693,7 +8693,7 @@
           <p:cNvPr id="42" name="impact-3-2">
             <a:extLst xmlns:a="http://schemas.openxmlformats.org/drawingml/2006/main">
               <a:ext uri="{FF2B5EF4-FFF2-40B4-BE49-F238E27FC236}">
-                <a16:creationId xmlns:a16="http://schemas.microsoft.com/office/drawing/2014/main" id="{0C50148E-B4CF-4B98-9DC1-6F417E2A1BBF}"/>
+                <a16:creationId xmlns:a16="http://schemas.microsoft.com/office/drawing/2014/main" id="{8C4863DC-EA0D-44FA-8E90-463C9ACE7000}"/>
               </a:ext>
             </a:extLst>
           </p:cNvPr>
@@ -8751,7 +8751,7 @@
           <p:cNvPr id="43" name="impact-bg-3-3">
             <a:extLst xmlns:a="http://schemas.openxmlformats.org/drawingml/2006/main">
               <a:ext uri="{FF2B5EF4-FFF2-40B4-BE49-F238E27FC236}">
-                <a16:creationId xmlns:a16="http://schemas.microsoft.com/office/drawing/2014/main" id="{4C67919C-D910-4E68-95AA-7C1CB49306A0}"/>
+                <a16:creationId xmlns:a16="http://schemas.microsoft.com/office/drawing/2014/main" id="{6F34C6BF-9F75-4892-A852-DD773ADEDBFA}"/>
               </a:ext>
             </a:extLst>
           </p:cNvPr>
@@ -8784,7 +8784,7 @@
           <p:cNvPr id="44" name="impact-3-3">
             <a:extLst xmlns:a="http://schemas.openxmlformats.org/drawingml/2006/main">
               <a:ext uri="{FF2B5EF4-FFF2-40B4-BE49-F238E27FC236}">
-                <a16:creationId xmlns:a16="http://schemas.microsoft.com/office/drawing/2014/main" id="{D83D2278-54C5-4E98-914E-AB4D48FB8040}"/>
+                <a16:creationId xmlns:a16="http://schemas.microsoft.com/office/drawing/2014/main" id="{CCAB59B3-2BC4-402B-905A-8213494872A3}"/>
               </a:ext>
             </a:extLst>
           </p:cNvPr>
@@ -8840,7 +8840,7 @@
     </p:spTree>
     <p:extLst>
       <p:ext uri="{BB962C8B-B14F-4D97-AF65-F5344CB8AC3E}">
-        <p14:creationId xmlns:p14="http://schemas.microsoft.com/office/powerpoint/2010/main" val="1970192661"/>
+        <p14:creationId xmlns:p14="http://schemas.microsoft.com/office/powerpoint/2010/main" val="1630612051"/>
       </p:ext>
     </p:extLst>
   </p:cSld>
@@ -8871,7 +8871,7 @@
           <p:cNvPr id="16" name="title-6">
             <a:extLst xmlns:a="http://schemas.openxmlformats.org/drawingml/2006/main">
               <a:ext uri="{FF2B5EF4-FFF2-40B4-BE49-F238E27FC236}">
-                <a16:creationId xmlns:a16="http://schemas.microsoft.com/office/drawing/2014/main" id="{02AE03FB-A0A4-4B46-AD28-0AE5749F54B4}"/>
+                <a16:creationId xmlns:a16="http://schemas.microsoft.com/office/drawing/2014/main" id="{0E83D678-70FD-4A9C-BEA6-9D0C9BBB827C}"/>
               </a:ext>
             </a:extLst>
           </p:cNvPr>
@@ -8929,7 +8929,7 @@
           <p:cNvPr id="2" name="subtitle-6">
             <a:extLst xmlns:a="http://schemas.openxmlformats.org/drawingml/2006/main">
               <a:ext uri="{FF2B5EF4-FFF2-40B4-BE49-F238E27FC236}">
-                <a16:creationId xmlns:a16="http://schemas.microsoft.com/office/drawing/2014/main" id="{7D873E58-FC3A-4835-B520-B95E7DD13D59}"/>
+                <a16:creationId xmlns:a16="http://schemas.microsoft.com/office/drawing/2014/main" id="{D9FE3AA5-BD32-4F2D-9A8F-8AE25DD3DBA4}"/>
               </a:ext>
             </a:extLst>
           </p:cNvPr>
@@ -8987,7 +8987,7 @@
           <p:cNvPr id="3" name="footer-6">
             <a:extLst xmlns:a="http://schemas.openxmlformats.org/drawingml/2006/main">
               <a:ext uri="{FF2B5EF4-FFF2-40B4-BE49-F238E27FC236}">
-                <a16:creationId xmlns:a16="http://schemas.microsoft.com/office/drawing/2014/main" id="{8305B902-FA26-4840-A59F-9CCC24A36E3D}"/>
+                <a16:creationId xmlns:a16="http://schemas.microsoft.com/office/drawing/2014/main" id="{1399E8C5-E02B-4083-B274-70598C4BA09B}"/>
               </a:ext>
             </a:extLst>
           </p:cNvPr>
@@ -9035,7 +9035,7 @@
                 <a:ea typeface="PingFang SC"/>
                 <a:cs typeface="PingFang SC"/>
               </a:rPr>
-              <a:t>ShopFlow v2.6  |  shopflow-5bfd99fc6000</a:t>
+              <a:t>ShopFlow v2.6  |  shopflow-41d613d1137b</a:t>
             </a:r>
           </a:p>
         </p:txBody>
@@ -9045,7 +9045,7 @@
           <p:cNvPr id="4" name="page-6">
             <a:extLst xmlns:a="http://schemas.openxmlformats.org/drawingml/2006/main">
               <a:ext uri="{FF2B5EF4-FFF2-40B4-BE49-F238E27FC236}">
-                <a16:creationId xmlns:a16="http://schemas.microsoft.com/office/drawing/2014/main" id="{0675F43C-B0A6-4DFC-A32C-F880927D95E5}"/>
+                <a16:creationId xmlns:a16="http://schemas.microsoft.com/office/drawing/2014/main" id="{351C5986-6A79-4F1F-AC1E-BB1A72005AC0}"/>
               </a:ext>
             </a:extLst>
           </p:cNvPr>
@@ -9103,7 +9103,7 @@
           <p:cNvPr id="5" name="knowledge-band">
             <a:extLst xmlns:a="http://schemas.openxmlformats.org/drawingml/2006/main">
               <a:ext uri="{FF2B5EF4-FFF2-40B4-BE49-F238E27FC236}">
-                <a16:creationId xmlns:a16="http://schemas.microsoft.com/office/drawing/2014/main" id="{4EDB6D88-6135-48C0-9759-393899CAF477}"/>
+                <a16:creationId xmlns:a16="http://schemas.microsoft.com/office/drawing/2014/main" id="{E0E454EF-45CA-43BB-89F2-7589013E59B8}"/>
               </a:ext>
             </a:extLst>
           </p:cNvPr>
@@ -9134,7 +9134,7 @@
           <p:cNvPr id="6" name="knowledge-label">
             <a:extLst xmlns:a="http://schemas.openxmlformats.org/drawingml/2006/main">
               <a:ext uri="{FF2B5EF4-FFF2-40B4-BE49-F238E27FC236}">
-                <a16:creationId xmlns:a16="http://schemas.microsoft.com/office/drawing/2014/main" id="{342FF92D-C33E-4C67-B862-C935DA470E41}"/>
+                <a16:creationId xmlns:a16="http://schemas.microsoft.com/office/drawing/2014/main" id="{951B7ACE-3C3D-4FC4-8C7F-F590BD542180}"/>
               </a:ext>
             </a:extLst>
           </p:cNvPr>
@@ -9192,7 +9192,7 @@
           <p:cNvPr id="7" name="knowledge-title">
             <a:extLst xmlns:a="http://schemas.openxmlformats.org/drawingml/2006/main">
               <a:ext uri="{FF2B5EF4-FFF2-40B4-BE49-F238E27FC236}">
-                <a16:creationId xmlns:a16="http://schemas.microsoft.com/office/drawing/2014/main" id="{F432DA72-6CE1-4463-8567-FA4C3282FEC1}"/>
+                <a16:creationId xmlns:a16="http://schemas.microsoft.com/office/drawing/2014/main" id="{D7FE8AB8-422D-4BFF-90BF-11E06404AF50}"/>
               </a:ext>
             </a:extLst>
           </p:cNvPr>
@@ -9250,7 +9250,7 @@
           <p:cNvPr id="8" name="knowledge-claim">
             <a:extLst xmlns:a="http://schemas.openxmlformats.org/drawingml/2006/main">
               <a:ext uri="{FF2B5EF4-FFF2-40B4-BE49-F238E27FC236}">
-                <a16:creationId xmlns:a16="http://schemas.microsoft.com/office/drawing/2014/main" id="{2B4230FD-1D2F-4C95-8A24-3026809E03B7}"/>
+                <a16:creationId xmlns:a16="http://schemas.microsoft.com/office/drawing/2014/main" id="{A8DD5604-6A90-4E8E-91CD-0E8C4FCAB3BC}"/>
               </a:ext>
             </a:extLst>
           </p:cNvPr>
@@ -9308,7 +9308,7 @@
           <p:cNvPr id="9" name="knowledge-source">
             <a:extLst xmlns:a="http://schemas.openxmlformats.org/drawingml/2006/main">
               <a:ext uri="{FF2B5EF4-FFF2-40B4-BE49-F238E27FC236}">
-                <a16:creationId xmlns:a16="http://schemas.microsoft.com/office/drawing/2014/main" id="{0391AD4E-A9A9-4F9F-BD44-1D1F8C991EE3}"/>
+                <a16:creationId xmlns:a16="http://schemas.microsoft.com/office/drawing/2014/main" id="{2F7B5CE2-0D22-4648-83BB-620D93CB7D72}"/>
               </a:ext>
             </a:extLst>
           </p:cNvPr>
@@ -9366,7 +9366,7 @@
           <p:cNvPr id="10" name="expert-band">
             <a:extLst xmlns:a="http://schemas.openxmlformats.org/drawingml/2006/main">
               <a:ext uri="{FF2B5EF4-FFF2-40B4-BE49-F238E27FC236}">
-                <a16:creationId xmlns:a16="http://schemas.microsoft.com/office/drawing/2014/main" id="{DF28931A-EEA2-4CE7-B584-F17B6B21CB5C}"/>
+                <a16:creationId xmlns:a16="http://schemas.microsoft.com/office/drawing/2014/main" id="{EA440BA3-A6BB-4154-89C5-EC1943603C9D}"/>
               </a:ext>
             </a:extLst>
           </p:cNvPr>
@@ -9397,7 +9397,7 @@
           <p:cNvPr id="11" name="expert-label">
             <a:extLst xmlns:a="http://schemas.openxmlformats.org/drawingml/2006/main">
               <a:ext uri="{FF2B5EF4-FFF2-40B4-BE49-F238E27FC236}">
-                <a16:creationId xmlns:a16="http://schemas.microsoft.com/office/drawing/2014/main" id="{D641A808-6223-487A-B18C-6182C0B32D57}"/>
+                <a16:creationId xmlns:a16="http://schemas.microsoft.com/office/drawing/2014/main" id="{D621A1AC-30FC-4463-9400-DF8DD3A72439}"/>
               </a:ext>
             </a:extLst>
           </p:cNvPr>
@@ -9455,7 +9455,7 @@
           <p:cNvPr id="12" name="expert-name">
             <a:extLst xmlns:a="http://schemas.openxmlformats.org/drawingml/2006/main">
               <a:ext uri="{FF2B5EF4-FFF2-40B4-BE49-F238E27FC236}">
-                <a16:creationId xmlns:a16="http://schemas.microsoft.com/office/drawing/2014/main" id="{A19B0092-DCEB-4E72-8BBD-E9B09D2E01B8}"/>
+                <a16:creationId xmlns:a16="http://schemas.microsoft.com/office/drawing/2014/main" id="{B107418A-C62C-4EEF-958C-F7D5C2B3B6F5}"/>
               </a:ext>
             </a:extLst>
           </p:cNvPr>
@@ -9513,7 +9513,7 @@
           <p:cNvPr id="13" name="expert-reason">
             <a:extLst xmlns:a="http://schemas.openxmlformats.org/drawingml/2006/main">
               <a:ext uri="{FF2B5EF4-FFF2-40B4-BE49-F238E27FC236}">
-                <a16:creationId xmlns:a16="http://schemas.microsoft.com/office/drawing/2014/main" id="{4E2B5B94-0411-4D74-A78B-7B6C90D279B5}"/>
+                <a16:creationId xmlns:a16="http://schemas.microsoft.com/office/drawing/2014/main" id="{8D44549A-4595-4121-90A9-81808085D1A4}"/>
               </a:ext>
             </a:extLst>
           </p:cNvPr>
@@ -9617,7 +9617,7 @@
           <p:cNvPr id="14" name="expert-contact">
             <a:extLst xmlns:a="http://schemas.openxmlformats.org/drawingml/2006/main">
               <a:ext uri="{FF2B5EF4-FFF2-40B4-BE49-F238E27FC236}">
-                <a16:creationId xmlns:a16="http://schemas.microsoft.com/office/drawing/2014/main" id="{960169C3-679D-43CB-B7A5-2B4D79B31CE8}"/>
+                <a16:creationId xmlns:a16="http://schemas.microsoft.com/office/drawing/2014/main" id="{D9AD5646-7FFB-44AC-A2E9-CA2EB8AA3AC6}"/>
               </a:ext>
             </a:extLst>
           </p:cNvPr>
@@ -9675,7 +9675,7 @@
           <p:cNvPr id="15" name="knowledge-action">
             <a:extLst xmlns:a="http://schemas.openxmlformats.org/drawingml/2006/main">
               <a:ext uri="{FF2B5EF4-FFF2-40B4-BE49-F238E27FC236}">
-                <a16:creationId xmlns:a16="http://schemas.microsoft.com/office/drawing/2014/main" id="{0B82DB54-C3D8-426C-BD78-ACD7EF7103D7}"/>
+                <a16:creationId xmlns:a16="http://schemas.microsoft.com/office/drawing/2014/main" id="{5EB820E5-FDA6-4E87-BD6A-27CEAB556D6C}"/>
               </a:ext>
             </a:extLst>
           </p:cNvPr>
@@ -9731,7 +9731,7 @@
     </p:spTree>
     <p:extLst>
       <p:ext uri="{BB962C8B-B14F-4D97-AF65-F5344CB8AC3E}">
-        <p14:creationId xmlns:p14="http://schemas.microsoft.com/office/powerpoint/2010/main" val="1720196901"/>
+        <p14:creationId xmlns:p14="http://schemas.microsoft.com/office/powerpoint/2010/main" val="1180532045"/>
       </p:ext>
     </p:extLst>
   </p:cSld>
@@ -9762,7 +9762,7 @@
           <p:cNvPr id="20" name="title-7">
             <a:extLst xmlns:a="http://schemas.openxmlformats.org/drawingml/2006/main">
               <a:ext uri="{FF2B5EF4-FFF2-40B4-BE49-F238E27FC236}">
-                <a16:creationId xmlns:a16="http://schemas.microsoft.com/office/drawing/2014/main" id="{E859498B-CE0B-49C7-9478-A8C5D8B02E39}"/>
+                <a16:creationId xmlns:a16="http://schemas.microsoft.com/office/drawing/2014/main" id="{C35B47FF-D1AF-4536-8902-B8D06A8C8BA0}"/>
               </a:ext>
             </a:extLst>
           </p:cNvPr>
@@ -9820,7 +9820,7 @@
           <p:cNvPr id="2" name="subtitle-7">
             <a:extLst xmlns:a="http://schemas.openxmlformats.org/drawingml/2006/main">
               <a:ext uri="{FF2B5EF4-FFF2-40B4-BE49-F238E27FC236}">
-                <a16:creationId xmlns:a16="http://schemas.microsoft.com/office/drawing/2014/main" id="{FF60636F-756C-4E3F-84B2-D5E7F4BCD745}"/>
+                <a16:creationId xmlns:a16="http://schemas.microsoft.com/office/drawing/2014/main" id="{A9D4896A-2B60-44F3-8F6A-00B5282F3E38}"/>
               </a:ext>
             </a:extLst>
           </p:cNvPr>
@@ -9878,7 +9878,7 @@
           <p:cNvPr id="3" name="footer-7">
             <a:extLst xmlns:a="http://schemas.openxmlformats.org/drawingml/2006/main">
               <a:ext uri="{FF2B5EF4-FFF2-40B4-BE49-F238E27FC236}">
-                <a16:creationId xmlns:a16="http://schemas.microsoft.com/office/drawing/2014/main" id="{AB2BA984-9F0F-470B-A3E4-44ADA489DFA1}"/>
+                <a16:creationId xmlns:a16="http://schemas.microsoft.com/office/drawing/2014/main" id="{3580BAC7-CE19-4046-9E0D-A805A804F5F6}"/>
               </a:ext>
             </a:extLst>
           </p:cNvPr>
@@ -9926,7 +9926,7 @@
                 <a:ea typeface="PingFang SC"/>
                 <a:cs typeface="PingFang SC"/>
               </a:rPr>
-              <a:t>ShopFlow v2.6  |  shopflow-5bfd99fc6000</a:t>
+              <a:t>ShopFlow v2.6  |  shopflow-41d613d1137b</a:t>
             </a:r>
           </a:p>
         </p:txBody>
@@ -9936,7 +9936,7 @@
           <p:cNvPr id="4" name="page-7">
             <a:extLst xmlns:a="http://schemas.openxmlformats.org/drawingml/2006/main">
               <a:ext uri="{FF2B5EF4-FFF2-40B4-BE49-F238E27FC236}">
-                <a16:creationId xmlns:a16="http://schemas.microsoft.com/office/drawing/2014/main" id="{680D36FF-E12F-4A1C-9D1C-CBCFC96A7D7E}"/>
+                <a16:creationId xmlns:a16="http://schemas.microsoft.com/office/drawing/2014/main" id="{097923E2-DE0F-4EE4-BF7C-E91913D496ED}"/>
               </a:ext>
             </a:extLst>
           </p:cNvPr>
@@ -9994,7 +9994,7 @@
           <p:cNvPr id="5" name="timeline">
             <a:extLst xmlns:a="http://schemas.openxmlformats.org/drawingml/2006/main">
               <a:ext uri="{FF2B5EF4-FFF2-40B4-BE49-F238E27FC236}">
-                <a16:creationId xmlns:a16="http://schemas.microsoft.com/office/drawing/2014/main" id="{F4D0CAE6-2E8C-4FA3-9251-556F4296E301}"/>
+                <a16:creationId xmlns:a16="http://schemas.microsoft.com/office/drawing/2014/main" id="{9FF0AC6F-EC7D-42A7-841D-8B46EA89C56F}"/>
               </a:ext>
             </a:extLst>
           </p:cNvPr>
@@ -10025,7 +10025,7 @@
           <p:cNvPr id="6" name="timeline-dot-0">
             <a:extLst xmlns:a="http://schemas.openxmlformats.org/drawingml/2006/main">
               <a:ext uri="{FF2B5EF4-FFF2-40B4-BE49-F238E27FC236}">
-                <a16:creationId xmlns:a16="http://schemas.microsoft.com/office/drawing/2014/main" id="{6198EE70-3451-46AF-BB1D-060869260ECE}"/>
+                <a16:creationId xmlns:a16="http://schemas.microsoft.com/office/drawing/2014/main" id="{535D062A-8E08-491D-8DCE-4A0B7D9594AA}"/>
               </a:ext>
             </a:extLst>
           </p:cNvPr>
@@ -10056,7 +10056,7 @@
           <p:cNvPr id="7" name="timeline-time-0">
             <a:extLst xmlns:a="http://schemas.openxmlformats.org/drawingml/2006/main">
               <a:ext uri="{FF2B5EF4-FFF2-40B4-BE49-F238E27FC236}">
-                <a16:creationId xmlns:a16="http://schemas.microsoft.com/office/drawing/2014/main" id="{E6579D05-7E42-49EA-A88D-AEE06950EE64}"/>
+                <a16:creationId xmlns:a16="http://schemas.microsoft.com/office/drawing/2014/main" id="{1FAF9DBE-4152-4B77-8319-3D11CEE3BB47}"/>
               </a:ext>
             </a:extLst>
           </p:cNvPr>
@@ -10114,7 +10114,7 @@
           <p:cNvPr id="8" name="timeline-title-0">
             <a:extLst xmlns:a="http://schemas.openxmlformats.org/drawingml/2006/main">
               <a:ext uri="{FF2B5EF4-FFF2-40B4-BE49-F238E27FC236}">
-                <a16:creationId xmlns:a16="http://schemas.microsoft.com/office/drawing/2014/main" id="{962F3054-60D3-463C-A4CD-4D9DA3448E78}"/>
+                <a16:creationId xmlns:a16="http://schemas.microsoft.com/office/drawing/2014/main" id="{B048225E-3136-405B-BADF-5C4D672F417A}"/>
               </a:ext>
             </a:extLst>
           </p:cNvPr>
@@ -10172,7 +10172,7 @@
           <p:cNvPr id="9" name="timeline-owner-0">
             <a:extLst xmlns:a="http://schemas.openxmlformats.org/drawingml/2006/main">
               <a:ext uri="{FF2B5EF4-FFF2-40B4-BE49-F238E27FC236}">
-                <a16:creationId xmlns:a16="http://schemas.microsoft.com/office/drawing/2014/main" id="{2CA1D268-52A5-460B-8382-A6630F4F6178}"/>
+                <a16:creationId xmlns:a16="http://schemas.microsoft.com/office/drawing/2014/main" id="{FB425742-7D12-468D-9183-187C5B7D654B}"/>
               </a:ext>
             </a:extLst>
           </p:cNvPr>
@@ -10230,7 +10230,7 @@
           <p:cNvPr id="10" name="timeline-dot-1">
             <a:extLst xmlns:a="http://schemas.openxmlformats.org/drawingml/2006/main">
               <a:ext uri="{FF2B5EF4-FFF2-40B4-BE49-F238E27FC236}">
-                <a16:creationId xmlns:a16="http://schemas.microsoft.com/office/drawing/2014/main" id="{A2C4D70E-F729-417D-8DCE-69688EE82EC8}"/>
+                <a16:creationId xmlns:a16="http://schemas.microsoft.com/office/drawing/2014/main" id="{F9EF6095-73B9-4EC5-84C8-23447526D3E2}"/>
               </a:ext>
             </a:extLst>
           </p:cNvPr>
@@ -10261,7 +10261,7 @@
           <p:cNvPr id="11" name="timeline-time-1">
             <a:extLst xmlns:a="http://schemas.openxmlformats.org/drawingml/2006/main">
               <a:ext uri="{FF2B5EF4-FFF2-40B4-BE49-F238E27FC236}">
-                <a16:creationId xmlns:a16="http://schemas.microsoft.com/office/drawing/2014/main" id="{5DF69525-4B7F-423C-BE71-65B4CD9249DC}"/>
+                <a16:creationId xmlns:a16="http://schemas.microsoft.com/office/drawing/2014/main" id="{FDEAFCFF-5F9C-4E06-A2CB-070EBF2AD109}"/>
               </a:ext>
             </a:extLst>
           </p:cNvPr>
@@ -10319,7 +10319,7 @@
           <p:cNvPr id="12" name="timeline-title-1">
             <a:extLst xmlns:a="http://schemas.openxmlformats.org/drawingml/2006/main">
               <a:ext uri="{FF2B5EF4-FFF2-40B4-BE49-F238E27FC236}">
-                <a16:creationId xmlns:a16="http://schemas.microsoft.com/office/drawing/2014/main" id="{047E907B-55E7-4F3A-A69B-ED3A9F4AB55F}"/>
+                <a16:creationId xmlns:a16="http://schemas.microsoft.com/office/drawing/2014/main" id="{09702EE6-86BF-49D2-8BA7-89A4796D0228}"/>
               </a:ext>
             </a:extLst>
           </p:cNvPr>
@@ -10377,7 +10377,7 @@
           <p:cNvPr id="13" name="timeline-owner-1">
             <a:extLst xmlns:a="http://schemas.openxmlformats.org/drawingml/2006/main">
               <a:ext uri="{FF2B5EF4-FFF2-40B4-BE49-F238E27FC236}">
-                <a16:creationId xmlns:a16="http://schemas.microsoft.com/office/drawing/2014/main" id="{163A3AD7-2EE0-4ABB-99D6-6EBA05A16331}"/>
+                <a16:creationId xmlns:a16="http://schemas.microsoft.com/office/drawing/2014/main" id="{2FB01B8F-7CF9-4DEC-95D8-9DE918E0C6AC}"/>
               </a:ext>
             </a:extLst>
           </p:cNvPr>
@@ -10435,7 +10435,7 @@
           <p:cNvPr id="14" name="timeline-dot-2">
             <a:extLst xmlns:a="http://schemas.openxmlformats.org/drawingml/2006/main">
               <a:ext uri="{FF2B5EF4-FFF2-40B4-BE49-F238E27FC236}">
-                <a16:creationId xmlns:a16="http://schemas.microsoft.com/office/drawing/2014/main" id="{CD03655E-6679-44D1-8B6C-860B2303B8AE}"/>
+                <a16:creationId xmlns:a16="http://schemas.microsoft.com/office/drawing/2014/main" id="{F39FD99E-B37B-41FB-B531-3E35ECFE44C6}"/>
               </a:ext>
             </a:extLst>
           </p:cNvPr>
@@ -10466,7 +10466,7 @@
           <p:cNvPr id="15" name="timeline-time-2">
             <a:extLst xmlns:a="http://schemas.openxmlformats.org/drawingml/2006/main">
               <a:ext uri="{FF2B5EF4-FFF2-40B4-BE49-F238E27FC236}">
-                <a16:creationId xmlns:a16="http://schemas.microsoft.com/office/drawing/2014/main" id="{CF520DD2-D202-455E-AEE2-FD12120D8FAF}"/>
+                <a16:creationId xmlns:a16="http://schemas.microsoft.com/office/drawing/2014/main" id="{CB41BCA6-B470-48EC-8220-89D3D60A1801}"/>
               </a:ext>
             </a:extLst>
           </p:cNvPr>
@@ -10524,7 +10524,7 @@
           <p:cNvPr id="16" name="timeline-title-2">
             <a:extLst xmlns:a="http://schemas.openxmlformats.org/drawingml/2006/main">
               <a:ext uri="{FF2B5EF4-FFF2-40B4-BE49-F238E27FC236}">
-                <a16:creationId xmlns:a16="http://schemas.microsoft.com/office/drawing/2014/main" id="{D3151E88-8426-4A3D-B21C-761AD66AD003}"/>
+                <a16:creationId xmlns:a16="http://schemas.microsoft.com/office/drawing/2014/main" id="{9B1FBF06-D7E0-449A-9307-207F3F8A73EA}"/>
               </a:ext>
             </a:extLst>
           </p:cNvPr>
@@ -10582,7 +10582,7 @@
           <p:cNvPr id="17" name="timeline-owner-2">
             <a:extLst xmlns:a="http://schemas.openxmlformats.org/drawingml/2006/main">
               <a:ext uri="{FF2B5EF4-FFF2-40B4-BE49-F238E27FC236}">
-                <a16:creationId xmlns:a16="http://schemas.microsoft.com/office/drawing/2014/main" id="{C2A7FE49-06DD-4007-9517-E20972635A68}"/>
+                <a16:creationId xmlns:a16="http://schemas.microsoft.com/office/drawing/2014/main" id="{78A63F0B-245F-42F7-AB29-71458F13CC59}"/>
               </a:ext>
             </a:extLst>
           </p:cNvPr>
@@ -10640,7 +10640,7 @@
           <p:cNvPr id="18" name="decision-band">
             <a:extLst xmlns:a="http://schemas.openxmlformats.org/drawingml/2006/main">
               <a:ext uri="{FF2B5EF4-FFF2-40B4-BE49-F238E27FC236}">
-                <a16:creationId xmlns:a16="http://schemas.microsoft.com/office/drawing/2014/main" id="{695B4290-89F1-426B-8385-B92CF4500991}"/>
+                <a16:creationId xmlns:a16="http://schemas.microsoft.com/office/drawing/2014/main" id="{E19BAC1D-A0CB-498B-B829-5FF2AB6F55E2}"/>
               </a:ext>
             </a:extLst>
           </p:cNvPr>
@@ -10671,7 +10671,7 @@
           <p:cNvPr id="19" name="decision-text">
             <a:extLst xmlns:a="http://schemas.openxmlformats.org/drawingml/2006/main">
               <a:ext uri="{FF2B5EF4-FFF2-40B4-BE49-F238E27FC236}">
-                <a16:creationId xmlns:a16="http://schemas.microsoft.com/office/drawing/2014/main" id="{C8D1B35B-E7D1-43C9-9ED2-6AF74DC3CD2F}"/>
+                <a16:creationId xmlns:a16="http://schemas.microsoft.com/office/drawing/2014/main" id="{3E312540-68D4-4B8C-98AC-0C18AB043088}"/>
               </a:ext>
             </a:extLst>
           </p:cNvPr>
@@ -10727,7 +10727,7 @@
     </p:spTree>
     <p:extLst>
       <p:ext uri="{BB962C8B-B14F-4D97-AF65-F5344CB8AC3E}">
-        <p14:creationId xmlns:p14="http://schemas.microsoft.com/office/powerpoint/2010/main" val="924276041"/>
+        <p14:creationId xmlns:p14="http://schemas.microsoft.com/office/powerpoint/2010/main" val="1855882899"/>
       </p:ext>
     </p:extLst>
   </p:cSld>

--- a/output/inbox/tech-lead/ShopFlow-v2.6-技术负责人版.pptx
+++ b/output/inbox/tech-lead/ShopFlow-v2.6-技术负责人版.pptx
@@ -2,19 +2,19 @@
 <file path=ppt/presentation.xml><?xml version="1.0" encoding="utf-8"?>
 <p:presentation xmlns:p="http://schemas.openxmlformats.org/presentationml/2006/main">
   <p:sldMasterIdLst>
-    <p:sldMasterId xmlns:r="http://schemas.openxmlformats.org/officeDocument/2006/relationships" id="2147483648" r:id="R5c78dc28bd324250"/>
+    <p:sldMasterId xmlns:r="http://schemas.openxmlformats.org/officeDocument/2006/relationships" id="2147483648" r:id="R35c63b1203904bbc"/>
   </p:sldMasterIdLst>
   <p:notesMasterIdLst>
-    <p:notesMasterId xmlns:r="http://schemas.openxmlformats.org/officeDocument/2006/relationships" r:id="R6e4f40d358074da9"/>
+    <p:notesMasterId xmlns:r="http://schemas.openxmlformats.org/officeDocument/2006/relationships" r:id="Ref556f2189524d18"/>
   </p:notesMasterIdLst>
   <p:sldIdLst>
-    <p:sldId xmlns:r="http://schemas.openxmlformats.org/officeDocument/2006/relationships" id="256" r:id="Reb943e6aab4e4af2"/>
-    <p:sldId xmlns:r="http://schemas.openxmlformats.org/officeDocument/2006/relationships" id="257" r:id="R0c49d8dff3624a22"/>
-    <p:sldId xmlns:r="http://schemas.openxmlformats.org/officeDocument/2006/relationships" id="258" r:id="R153e9d60c57b4d0f"/>
-    <p:sldId xmlns:r="http://schemas.openxmlformats.org/officeDocument/2006/relationships" id="259" r:id="R127c4c29e16941a9"/>
-    <p:sldId xmlns:r="http://schemas.openxmlformats.org/officeDocument/2006/relationships" id="260" r:id="R504dfdf8338f483b"/>
-    <p:sldId xmlns:r="http://schemas.openxmlformats.org/officeDocument/2006/relationships" id="261" r:id="R1275a738c5b447b3"/>
-    <p:sldId xmlns:r="http://schemas.openxmlformats.org/officeDocument/2006/relationships" id="262" r:id="Ra2365fece6a24986"/>
+    <p:sldId xmlns:r="http://schemas.openxmlformats.org/officeDocument/2006/relationships" id="256" r:id="Rcdcbd1a5b4144ec9"/>
+    <p:sldId xmlns:r="http://schemas.openxmlformats.org/officeDocument/2006/relationships" id="257" r:id="R8a3738a0eb8c4002"/>
+    <p:sldId xmlns:r="http://schemas.openxmlformats.org/officeDocument/2006/relationships" id="258" r:id="R3befde0007854629"/>
+    <p:sldId xmlns:r="http://schemas.openxmlformats.org/officeDocument/2006/relationships" id="259" r:id="R17f59da6d83d4824"/>
+    <p:sldId xmlns:r="http://schemas.openxmlformats.org/officeDocument/2006/relationships" id="260" r:id="Re42a494e84a24c86"/>
+    <p:sldId xmlns:r="http://schemas.openxmlformats.org/officeDocument/2006/relationships" id="261" r:id="R54bc9162bf134284"/>
+    <p:sldId xmlns:r="http://schemas.openxmlformats.org/officeDocument/2006/relationships" id="262" r:id="R64e30b8316064416"/>
   </p:sldIdLst>
   <p:sldSz cx="12192000" cy="6858000"/>
   <p:notesSz cx="6858000" cy="9144000"/>
@@ -453,7 +453,7 @@
           </a:p>
           <a:p xmlns:a="http://schemas.openxmlformats.org/drawingml/2006/main">
             <a:r>
-              <a:t>- github://OWNER/ecommerce-delivery-case/milestone/v2.6</a:t>
+              <a:t>- github://pipiwolve/dumate-ecommerce-case/milestone/v2.6</a:t>
             </a:r>
           </a:p>
           <a:p xmlns:a="http://schemas.openxmlformats.org/drawingml/2006/main">
@@ -543,7 +543,7 @@
           </a:p>
           <a:p xmlns:a="http://schemas.openxmlformats.org/drawingml/2006/main">
             <a:r>
-              <a:t>- github://OWNER/ecommerce-delivery-case/milestone/v2.6</a:t>
+              <a:t>- github://pipiwolve/dumate-ecommerce-case/milestone/v2.6</a:t>
             </a:r>
           </a:p>
           <a:p xmlns:a="http://schemas.openxmlformats.org/drawingml/2006/main">
@@ -633,7 +633,7 @@
           </a:p>
           <a:p xmlns:a="http://schemas.openxmlformats.org/drawingml/2006/main">
             <a:r>
-              <a:t>- github://OWNER/ecommerce-delivery-case/milestone/v2.6</a:t>
+              <a:t>- github://pipiwolve/dumate-ecommerce-case/milestone/v2.6</a:t>
             </a:r>
           </a:p>
         </p:txBody>
@@ -708,7 +708,7 @@
           </a:p>
           <a:p xmlns:a="http://schemas.openxmlformats.org/drawingml/2006/main">
             <a:r>
-              <a:t>- github://OWNER/ecommerce-delivery-case/milestone/v2.6</a:t>
+              <a:t>- github://pipiwolve/dumate-ecommerce-case/milestone/v2.6</a:t>
             </a:r>
           </a:p>
           <a:p xmlns:a="http://schemas.openxmlformats.org/drawingml/2006/main">
@@ -793,7 +793,7 @@
           </a:p>
           <a:p xmlns:a="http://schemas.openxmlformats.org/drawingml/2006/main">
             <a:r>
-              <a:t>- github://OWNER/ecommerce-delivery-case/milestone/v2.6</a:t>
+              <a:t>- github://pipiwolve/dumate-ecommerce-case/milestone/v2.6</a:t>
             </a:r>
           </a:p>
           <a:p xmlns:a="http://schemas.openxmlformats.org/drawingml/2006/main">
@@ -958,7 +958,7 @@
           </a:p>
           <a:p xmlns:a="http://schemas.openxmlformats.org/drawingml/2006/main">
             <a:r>
-              <a:t>- github://OWNER/ecommerce-delivery-case/milestone/v2.6</a:t>
+              <a:t>- github://pipiwolve/dumate-ecommerce-case/milestone/v2.6</a:t>
             </a:r>
           </a:p>
           <a:p xmlns:a="http://schemas.openxmlformats.org/drawingml/2006/main">
@@ -1031,7 +1031,7 @@
   </p:cSld>
   <p:clrMap bg1="lt1" tx1="dk1" bg2="lt2" tx2="dk2" accent1="accent1" accent2="accent2" accent3="accent3" accent4="accent4" accent5="accent5" accent6="accent6" hlink="hlink" folHlink="folHlink"/>
   <p:sldLayoutIdLst>
-    <p:sldLayoutId xmlns:r="http://schemas.openxmlformats.org/officeDocument/2006/relationships" id="2147483649" r:id="R0f9f06b2fa6e4e19"/>
+    <p:sldLayoutId xmlns:r="http://schemas.openxmlformats.org/officeDocument/2006/relationships" id="2147483649" r:id="Rb5923128eb3a4f4f"/>
   </p:sldLayoutIdLst>
   <p:txStyles>
     <p:titleStyle>
@@ -1582,7 +1582,7 @@
           <p:cNvPr id="7" name="cover-kicker">
             <a:extLst xmlns:a="http://schemas.openxmlformats.org/drawingml/2006/main">
               <a:ext uri="{FF2B5EF4-FFF2-40B4-BE49-F238E27FC236}">
-                <a16:creationId xmlns:a16="http://schemas.microsoft.com/office/drawing/2014/main" id="{9B861FB2-7F3F-43A3-ADA0-AAC1971E4626}"/>
+                <a16:creationId xmlns:a16="http://schemas.microsoft.com/office/drawing/2014/main" id="{A209BFFC-768B-4B99-9AB5-01881AAFA5A7}"/>
               </a:ext>
             </a:extLst>
           </p:cNvPr>
@@ -1640,7 +1640,7 @@
           <p:cNvPr id="2" name="cover-title">
             <a:extLst xmlns:a="http://schemas.openxmlformats.org/drawingml/2006/main">
               <a:ext uri="{FF2B5EF4-FFF2-40B4-BE49-F238E27FC236}">
-                <a16:creationId xmlns:a16="http://schemas.microsoft.com/office/drawing/2014/main" id="{C5DC44B0-AAB6-47CE-ADA6-1A95868B2249}"/>
+                <a16:creationId xmlns:a16="http://schemas.microsoft.com/office/drawing/2014/main" id="{92629BB2-3F71-45D2-B724-014BE71466A2}"/>
               </a:ext>
             </a:extLst>
           </p:cNvPr>
@@ -1721,7 +1721,7 @@
           <p:cNvPr id="3" name="cover-rule">
             <a:extLst xmlns:a="http://schemas.openxmlformats.org/drawingml/2006/main">
               <a:ext uri="{FF2B5EF4-FFF2-40B4-BE49-F238E27FC236}">
-                <a16:creationId xmlns:a16="http://schemas.microsoft.com/office/drawing/2014/main" id="{EBCAB6B3-68B9-4005-8257-2F65C6CEEBF2}"/>
+                <a16:creationId xmlns:a16="http://schemas.microsoft.com/office/drawing/2014/main" id="{7C215B30-F64A-464B-8249-4E678A612B23}"/>
               </a:ext>
             </a:extLst>
           </p:cNvPr>
@@ -1752,7 +1752,7 @@
           <p:cNvPr id="4" name="cover-audience">
             <a:extLst xmlns:a="http://schemas.openxmlformats.org/drawingml/2006/main">
               <a:ext uri="{FF2B5EF4-FFF2-40B4-BE49-F238E27FC236}">
-                <a16:creationId xmlns:a16="http://schemas.microsoft.com/office/drawing/2014/main" id="{5C863E03-EEB8-44D0-94C3-32F30EF390F5}"/>
+                <a16:creationId xmlns:a16="http://schemas.microsoft.com/office/drawing/2014/main" id="{D27F9018-A7E0-4CA1-9DE7-D5DD979B4750}"/>
               </a:ext>
             </a:extLst>
           </p:cNvPr>
@@ -1810,7 +1810,7 @@
           <p:cNvPr id="5" name="cover-meta">
             <a:extLst xmlns:a="http://schemas.openxmlformats.org/drawingml/2006/main">
               <a:ext uri="{FF2B5EF4-FFF2-40B4-BE49-F238E27FC236}">
-                <a16:creationId xmlns:a16="http://schemas.microsoft.com/office/drawing/2014/main" id="{A1FB9938-6605-4E42-89EF-39EFB8B330EA}"/>
+                <a16:creationId xmlns:a16="http://schemas.microsoft.com/office/drawing/2014/main" id="{97300B8B-5A50-45BD-BA72-C3AFDBAFA01D}"/>
               </a:ext>
             </a:extLst>
           </p:cNvPr>
@@ -1904,7 +1904,7 @@
                 <a:ea typeface="PingFang SC"/>
                 <a:cs typeface="PingFang SC"/>
               </a:rPr>
-              <a:t>证据快照  shopflow-41d613d1137b</a:t>
+              <a:t>证据快照  shopflow-fcbc6c1cd435</a:t>
             </a:r>
           </a:p>
         </p:txBody>
@@ -1914,7 +1914,7 @@
           <p:cNvPr id="6" name="cover-health">
             <a:extLst xmlns:a="http://schemas.openxmlformats.org/drawingml/2006/main">
               <a:ext uri="{FF2B5EF4-FFF2-40B4-BE49-F238E27FC236}">
-                <a16:creationId xmlns:a16="http://schemas.microsoft.com/office/drawing/2014/main" id="{A23DCE96-9401-400B-B916-28372B0F3A80}"/>
+                <a16:creationId xmlns:a16="http://schemas.microsoft.com/office/drawing/2014/main" id="{73B432C6-C73D-43E6-9A33-F6DB9FAFC963}"/>
               </a:ext>
             </a:extLst>
           </p:cNvPr>
@@ -1970,7 +1970,7 @@
     </p:spTree>
     <p:extLst>
       <p:ext uri="{BB962C8B-B14F-4D97-AF65-F5344CB8AC3E}">
-        <p14:creationId xmlns:p14="http://schemas.microsoft.com/office/powerpoint/2010/main" val="1173269623"/>
+        <p14:creationId xmlns:p14="http://schemas.microsoft.com/office/powerpoint/2010/main" val="2071577618"/>
       </p:ext>
     </p:extLst>
   </p:cSld>
@@ -2001,7 +2001,7 @@
           <p:cNvPr id="19" name="title-2">
             <a:extLst xmlns:a="http://schemas.openxmlformats.org/drawingml/2006/main">
               <a:ext uri="{FF2B5EF4-FFF2-40B4-BE49-F238E27FC236}">
-                <a16:creationId xmlns:a16="http://schemas.microsoft.com/office/drawing/2014/main" id="{705E66F3-9BC8-43F3-93C2-737B23BA2A4B}"/>
+                <a16:creationId xmlns:a16="http://schemas.microsoft.com/office/drawing/2014/main" id="{2F69F5FE-6E5B-4BFA-9EBB-C244ECAEE408}"/>
               </a:ext>
             </a:extLst>
           </p:cNvPr>
@@ -2059,7 +2059,7 @@
           <p:cNvPr id="2" name="subtitle-2">
             <a:extLst xmlns:a="http://schemas.openxmlformats.org/drawingml/2006/main">
               <a:ext uri="{FF2B5EF4-FFF2-40B4-BE49-F238E27FC236}">
-                <a16:creationId xmlns:a16="http://schemas.microsoft.com/office/drawing/2014/main" id="{EDFCEB0F-35B8-4E86-BC72-9E763E16CA4B}"/>
+                <a16:creationId xmlns:a16="http://schemas.microsoft.com/office/drawing/2014/main" id="{3A1993E3-ACD3-4C2A-83FA-2DA78A6004FE}"/>
               </a:ext>
             </a:extLst>
           </p:cNvPr>
@@ -2117,7 +2117,7 @@
           <p:cNvPr id="3" name="footer-2">
             <a:extLst xmlns:a="http://schemas.openxmlformats.org/drawingml/2006/main">
               <a:ext uri="{FF2B5EF4-FFF2-40B4-BE49-F238E27FC236}">
-                <a16:creationId xmlns:a16="http://schemas.microsoft.com/office/drawing/2014/main" id="{AF236B72-D2D7-42B1-BF12-342E6AE1C8C5}"/>
+                <a16:creationId xmlns:a16="http://schemas.microsoft.com/office/drawing/2014/main" id="{4FA7FA43-3615-4D01-B0A1-58014329561F}"/>
               </a:ext>
             </a:extLst>
           </p:cNvPr>
@@ -2165,7 +2165,7 @@
                 <a:ea typeface="PingFang SC"/>
                 <a:cs typeface="PingFang SC"/>
               </a:rPr>
-              <a:t>ShopFlow v2.6  |  shopflow-41d613d1137b</a:t>
+              <a:t>ShopFlow v2.6  |  shopflow-fcbc6c1cd435</a:t>
             </a:r>
           </a:p>
         </p:txBody>
@@ -2175,7 +2175,7 @@
           <p:cNvPr id="4" name="page-2">
             <a:extLst xmlns:a="http://schemas.openxmlformats.org/drawingml/2006/main">
               <a:ext uri="{FF2B5EF4-FFF2-40B4-BE49-F238E27FC236}">
-                <a16:creationId xmlns:a16="http://schemas.microsoft.com/office/drawing/2014/main" id="{7C4C1844-88F0-43D0-9820-912175A8377C}"/>
+                <a16:creationId xmlns:a16="http://schemas.microsoft.com/office/drawing/2014/main" id="{B3656EFC-0A1A-4572-B5D9-28F17DD113AC}"/>
               </a:ext>
             </a:extLst>
           </p:cNvPr>
@@ -2233,7 +2233,7 @@
           <p:cNvPr id="5" name="progress-number">
             <a:extLst xmlns:a="http://schemas.openxmlformats.org/drawingml/2006/main">
               <a:ext uri="{FF2B5EF4-FFF2-40B4-BE49-F238E27FC236}">
-                <a16:creationId xmlns:a16="http://schemas.microsoft.com/office/drawing/2014/main" id="{60D85456-0C54-4643-8689-A46888BEF350}"/>
+                <a16:creationId xmlns:a16="http://schemas.microsoft.com/office/drawing/2014/main" id="{93A77C57-A1B0-41AD-9F9B-085A9655301A}"/>
               </a:ext>
             </a:extLst>
           </p:cNvPr>
@@ -2291,7 +2291,7 @@
           <p:cNvPr id="6" name="progress-base">
             <a:extLst xmlns:a="http://schemas.openxmlformats.org/drawingml/2006/main">
               <a:ext uri="{FF2B5EF4-FFF2-40B4-BE49-F238E27FC236}">
-                <a16:creationId xmlns:a16="http://schemas.microsoft.com/office/drawing/2014/main" id="{6649ACE9-1CAE-4CD7-983E-F73BB32E6CB6}"/>
+                <a16:creationId xmlns:a16="http://schemas.microsoft.com/office/drawing/2014/main" id="{DB64C690-2BE6-4112-8112-F4864115D63E}"/>
               </a:ext>
             </a:extLst>
           </p:cNvPr>
@@ -2322,7 +2322,7 @@
           <p:cNvPr id="7" name="progress-fill">
             <a:extLst xmlns:a="http://schemas.openxmlformats.org/drawingml/2006/main">
               <a:ext uri="{FF2B5EF4-FFF2-40B4-BE49-F238E27FC236}">
-                <a16:creationId xmlns:a16="http://schemas.microsoft.com/office/drawing/2014/main" id="{9AE2BD45-2957-4E48-9EF8-BE5DB7FB9D7A}"/>
+                <a16:creationId xmlns:a16="http://schemas.microsoft.com/office/drawing/2014/main" id="{AAAC925E-3B4A-4AB6-BAE9-9939A4A9F81C}"/>
               </a:ext>
             </a:extLst>
           </p:cNvPr>
@@ -2353,7 +2353,7 @@
           <p:cNvPr id="8" name="progress-label">
             <a:extLst xmlns:a="http://schemas.openxmlformats.org/drawingml/2006/main">
               <a:ext uri="{FF2B5EF4-FFF2-40B4-BE49-F238E27FC236}">
-                <a16:creationId xmlns:a16="http://schemas.microsoft.com/office/drawing/2014/main" id="{4F24829B-2B20-423D-952F-83893D2594D0}"/>
+                <a16:creationId xmlns:a16="http://schemas.microsoft.com/office/drawing/2014/main" id="{9919BBF5-AE43-496E-BB83-8123F861D2DE}"/>
               </a:ext>
             </a:extLst>
           </p:cNvPr>
@@ -2411,7 +2411,7 @@
           <p:cNvPr id="9" name="stat-bg-0">
             <a:extLst xmlns:a="http://schemas.openxmlformats.org/drawingml/2006/main">
               <a:ext uri="{FF2B5EF4-FFF2-40B4-BE49-F238E27FC236}">
-                <a16:creationId xmlns:a16="http://schemas.microsoft.com/office/drawing/2014/main" id="{8E546A17-355F-43E1-BE88-16129D2044D0}"/>
+                <a16:creationId xmlns:a16="http://schemas.microsoft.com/office/drawing/2014/main" id="{36F475E1-5F5D-4B81-8312-4133813B6721}"/>
               </a:ext>
             </a:extLst>
           </p:cNvPr>
@@ -2442,7 +2442,7 @@
           <p:cNvPr id="10" name="stat-value-0">
             <a:extLst xmlns:a="http://schemas.openxmlformats.org/drawingml/2006/main">
               <a:ext uri="{FF2B5EF4-FFF2-40B4-BE49-F238E27FC236}">
-                <a16:creationId xmlns:a16="http://schemas.microsoft.com/office/drawing/2014/main" id="{404AFB2B-AB90-4470-B133-7FB3DA6C46DC}"/>
+                <a16:creationId xmlns:a16="http://schemas.microsoft.com/office/drawing/2014/main" id="{C2D00B7C-BEE3-433D-B44D-B45B17328128}"/>
               </a:ext>
             </a:extLst>
           </p:cNvPr>
@@ -2500,7 +2500,7 @@
           <p:cNvPr id="11" name="stat-label-0">
             <a:extLst xmlns:a="http://schemas.openxmlformats.org/drawingml/2006/main">
               <a:ext uri="{FF2B5EF4-FFF2-40B4-BE49-F238E27FC236}">
-                <a16:creationId xmlns:a16="http://schemas.microsoft.com/office/drawing/2014/main" id="{7A685DFA-DCDD-4EE5-9ED0-08987674AB62}"/>
+                <a16:creationId xmlns:a16="http://schemas.microsoft.com/office/drawing/2014/main" id="{0F573E8A-FD26-4F0C-9A64-9D87A5619A20}"/>
               </a:ext>
             </a:extLst>
           </p:cNvPr>
@@ -2558,7 +2558,7 @@
           <p:cNvPr id="12" name="stat-bg-1">
             <a:extLst xmlns:a="http://schemas.openxmlformats.org/drawingml/2006/main">
               <a:ext uri="{FF2B5EF4-FFF2-40B4-BE49-F238E27FC236}">
-                <a16:creationId xmlns:a16="http://schemas.microsoft.com/office/drawing/2014/main" id="{07668D9F-8DCA-4F13-A942-872C2DEFF085}"/>
+                <a16:creationId xmlns:a16="http://schemas.microsoft.com/office/drawing/2014/main" id="{2D365A0D-60A7-4DD6-90ED-6F47C2DD12FA}"/>
               </a:ext>
             </a:extLst>
           </p:cNvPr>
@@ -2589,7 +2589,7 @@
           <p:cNvPr id="13" name="stat-value-1">
             <a:extLst xmlns:a="http://schemas.openxmlformats.org/drawingml/2006/main">
               <a:ext uri="{FF2B5EF4-FFF2-40B4-BE49-F238E27FC236}">
-                <a16:creationId xmlns:a16="http://schemas.microsoft.com/office/drawing/2014/main" id="{F730E821-2CBD-4C5A-ADF7-4E93D0214656}"/>
+                <a16:creationId xmlns:a16="http://schemas.microsoft.com/office/drawing/2014/main" id="{EA636FB7-37C0-427C-8630-57FEEE98B7BF}"/>
               </a:ext>
             </a:extLst>
           </p:cNvPr>
@@ -2647,7 +2647,7 @@
           <p:cNvPr id="14" name="stat-label-1">
             <a:extLst xmlns:a="http://schemas.openxmlformats.org/drawingml/2006/main">
               <a:ext uri="{FF2B5EF4-FFF2-40B4-BE49-F238E27FC236}">
-                <a16:creationId xmlns:a16="http://schemas.microsoft.com/office/drawing/2014/main" id="{FBAE5D44-6847-467D-80E7-1CC6CFE3B5F4}"/>
+                <a16:creationId xmlns:a16="http://schemas.microsoft.com/office/drawing/2014/main" id="{7182CAA6-694C-4C3C-A51F-66155831AD60}"/>
               </a:ext>
             </a:extLst>
           </p:cNvPr>
@@ -2705,7 +2705,7 @@
           <p:cNvPr id="15" name="stat-bg-2">
             <a:extLst xmlns:a="http://schemas.openxmlformats.org/drawingml/2006/main">
               <a:ext uri="{FF2B5EF4-FFF2-40B4-BE49-F238E27FC236}">
-                <a16:creationId xmlns:a16="http://schemas.microsoft.com/office/drawing/2014/main" id="{394AD0C4-594A-4320-9F0A-D497DEEDA06F}"/>
+                <a16:creationId xmlns:a16="http://schemas.microsoft.com/office/drawing/2014/main" id="{C2E8F398-E2BE-4DE0-9E66-355BF9CE8A52}"/>
               </a:ext>
             </a:extLst>
           </p:cNvPr>
@@ -2736,7 +2736,7 @@
           <p:cNvPr id="16" name="stat-value-2">
             <a:extLst xmlns:a="http://schemas.openxmlformats.org/drawingml/2006/main">
               <a:ext uri="{FF2B5EF4-FFF2-40B4-BE49-F238E27FC236}">
-                <a16:creationId xmlns:a16="http://schemas.microsoft.com/office/drawing/2014/main" id="{229AB07F-7788-4A9C-B813-099EE12CD711}"/>
+                <a16:creationId xmlns:a16="http://schemas.microsoft.com/office/drawing/2014/main" id="{BB4EB30D-CBD1-4B14-837C-CFAF8D9C84D0}"/>
               </a:ext>
             </a:extLst>
           </p:cNvPr>
@@ -2794,7 +2794,7 @@
           <p:cNvPr id="17" name="stat-label-2">
             <a:extLst xmlns:a="http://schemas.openxmlformats.org/drawingml/2006/main">
               <a:ext uri="{FF2B5EF4-FFF2-40B4-BE49-F238E27FC236}">
-                <a16:creationId xmlns:a16="http://schemas.microsoft.com/office/drawing/2014/main" id="{D28AD23D-3C83-4F30-B500-9BF268203EC7}"/>
+                <a16:creationId xmlns:a16="http://schemas.microsoft.com/office/drawing/2014/main" id="{B46EF5AD-676F-4A90-A341-5505EB38534C}"/>
               </a:ext>
             </a:extLst>
           </p:cNvPr>
@@ -2852,7 +2852,7 @@
           <p:cNvPr id="18" name="health-conclusion">
             <a:extLst xmlns:a="http://schemas.openxmlformats.org/drawingml/2006/main">
               <a:ext uri="{FF2B5EF4-FFF2-40B4-BE49-F238E27FC236}">
-                <a16:creationId xmlns:a16="http://schemas.microsoft.com/office/drawing/2014/main" id="{EAD6BBC3-8A5F-4A00-AA38-1EDA04E816C4}"/>
+                <a16:creationId xmlns:a16="http://schemas.microsoft.com/office/drawing/2014/main" id="{3FF0047E-1337-4C91-A26A-1CFA0F359316}"/>
               </a:ext>
             </a:extLst>
           </p:cNvPr>
@@ -2908,7 +2908,7 @@
     </p:spTree>
     <p:extLst>
       <p:ext uri="{BB962C8B-B14F-4D97-AF65-F5344CB8AC3E}">
-        <p14:creationId xmlns:p14="http://schemas.microsoft.com/office/powerpoint/2010/main" val="1245091803"/>
+        <p14:creationId xmlns:p14="http://schemas.microsoft.com/office/powerpoint/2010/main" val="2006552501"/>
       </p:ext>
     </p:extLst>
   </p:cSld>
@@ -2939,7 +2939,7 @@
           <p:cNvPr id="65" name="title-3">
             <a:extLst xmlns:a="http://schemas.openxmlformats.org/drawingml/2006/main">
               <a:ext uri="{FF2B5EF4-FFF2-40B4-BE49-F238E27FC236}">
-                <a16:creationId xmlns:a16="http://schemas.microsoft.com/office/drawing/2014/main" id="{F3922E91-398F-4DCA-AC44-CEA7834230C6}"/>
+                <a16:creationId xmlns:a16="http://schemas.microsoft.com/office/drawing/2014/main" id="{AF6B43D3-4E94-4E40-90C8-6756946BDFB0}"/>
               </a:ext>
             </a:extLst>
           </p:cNvPr>
@@ -2997,7 +2997,7 @@
           <p:cNvPr id="2" name="subtitle-3">
             <a:extLst xmlns:a="http://schemas.openxmlformats.org/drawingml/2006/main">
               <a:ext uri="{FF2B5EF4-FFF2-40B4-BE49-F238E27FC236}">
-                <a16:creationId xmlns:a16="http://schemas.microsoft.com/office/drawing/2014/main" id="{1FAA0CC0-9F0E-457E-B195-643D016B361A}"/>
+                <a16:creationId xmlns:a16="http://schemas.microsoft.com/office/drawing/2014/main" id="{6EF40C50-E5D7-41E7-9ED5-53017423ED1C}"/>
               </a:ext>
             </a:extLst>
           </p:cNvPr>
@@ -3055,7 +3055,7 @@
           <p:cNvPr id="3" name="footer-3">
             <a:extLst xmlns:a="http://schemas.openxmlformats.org/drawingml/2006/main">
               <a:ext uri="{FF2B5EF4-FFF2-40B4-BE49-F238E27FC236}">
-                <a16:creationId xmlns:a16="http://schemas.microsoft.com/office/drawing/2014/main" id="{D85D72D1-2931-489B-9BF4-DC23E693343C}"/>
+                <a16:creationId xmlns:a16="http://schemas.microsoft.com/office/drawing/2014/main" id="{46A1C050-FEAE-4CD9-A31E-77C6DD0D3604}"/>
               </a:ext>
             </a:extLst>
           </p:cNvPr>
@@ -3103,7 +3103,7 @@
                 <a:ea typeface="PingFang SC"/>
                 <a:cs typeface="PingFang SC"/>
               </a:rPr>
-              <a:t>ShopFlow v2.6  |  shopflow-41d613d1137b</a:t>
+              <a:t>ShopFlow v2.6  |  shopflow-fcbc6c1cd435</a:t>
             </a:r>
           </a:p>
         </p:txBody>
@@ -3113,7 +3113,7 @@
           <p:cNvPr id="4" name="page-3">
             <a:extLst xmlns:a="http://schemas.openxmlformats.org/drawingml/2006/main">
               <a:ext uri="{FF2B5EF4-FFF2-40B4-BE49-F238E27FC236}">
-                <a16:creationId xmlns:a16="http://schemas.microsoft.com/office/drawing/2014/main" id="{412BC84E-EADD-4D42-8153-D687258A8BA8}"/>
+                <a16:creationId xmlns:a16="http://schemas.microsoft.com/office/drawing/2014/main" id="{73477E09-F7C7-4AE7-9D67-F4F46D9827F6}"/>
               </a:ext>
             </a:extLst>
           </p:cNvPr>
@@ -3171,7 +3171,7 @@
           <p:cNvPr id="5" name="header-bg-0-180">
             <a:extLst xmlns:a="http://schemas.openxmlformats.org/drawingml/2006/main">
               <a:ext uri="{FF2B5EF4-FFF2-40B4-BE49-F238E27FC236}">
-                <a16:creationId xmlns:a16="http://schemas.microsoft.com/office/drawing/2014/main" id="{B16D3297-92E1-4D72-BF46-834D1C09E0C3}"/>
+                <a16:creationId xmlns:a16="http://schemas.microsoft.com/office/drawing/2014/main" id="{C086F0DB-81DD-431A-AE5F-F1F1912EFA01}"/>
               </a:ext>
             </a:extLst>
           </p:cNvPr>
@@ -3202,7 +3202,7 @@
           <p:cNvPr id="6" name="header-0-180">
             <a:extLst xmlns:a="http://schemas.openxmlformats.org/drawingml/2006/main">
               <a:ext uri="{FF2B5EF4-FFF2-40B4-BE49-F238E27FC236}">
-                <a16:creationId xmlns:a16="http://schemas.microsoft.com/office/drawing/2014/main" id="{05FD97E8-52FA-4205-AAB4-9C13768A6DCE}"/>
+                <a16:creationId xmlns:a16="http://schemas.microsoft.com/office/drawing/2014/main" id="{7C546174-1751-4D4A-8E86-9A6B4C873D4A}"/>
               </a:ext>
             </a:extLst>
           </p:cNvPr>
@@ -3260,7 +3260,7 @@
           <p:cNvPr id="7" name="header-bg-1-180">
             <a:extLst xmlns:a="http://schemas.openxmlformats.org/drawingml/2006/main">
               <a:ext uri="{FF2B5EF4-FFF2-40B4-BE49-F238E27FC236}">
-                <a16:creationId xmlns:a16="http://schemas.microsoft.com/office/drawing/2014/main" id="{19CB7986-7221-44FD-B4CB-3A75BB6CD2B0}"/>
+                <a16:creationId xmlns:a16="http://schemas.microsoft.com/office/drawing/2014/main" id="{87A68EA9-0088-4AEC-921B-A795766E0F2D}"/>
               </a:ext>
             </a:extLst>
           </p:cNvPr>
@@ -3291,7 +3291,7 @@
           <p:cNvPr id="8" name="header-1-180">
             <a:extLst xmlns:a="http://schemas.openxmlformats.org/drawingml/2006/main">
               <a:ext uri="{FF2B5EF4-FFF2-40B4-BE49-F238E27FC236}">
-                <a16:creationId xmlns:a16="http://schemas.microsoft.com/office/drawing/2014/main" id="{87657821-12E1-4775-B0D2-53CB2A2C1CD4}"/>
+                <a16:creationId xmlns:a16="http://schemas.microsoft.com/office/drawing/2014/main" id="{DBF001BA-3C8B-4DF8-9C4B-A7A4CB4308E8}"/>
               </a:ext>
             </a:extLst>
           </p:cNvPr>
@@ -3349,7 +3349,7 @@
           <p:cNvPr id="9" name="header-bg-2-180">
             <a:extLst xmlns:a="http://schemas.openxmlformats.org/drawingml/2006/main">
               <a:ext uri="{FF2B5EF4-FFF2-40B4-BE49-F238E27FC236}">
-                <a16:creationId xmlns:a16="http://schemas.microsoft.com/office/drawing/2014/main" id="{7E8F952B-5680-4023-AD79-1F92AA34C73C}"/>
+                <a16:creationId xmlns:a16="http://schemas.microsoft.com/office/drawing/2014/main" id="{965200D8-8D8E-454A-B410-7114E5847B3A}"/>
               </a:ext>
             </a:extLst>
           </p:cNvPr>
@@ -3380,7 +3380,7 @@
           <p:cNvPr id="10" name="header-2-180">
             <a:extLst xmlns:a="http://schemas.openxmlformats.org/drawingml/2006/main">
               <a:ext uri="{FF2B5EF4-FFF2-40B4-BE49-F238E27FC236}">
-                <a16:creationId xmlns:a16="http://schemas.microsoft.com/office/drawing/2014/main" id="{B0F729D5-B189-4880-8054-6B5D960843ED}"/>
+                <a16:creationId xmlns:a16="http://schemas.microsoft.com/office/drawing/2014/main" id="{82FC9035-A8E8-4FC5-915D-D7783BD1155E}"/>
               </a:ext>
             </a:extLst>
           </p:cNvPr>
@@ -3438,7 +3438,7 @@
           <p:cNvPr id="11" name="header-bg-3-180">
             <a:extLst xmlns:a="http://schemas.openxmlformats.org/drawingml/2006/main">
               <a:ext uri="{FF2B5EF4-FFF2-40B4-BE49-F238E27FC236}">
-                <a16:creationId xmlns:a16="http://schemas.microsoft.com/office/drawing/2014/main" id="{8EEA5A69-53AC-4DA6-9617-E9B53F838ED3}"/>
+                <a16:creationId xmlns:a16="http://schemas.microsoft.com/office/drawing/2014/main" id="{18B09147-4F1B-4E75-8982-07295D3B01D3}"/>
               </a:ext>
             </a:extLst>
           </p:cNvPr>
@@ -3469,7 +3469,7 @@
           <p:cNvPr id="12" name="header-3-180">
             <a:extLst xmlns:a="http://schemas.openxmlformats.org/drawingml/2006/main">
               <a:ext uri="{FF2B5EF4-FFF2-40B4-BE49-F238E27FC236}">
-                <a16:creationId xmlns:a16="http://schemas.microsoft.com/office/drawing/2014/main" id="{C8723A55-EFA5-446B-8822-679DCC9B2152}"/>
+                <a16:creationId xmlns:a16="http://schemas.microsoft.com/office/drawing/2014/main" id="{DE51DB7B-DACF-411B-9D83-AC50C43FFFDA}"/>
               </a:ext>
             </a:extLst>
           </p:cNvPr>
@@ -3527,7 +3527,7 @@
           <p:cNvPr id="13" name="header-bg-4-180">
             <a:extLst xmlns:a="http://schemas.openxmlformats.org/drawingml/2006/main">
               <a:ext uri="{FF2B5EF4-FFF2-40B4-BE49-F238E27FC236}">
-                <a16:creationId xmlns:a16="http://schemas.microsoft.com/office/drawing/2014/main" id="{02A4FA6D-7922-4876-B3EF-5E8917ADE762}"/>
+                <a16:creationId xmlns:a16="http://schemas.microsoft.com/office/drawing/2014/main" id="{7BD574B5-C0A0-4215-BF7E-9394ADA56AF4}"/>
               </a:ext>
             </a:extLst>
           </p:cNvPr>
@@ -3558,7 +3558,7 @@
           <p:cNvPr id="14" name="header-4-180">
             <a:extLst xmlns:a="http://schemas.openxmlformats.org/drawingml/2006/main">
               <a:ext uri="{FF2B5EF4-FFF2-40B4-BE49-F238E27FC236}">
-                <a16:creationId xmlns:a16="http://schemas.microsoft.com/office/drawing/2014/main" id="{8C0C7093-5422-40BB-A3E9-52FF61AE5A85}"/>
+                <a16:creationId xmlns:a16="http://schemas.microsoft.com/office/drawing/2014/main" id="{B92B20A3-9D00-47C5-A89D-920EE2CC5A9F}"/>
               </a:ext>
             </a:extLst>
           </p:cNvPr>
@@ -3616,7 +3616,7 @@
           <p:cNvPr id="15" name="cell-bg-0-0-180">
             <a:extLst xmlns:a="http://schemas.openxmlformats.org/drawingml/2006/main">
               <a:ext uri="{FF2B5EF4-FFF2-40B4-BE49-F238E27FC236}">
-                <a16:creationId xmlns:a16="http://schemas.microsoft.com/office/drawing/2014/main" id="{8618E437-5789-46A1-9828-A90E034808C1}"/>
+                <a16:creationId xmlns:a16="http://schemas.microsoft.com/office/drawing/2014/main" id="{108272BF-389F-420F-AC5E-69F5AEE97AD1}"/>
               </a:ext>
             </a:extLst>
           </p:cNvPr>
@@ -3649,7 +3649,7 @@
           <p:cNvPr id="16" name="cell-0-0-180">
             <a:extLst xmlns:a="http://schemas.openxmlformats.org/drawingml/2006/main">
               <a:ext uri="{FF2B5EF4-FFF2-40B4-BE49-F238E27FC236}">
-                <a16:creationId xmlns:a16="http://schemas.microsoft.com/office/drawing/2014/main" id="{5215514D-DC50-4E19-A5B3-103A747F1EE5}"/>
+                <a16:creationId xmlns:a16="http://schemas.microsoft.com/office/drawing/2014/main" id="{1967AC11-6B86-4113-B666-F4EFD6671480}"/>
               </a:ext>
             </a:extLst>
           </p:cNvPr>
@@ -3707,7 +3707,7 @@
           <p:cNvPr id="17" name="cell-bg-0-1-180">
             <a:extLst xmlns:a="http://schemas.openxmlformats.org/drawingml/2006/main">
               <a:ext uri="{FF2B5EF4-FFF2-40B4-BE49-F238E27FC236}">
-                <a16:creationId xmlns:a16="http://schemas.microsoft.com/office/drawing/2014/main" id="{9AEDE656-30E4-49E7-B4BF-3277BB375F85}"/>
+                <a16:creationId xmlns:a16="http://schemas.microsoft.com/office/drawing/2014/main" id="{537F0B12-219D-4C66-A059-3169397411D3}"/>
               </a:ext>
             </a:extLst>
           </p:cNvPr>
@@ -3740,7 +3740,7 @@
           <p:cNvPr id="18" name="cell-0-1-180">
             <a:extLst xmlns:a="http://schemas.openxmlformats.org/drawingml/2006/main">
               <a:ext uri="{FF2B5EF4-FFF2-40B4-BE49-F238E27FC236}">
-                <a16:creationId xmlns:a16="http://schemas.microsoft.com/office/drawing/2014/main" id="{4D890539-52CC-40D4-994C-F7E5D547BE8F}"/>
+                <a16:creationId xmlns:a16="http://schemas.microsoft.com/office/drawing/2014/main" id="{B7B643E7-9997-41DB-91B4-762CBB996151}"/>
               </a:ext>
             </a:extLst>
           </p:cNvPr>
@@ -3798,7 +3798,7 @@
           <p:cNvPr id="19" name="cell-bg-0-2-180">
             <a:extLst xmlns:a="http://schemas.openxmlformats.org/drawingml/2006/main">
               <a:ext uri="{FF2B5EF4-FFF2-40B4-BE49-F238E27FC236}">
-                <a16:creationId xmlns:a16="http://schemas.microsoft.com/office/drawing/2014/main" id="{AE4385F4-C905-40D4-BEB5-BD59933B9538}"/>
+                <a16:creationId xmlns:a16="http://schemas.microsoft.com/office/drawing/2014/main" id="{C14CED2A-DAFE-469E-BA3B-B86F2977EB7D}"/>
               </a:ext>
             </a:extLst>
           </p:cNvPr>
@@ -3831,7 +3831,7 @@
           <p:cNvPr id="20" name="cell-0-2-180">
             <a:extLst xmlns:a="http://schemas.openxmlformats.org/drawingml/2006/main">
               <a:ext uri="{FF2B5EF4-FFF2-40B4-BE49-F238E27FC236}">
-                <a16:creationId xmlns:a16="http://schemas.microsoft.com/office/drawing/2014/main" id="{EFC95DA8-E066-41E8-B5BA-3672FBF39DC2}"/>
+                <a16:creationId xmlns:a16="http://schemas.microsoft.com/office/drawing/2014/main" id="{372C8326-CE49-4862-B462-13857CA3FEEF}"/>
               </a:ext>
             </a:extLst>
           </p:cNvPr>
@@ -3889,7 +3889,7 @@
           <p:cNvPr id="21" name="cell-bg-0-3-180">
             <a:extLst xmlns:a="http://schemas.openxmlformats.org/drawingml/2006/main">
               <a:ext uri="{FF2B5EF4-FFF2-40B4-BE49-F238E27FC236}">
-                <a16:creationId xmlns:a16="http://schemas.microsoft.com/office/drawing/2014/main" id="{0BE0D1A0-9A9F-4C10-B214-6CDA972C3C81}"/>
+                <a16:creationId xmlns:a16="http://schemas.microsoft.com/office/drawing/2014/main" id="{ECD42E1A-02AC-4635-A985-07AF28C9AA21}"/>
               </a:ext>
             </a:extLst>
           </p:cNvPr>
@@ -3922,7 +3922,7 @@
           <p:cNvPr id="22" name="cell-0-3-180">
             <a:extLst xmlns:a="http://schemas.openxmlformats.org/drawingml/2006/main">
               <a:ext uri="{FF2B5EF4-FFF2-40B4-BE49-F238E27FC236}">
-                <a16:creationId xmlns:a16="http://schemas.microsoft.com/office/drawing/2014/main" id="{46DAFAC2-9928-448C-9AA3-9D8A24731624}"/>
+                <a16:creationId xmlns:a16="http://schemas.microsoft.com/office/drawing/2014/main" id="{72FF0729-6889-4A6B-8B66-FC6F78B6406C}"/>
               </a:ext>
             </a:extLst>
           </p:cNvPr>
@@ -3980,7 +3980,7 @@
           <p:cNvPr id="23" name="cell-bg-0-4-180">
             <a:extLst xmlns:a="http://schemas.openxmlformats.org/drawingml/2006/main">
               <a:ext uri="{FF2B5EF4-FFF2-40B4-BE49-F238E27FC236}">
-                <a16:creationId xmlns:a16="http://schemas.microsoft.com/office/drawing/2014/main" id="{D60CE5F9-4292-4C32-B997-B32B7417688A}"/>
+                <a16:creationId xmlns:a16="http://schemas.microsoft.com/office/drawing/2014/main" id="{E39836C2-3903-4B93-9D8D-20EB41E41298}"/>
               </a:ext>
             </a:extLst>
           </p:cNvPr>
@@ -4013,7 +4013,7 @@
           <p:cNvPr id="24" name="cell-0-4-180">
             <a:extLst xmlns:a="http://schemas.openxmlformats.org/drawingml/2006/main">
               <a:ext uri="{FF2B5EF4-FFF2-40B4-BE49-F238E27FC236}">
-                <a16:creationId xmlns:a16="http://schemas.microsoft.com/office/drawing/2014/main" id="{F3660EF6-58DF-42B1-8098-B0770BD36DA5}"/>
+                <a16:creationId xmlns:a16="http://schemas.microsoft.com/office/drawing/2014/main" id="{6F6836B3-79EA-4C5E-838A-EE1096D4F12A}"/>
               </a:ext>
             </a:extLst>
           </p:cNvPr>
@@ -4071,7 +4071,7 @@
           <p:cNvPr id="25" name="cell-bg-1-0-180">
             <a:extLst xmlns:a="http://schemas.openxmlformats.org/drawingml/2006/main">
               <a:ext uri="{FF2B5EF4-FFF2-40B4-BE49-F238E27FC236}">
-                <a16:creationId xmlns:a16="http://schemas.microsoft.com/office/drawing/2014/main" id="{6AC71F95-D6F0-4603-B8D1-9A49B757A79B}"/>
+                <a16:creationId xmlns:a16="http://schemas.microsoft.com/office/drawing/2014/main" id="{45961D60-5DDB-4CE1-84DB-CE044A329D00}"/>
               </a:ext>
             </a:extLst>
           </p:cNvPr>
@@ -4104,7 +4104,7 @@
           <p:cNvPr id="26" name="cell-1-0-180">
             <a:extLst xmlns:a="http://schemas.openxmlformats.org/drawingml/2006/main">
               <a:ext uri="{FF2B5EF4-FFF2-40B4-BE49-F238E27FC236}">
-                <a16:creationId xmlns:a16="http://schemas.microsoft.com/office/drawing/2014/main" id="{340E344A-34B5-4439-8E9B-0B268F3BAD1F}"/>
+                <a16:creationId xmlns:a16="http://schemas.microsoft.com/office/drawing/2014/main" id="{0A8DE7F3-7914-466B-8A05-E61298FC6A4B}"/>
               </a:ext>
             </a:extLst>
           </p:cNvPr>
@@ -4162,7 +4162,7 @@
           <p:cNvPr id="27" name="cell-bg-1-1-180">
             <a:extLst xmlns:a="http://schemas.openxmlformats.org/drawingml/2006/main">
               <a:ext uri="{FF2B5EF4-FFF2-40B4-BE49-F238E27FC236}">
-                <a16:creationId xmlns:a16="http://schemas.microsoft.com/office/drawing/2014/main" id="{2AE90C1C-A377-416B-AE3A-4CDDCAB31588}"/>
+                <a16:creationId xmlns:a16="http://schemas.microsoft.com/office/drawing/2014/main" id="{22A4D2FF-D5FE-4B10-8460-8C50C423B506}"/>
               </a:ext>
             </a:extLst>
           </p:cNvPr>
@@ -4195,7 +4195,7 @@
           <p:cNvPr id="28" name="cell-1-1-180">
             <a:extLst xmlns:a="http://schemas.openxmlformats.org/drawingml/2006/main">
               <a:ext uri="{FF2B5EF4-FFF2-40B4-BE49-F238E27FC236}">
-                <a16:creationId xmlns:a16="http://schemas.microsoft.com/office/drawing/2014/main" id="{611365E7-ACB9-4FDC-B3C2-43AA94753154}"/>
+                <a16:creationId xmlns:a16="http://schemas.microsoft.com/office/drawing/2014/main" id="{E55D55C7-5DF8-4BC1-9373-6945FF1DB072}"/>
               </a:ext>
             </a:extLst>
           </p:cNvPr>
@@ -4253,7 +4253,7 @@
           <p:cNvPr id="29" name="cell-bg-1-2-180">
             <a:extLst xmlns:a="http://schemas.openxmlformats.org/drawingml/2006/main">
               <a:ext uri="{FF2B5EF4-FFF2-40B4-BE49-F238E27FC236}">
-                <a16:creationId xmlns:a16="http://schemas.microsoft.com/office/drawing/2014/main" id="{1B5EE02A-BAA9-4DA1-906C-B19D79E156A5}"/>
+                <a16:creationId xmlns:a16="http://schemas.microsoft.com/office/drawing/2014/main" id="{5C018E5B-0E4E-4FEE-B62F-A661382811FC}"/>
               </a:ext>
             </a:extLst>
           </p:cNvPr>
@@ -4286,7 +4286,7 @@
           <p:cNvPr id="30" name="cell-1-2-180">
             <a:extLst xmlns:a="http://schemas.openxmlformats.org/drawingml/2006/main">
               <a:ext uri="{FF2B5EF4-FFF2-40B4-BE49-F238E27FC236}">
-                <a16:creationId xmlns:a16="http://schemas.microsoft.com/office/drawing/2014/main" id="{6A591CD7-60EA-4772-B3F4-424F9A21FC0E}"/>
+                <a16:creationId xmlns:a16="http://schemas.microsoft.com/office/drawing/2014/main" id="{40376F27-5CC0-4B17-B7FA-D07C3FCEE8C8}"/>
               </a:ext>
             </a:extLst>
           </p:cNvPr>
@@ -4344,7 +4344,7 @@
           <p:cNvPr id="31" name="cell-bg-1-3-180">
             <a:extLst xmlns:a="http://schemas.openxmlformats.org/drawingml/2006/main">
               <a:ext uri="{FF2B5EF4-FFF2-40B4-BE49-F238E27FC236}">
-                <a16:creationId xmlns:a16="http://schemas.microsoft.com/office/drawing/2014/main" id="{0F539DAC-6498-4E9D-B48B-B1119AC1461D}"/>
+                <a16:creationId xmlns:a16="http://schemas.microsoft.com/office/drawing/2014/main" id="{33BA6C36-0CB8-4ABC-9544-28C1B88F9756}"/>
               </a:ext>
             </a:extLst>
           </p:cNvPr>
@@ -4377,7 +4377,7 @@
           <p:cNvPr id="32" name="cell-1-3-180">
             <a:extLst xmlns:a="http://schemas.openxmlformats.org/drawingml/2006/main">
               <a:ext uri="{FF2B5EF4-FFF2-40B4-BE49-F238E27FC236}">
-                <a16:creationId xmlns:a16="http://schemas.microsoft.com/office/drawing/2014/main" id="{18185C58-9C77-4594-8B84-7DC15B050AEF}"/>
+                <a16:creationId xmlns:a16="http://schemas.microsoft.com/office/drawing/2014/main" id="{D787B474-F889-4D90-A233-2BE2C34261CB}"/>
               </a:ext>
             </a:extLst>
           </p:cNvPr>
@@ -4435,7 +4435,7 @@
           <p:cNvPr id="33" name="cell-bg-1-4-180">
             <a:extLst xmlns:a="http://schemas.openxmlformats.org/drawingml/2006/main">
               <a:ext uri="{FF2B5EF4-FFF2-40B4-BE49-F238E27FC236}">
-                <a16:creationId xmlns:a16="http://schemas.microsoft.com/office/drawing/2014/main" id="{F81DD2AF-712F-4DB0-9875-3C5CD4B6DFD1}"/>
+                <a16:creationId xmlns:a16="http://schemas.microsoft.com/office/drawing/2014/main" id="{A1DF011F-33EB-4FB7-BC72-F8A19F4D9412}"/>
               </a:ext>
             </a:extLst>
           </p:cNvPr>
@@ -4468,7 +4468,7 @@
           <p:cNvPr id="34" name="cell-1-4-180">
             <a:extLst xmlns:a="http://schemas.openxmlformats.org/drawingml/2006/main">
               <a:ext uri="{FF2B5EF4-FFF2-40B4-BE49-F238E27FC236}">
-                <a16:creationId xmlns:a16="http://schemas.microsoft.com/office/drawing/2014/main" id="{9F233C4D-9805-406B-9081-B1F52D244C90}"/>
+                <a16:creationId xmlns:a16="http://schemas.microsoft.com/office/drawing/2014/main" id="{77F58FDD-5846-435F-9736-1595C6F0741F}"/>
               </a:ext>
             </a:extLst>
           </p:cNvPr>
@@ -4526,7 +4526,7 @@
           <p:cNvPr id="35" name="cell-bg-2-0-180">
             <a:extLst xmlns:a="http://schemas.openxmlformats.org/drawingml/2006/main">
               <a:ext uri="{FF2B5EF4-FFF2-40B4-BE49-F238E27FC236}">
-                <a16:creationId xmlns:a16="http://schemas.microsoft.com/office/drawing/2014/main" id="{FE96AFDA-75DB-4F92-BC46-C74C7F87587A}"/>
+                <a16:creationId xmlns:a16="http://schemas.microsoft.com/office/drawing/2014/main" id="{5C7686D6-ED2C-439A-87DC-8768036FE41C}"/>
               </a:ext>
             </a:extLst>
           </p:cNvPr>
@@ -4559,7 +4559,7 @@
           <p:cNvPr id="36" name="cell-2-0-180">
             <a:extLst xmlns:a="http://schemas.openxmlformats.org/drawingml/2006/main">
               <a:ext uri="{FF2B5EF4-FFF2-40B4-BE49-F238E27FC236}">
-                <a16:creationId xmlns:a16="http://schemas.microsoft.com/office/drawing/2014/main" id="{9BFF0593-545B-4033-A432-17CDFDAA2667}"/>
+                <a16:creationId xmlns:a16="http://schemas.microsoft.com/office/drawing/2014/main" id="{36E4381A-28AF-4C69-A33F-1BCCF3BE9EF8}"/>
               </a:ext>
             </a:extLst>
           </p:cNvPr>
@@ -4617,7 +4617,7 @@
           <p:cNvPr id="37" name="cell-bg-2-1-180">
             <a:extLst xmlns:a="http://schemas.openxmlformats.org/drawingml/2006/main">
               <a:ext uri="{FF2B5EF4-FFF2-40B4-BE49-F238E27FC236}">
-                <a16:creationId xmlns:a16="http://schemas.microsoft.com/office/drawing/2014/main" id="{70F48857-D483-432A-8821-6FDD12242D74}"/>
+                <a16:creationId xmlns:a16="http://schemas.microsoft.com/office/drawing/2014/main" id="{CF6B6456-B774-4C67-ADBC-C048D51D2A9C}"/>
               </a:ext>
             </a:extLst>
           </p:cNvPr>
@@ -4650,7 +4650,7 @@
           <p:cNvPr id="38" name="cell-2-1-180">
             <a:extLst xmlns:a="http://schemas.openxmlformats.org/drawingml/2006/main">
               <a:ext uri="{FF2B5EF4-FFF2-40B4-BE49-F238E27FC236}">
-                <a16:creationId xmlns:a16="http://schemas.microsoft.com/office/drawing/2014/main" id="{3DC987D1-85EF-4520-AE02-08A050129840}"/>
+                <a16:creationId xmlns:a16="http://schemas.microsoft.com/office/drawing/2014/main" id="{1195F2A2-D5CA-4A8D-8286-F1F2B7578848}"/>
               </a:ext>
             </a:extLst>
           </p:cNvPr>
@@ -4708,7 +4708,7 @@
           <p:cNvPr id="39" name="cell-bg-2-2-180">
             <a:extLst xmlns:a="http://schemas.openxmlformats.org/drawingml/2006/main">
               <a:ext uri="{FF2B5EF4-FFF2-40B4-BE49-F238E27FC236}">
-                <a16:creationId xmlns:a16="http://schemas.microsoft.com/office/drawing/2014/main" id="{E3BDC137-3296-4350-94DA-B89F2DFD1B17}"/>
+                <a16:creationId xmlns:a16="http://schemas.microsoft.com/office/drawing/2014/main" id="{81D2C8FB-2FB7-462C-90DE-D63CC93F8D87}"/>
               </a:ext>
             </a:extLst>
           </p:cNvPr>
@@ -4741,7 +4741,7 @@
           <p:cNvPr id="40" name="cell-2-2-180">
             <a:extLst xmlns:a="http://schemas.openxmlformats.org/drawingml/2006/main">
               <a:ext uri="{FF2B5EF4-FFF2-40B4-BE49-F238E27FC236}">
-                <a16:creationId xmlns:a16="http://schemas.microsoft.com/office/drawing/2014/main" id="{AA31693A-BFCA-469F-BA50-F5F97D810567}"/>
+                <a16:creationId xmlns:a16="http://schemas.microsoft.com/office/drawing/2014/main" id="{2503C76A-B145-474F-AF61-E1827DAC9A59}"/>
               </a:ext>
             </a:extLst>
           </p:cNvPr>
@@ -4799,7 +4799,7 @@
           <p:cNvPr id="41" name="cell-bg-2-3-180">
             <a:extLst xmlns:a="http://schemas.openxmlformats.org/drawingml/2006/main">
               <a:ext uri="{FF2B5EF4-FFF2-40B4-BE49-F238E27FC236}">
-                <a16:creationId xmlns:a16="http://schemas.microsoft.com/office/drawing/2014/main" id="{15C1F4C9-6F11-49D5-9B28-4AFF863A9ABF}"/>
+                <a16:creationId xmlns:a16="http://schemas.microsoft.com/office/drawing/2014/main" id="{D192B0D3-79D1-431A-8539-4487EA61AD90}"/>
               </a:ext>
             </a:extLst>
           </p:cNvPr>
@@ -4832,7 +4832,7 @@
           <p:cNvPr id="42" name="cell-2-3-180">
             <a:extLst xmlns:a="http://schemas.openxmlformats.org/drawingml/2006/main">
               <a:ext uri="{FF2B5EF4-FFF2-40B4-BE49-F238E27FC236}">
-                <a16:creationId xmlns:a16="http://schemas.microsoft.com/office/drawing/2014/main" id="{1A65C379-0C09-4EE9-8568-A06376687E72}"/>
+                <a16:creationId xmlns:a16="http://schemas.microsoft.com/office/drawing/2014/main" id="{A3C453BF-ED75-4EEA-99A9-FC21DBE4F5D0}"/>
               </a:ext>
             </a:extLst>
           </p:cNvPr>
@@ -4890,7 +4890,7 @@
           <p:cNvPr id="43" name="cell-bg-2-4-180">
             <a:extLst xmlns:a="http://schemas.openxmlformats.org/drawingml/2006/main">
               <a:ext uri="{FF2B5EF4-FFF2-40B4-BE49-F238E27FC236}">
-                <a16:creationId xmlns:a16="http://schemas.microsoft.com/office/drawing/2014/main" id="{31F69324-6C32-4EFF-9748-5E735F6EBB09}"/>
+                <a16:creationId xmlns:a16="http://schemas.microsoft.com/office/drawing/2014/main" id="{F13F9C50-06EF-493E-9102-F0141BA32794}"/>
               </a:ext>
             </a:extLst>
           </p:cNvPr>
@@ -4923,7 +4923,7 @@
           <p:cNvPr id="44" name="cell-2-4-180">
             <a:extLst xmlns:a="http://schemas.openxmlformats.org/drawingml/2006/main">
               <a:ext uri="{FF2B5EF4-FFF2-40B4-BE49-F238E27FC236}">
-                <a16:creationId xmlns:a16="http://schemas.microsoft.com/office/drawing/2014/main" id="{5F9BC63D-BDFC-4085-9CB4-F4C27EFD979C}"/>
+                <a16:creationId xmlns:a16="http://schemas.microsoft.com/office/drawing/2014/main" id="{640A0D10-57D0-4E4D-9FBD-69C55504BF88}"/>
               </a:ext>
             </a:extLst>
           </p:cNvPr>
@@ -4981,7 +4981,7 @@
           <p:cNvPr id="45" name="cell-bg-3-0-180">
             <a:extLst xmlns:a="http://schemas.openxmlformats.org/drawingml/2006/main">
               <a:ext uri="{FF2B5EF4-FFF2-40B4-BE49-F238E27FC236}">
-                <a16:creationId xmlns:a16="http://schemas.microsoft.com/office/drawing/2014/main" id="{F8E932C7-153D-4B9E-B757-4FFB1ACED18A}"/>
+                <a16:creationId xmlns:a16="http://schemas.microsoft.com/office/drawing/2014/main" id="{45B3BAA6-2A59-4E80-9A60-D27BADBBA3DC}"/>
               </a:ext>
             </a:extLst>
           </p:cNvPr>
@@ -5014,7 +5014,7 @@
           <p:cNvPr id="46" name="cell-3-0-180">
             <a:extLst xmlns:a="http://schemas.openxmlformats.org/drawingml/2006/main">
               <a:ext uri="{FF2B5EF4-FFF2-40B4-BE49-F238E27FC236}">
-                <a16:creationId xmlns:a16="http://schemas.microsoft.com/office/drawing/2014/main" id="{053B544A-5BDC-4838-A702-DE6005CC3C4C}"/>
+                <a16:creationId xmlns:a16="http://schemas.microsoft.com/office/drawing/2014/main" id="{AA0F9FC5-B9E6-419D-B4D9-A513C3D529A5}"/>
               </a:ext>
             </a:extLst>
           </p:cNvPr>
@@ -5072,7 +5072,7 @@
           <p:cNvPr id="47" name="cell-bg-3-1-180">
             <a:extLst xmlns:a="http://schemas.openxmlformats.org/drawingml/2006/main">
               <a:ext uri="{FF2B5EF4-FFF2-40B4-BE49-F238E27FC236}">
-                <a16:creationId xmlns:a16="http://schemas.microsoft.com/office/drawing/2014/main" id="{1F202CC8-62AC-4F75-937A-A6018B2B79A7}"/>
+                <a16:creationId xmlns:a16="http://schemas.microsoft.com/office/drawing/2014/main" id="{6CB8CB52-7F05-4141-B814-470DF9C42D07}"/>
               </a:ext>
             </a:extLst>
           </p:cNvPr>
@@ -5105,7 +5105,7 @@
           <p:cNvPr id="48" name="cell-3-1-180">
             <a:extLst xmlns:a="http://schemas.openxmlformats.org/drawingml/2006/main">
               <a:ext uri="{FF2B5EF4-FFF2-40B4-BE49-F238E27FC236}">
-                <a16:creationId xmlns:a16="http://schemas.microsoft.com/office/drawing/2014/main" id="{56E7BC66-B149-4794-8AF6-56F8279519A3}"/>
+                <a16:creationId xmlns:a16="http://schemas.microsoft.com/office/drawing/2014/main" id="{85E30C50-ADD8-45CD-B133-C3FD104051A4}"/>
               </a:ext>
             </a:extLst>
           </p:cNvPr>
@@ -5163,7 +5163,7 @@
           <p:cNvPr id="49" name="cell-bg-3-2-180">
             <a:extLst xmlns:a="http://schemas.openxmlformats.org/drawingml/2006/main">
               <a:ext uri="{FF2B5EF4-FFF2-40B4-BE49-F238E27FC236}">
-                <a16:creationId xmlns:a16="http://schemas.microsoft.com/office/drawing/2014/main" id="{A7DC81B9-F3FF-4FC2-A577-BAACEA09CDD1}"/>
+                <a16:creationId xmlns:a16="http://schemas.microsoft.com/office/drawing/2014/main" id="{69510C78-108B-441B-B05D-6639F07254B5}"/>
               </a:ext>
             </a:extLst>
           </p:cNvPr>
@@ -5196,7 +5196,7 @@
           <p:cNvPr id="50" name="cell-3-2-180">
             <a:extLst xmlns:a="http://schemas.openxmlformats.org/drawingml/2006/main">
               <a:ext uri="{FF2B5EF4-FFF2-40B4-BE49-F238E27FC236}">
-                <a16:creationId xmlns:a16="http://schemas.microsoft.com/office/drawing/2014/main" id="{34FB225A-0191-4E35-B591-C618481F01EB}"/>
+                <a16:creationId xmlns:a16="http://schemas.microsoft.com/office/drawing/2014/main" id="{B522ACD6-2D7B-4137-83E4-A9B021136F5E}"/>
               </a:ext>
             </a:extLst>
           </p:cNvPr>
@@ -5254,7 +5254,7 @@
           <p:cNvPr id="51" name="cell-bg-3-3-180">
             <a:extLst xmlns:a="http://schemas.openxmlformats.org/drawingml/2006/main">
               <a:ext uri="{FF2B5EF4-FFF2-40B4-BE49-F238E27FC236}">
-                <a16:creationId xmlns:a16="http://schemas.microsoft.com/office/drawing/2014/main" id="{E9F31D97-4F88-4F40-B38D-A402CFAA39E4}"/>
+                <a16:creationId xmlns:a16="http://schemas.microsoft.com/office/drawing/2014/main" id="{D53AF6F3-6588-49B8-BDB7-1CFDD934B593}"/>
               </a:ext>
             </a:extLst>
           </p:cNvPr>
@@ -5287,7 +5287,7 @@
           <p:cNvPr id="52" name="cell-3-3-180">
             <a:extLst xmlns:a="http://schemas.openxmlformats.org/drawingml/2006/main">
               <a:ext uri="{FF2B5EF4-FFF2-40B4-BE49-F238E27FC236}">
-                <a16:creationId xmlns:a16="http://schemas.microsoft.com/office/drawing/2014/main" id="{E45D5C21-0096-4FB3-B2CD-2295C0D377E3}"/>
+                <a16:creationId xmlns:a16="http://schemas.microsoft.com/office/drawing/2014/main" id="{1EBAC893-E97E-4604-B8D9-D685CF0D11E5}"/>
               </a:ext>
             </a:extLst>
           </p:cNvPr>
@@ -5345,7 +5345,7 @@
           <p:cNvPr id="53" name="cell-bg-3-4-180">
             <a:extLst xmlns:a="http://schemas.openxmlformats.org/drawingml/2006/main">
               <a:ext uri="{FF2B5EF4-FFF2-40B4-BE49-F238E27FC236}">
-                <a16:creationId xmlns:a16="http://schemas.microsoft.com/office/drawing/2014/main" id="{9E0074B1-8B6A-4521-A989-51607ADFE73B}"/>
+                <a16:creationId xmlns:a16="http://schemas.microsoft.com/office/drawing/2014/main" id="{043A9F3E-3A88-4624-8A1D-43ED3DA4770A}"/>
               </a:ext>
             </a:extLst>
           </p:cNvPr>
@@ -5378,7 +5378,7 @@
           <p:cNvPr id="54" name="cell-3-4-180">
             <a:extLst xmlns:a="http://schemas.openxmlformats.org/drawingml/2006/main">
               <a:ext uri="{FF2B5EF4-FFF2-40B4-BE49-F238E27FC236}">
-                <a16:creationId xmlns:a16="http://schemas.microsoft.com/office/drawing/2014/main" id="{63A3D6C2-2CD0-44DA-BE84-3B37CE1C088B}"/>
+                <a16:creationId xmlns:a16="http://schemas.microsoft.com/office/drawing/2014/main" id="{0E181EFF-02F4-4C70-8B0B-6F0758E47B41}"/>
               </a:ext>
             </a:extLst>
           </p:cNvPr>
@@ -5436,7 +5436,7 @@
           <p:cNvPr id="55" name="cell-bg-4-0-180">
             <a:extLst xmlns:a="http://schemas.openxmlformats.org/drawingml/2006/main">
               <a:ext uri="{FF2B5EF4-FFF2-40B4-BE49-F238E27FC236}">
-                <a16:creationId xmlns:a16="http://schemas.microsoft.com/office/drawing/2014/main" id="{4FBCB7A8-978C-467D-BDFE-2470AFD9834C}"/>
+                <a16:creationId xmlns:a16="http://schemas.microsoft.com/office/drawing/2014/main" id="{AA8F1F84-97F8-490D-99F9-AD52D7E039BE}"/>
               </a:ext>
             </a:extLst>
           </p:cNvPr>
@@ -5469,7 +5469,7 @@
           <p:cNvPr id="56" name="cell-4-0-180">
             <a:extLst xmlns:a="http://schemas.openxmlformats.org/drawingml/2006/main">
               <a:ext uri="{FF2B5EF4-FFF2-40B4-BE49-F238E27FC236}">
-                <a16:creationId xmlns:a16="http://schemas.microsoft.com/office/drawing/2014/main" id="{273406F5-90C1-463B-857B-4DE68EA620CB}"/>
+                <a16:creationId xmlns:a16="http://schemas.microsoft.com/office/drawing/2014/main" id="{E12A131A-CCF3-40B4-BF80-EC5FAB7255DF}"/>
               </a:ext>
             </a:extLst>
           </p:cNvPr>
@@ -5527,7 +5527,7 @@
           <p:cNvPr id="57" name="cell-bg-4-1-180">
             <a:extLst xmlns:a="http://schemas.openxmlformats.org/drawingml/2006/main">
               <a:ext uri="{FF2B5EF4-FFF2-40B4-BE49-F238E27FC236}">
-                <a16:creationId xmlns:a16="http://schemas.microsoft.com/office/drawing/2014/main" id="{2DEF9992-54B9-40B8-A88B-9A0B5A569017}"/>
+                <a16:creationId xmlns:a16="http://schemas.microsoft.com/office/drawing/2014/main" id="{F2DE0FF0-3C71-499B-A828-C49770E26CCD}"/>
               </a:ext>
             </a:extLst>
           </p:cNvPr>
@@ -5560,7 +5560,7 @@
           <p:cNvPr id="58" name="cell-4-1-180">
             <a:extLst xmlns:a="http://schemas.openxmlformats.org/drawingml/2006/main">
               <a:ext uri="{FF2B5EF4-FFF2-40B4-BE49-F238E27FC236}">
-                <a16:creationId xmlns:a16="http://schemas.microsoft.com/office/drawing/2014/main" id="{9BB09770-827E-4A2D-8249-85D7C654A428}"/>
+                <a16:creationId xmlns:a16="http://schemas.microsoft.com/office/drawing/2014/main" id="{6DAF32AA-65F7-4761-A2D3-79D64F283534}"/>
               </a:ext>
             </a:extLst>
           </p:cNvPr>
@@ -5618,7 +5618,7 @@
           <p:cNvPr id="59" name="cell-bg-4-2-180">
             <a:extLst xmlns:a="http://schemas.openxmlformats.org/drawingml/2006/main">
               <a:ext uri="{FF2B5EF4-FFF2-40B4-BE49-F238E27FC236}">
-                <a16:creationId xmlns:a16="http://schemas.microsoft.com/office/drawing/2014/main" id="{CC7D763C-4162-4324-A5B1-0AA3F53C3D44}"/>
+                <a16:creationId xmlns:a16="http://schemas.microsoft.com/office/drawing/2014/main" id="{28751505-0ED1-4968-A999-6AD31A8B070D}"/>
               </a:ext>
             </a:extLst>
           </p:cNvPr>
@@ -5651,7 +5651,7 @@
           <p:cNvPr id="60" name="cell-4-2-180">
             <a:extLst xmlns:a="http://schemas.openxmlformats.org/drawingml/2006/main">
               <a:ext uri="{FF2B5EF4-FFF2-40B4-BE49-F238E27FC236}">
-                <a16:creationId xmlns:a16="http://schemas.microsoft.com/office/drawing/2014/main" id="{482C8B64-8A2A-4459-9E44-158315DF05AC}"/>
+                <a16:creationId xmlns:a16="http://schemas.microsoft.com/office/drawing/2014/main" id="{26649780-4B9E-41B6-AA04-3EE6B1609C2E}"/>
               </a:ext>
             </a:extLst>
           </p:cNvPr>
@@ -5709,7 +5709,7 @@
           <p:cNvPr id="61" name="cell-bg-4-3-180">
             <a:extLst xmlns:a="http://schemas.openxmlformats.org/drawingml/2006/main">
               <a:ext uri="{FF2B5EF4-FFF2-40B4-BE49-F238E27FC236}">
-                <a16:creationId xmlns:a16="http://schemas.microsoft.com/office/drawing/2014/main" id="{4A36B871-1F3A-454B-8C18-6CEE0D2893AD}"/>
+                <a16:creationId xmlns:a16="http://schemas.microsoft.com/office/drawing/2014/main" id="{FCDF60A2-2FF0-4722-91A2-5968FEE5BD89}"/>
               </a:ext>
             </a:extLst>
           </p:cNvPr>
@@ -5742,7 +5742,7 @@
           <p:cNvPr id="62" name="cell-4-3-180">
             <a:extLst xmlns:a="http://schemas.openxmlformats.org/drawingml/2006/main">
               <a:ext uri="{FF2B5EF4-FFF2-40B4-BE49-F238E27FC236}">
-                <a16:creationId xmlns:a16="http://schemas.microsoft.com/office/drawing/2014/main" id="{F5C88A1F-D18A-4B22-BD56-47C153373262}"/>
+                <a16:creationId xmlns:a16="http://schemas.microsoft.com/office/drawing/2014/main" id="{BE774B7B-C333-4DCA-A481-04A7BA6C31F5}"/>
               </a:ext>
             </a:extLst>
           </p:cNvPr>
@@ -5800,7 +5800,7 @@
           <p:cNvPr id="63" name="cell-bg-4-4-180">
             <a:extLst xmlns:a="http://schemas.openxmlformats.org/drawingml/2006/main">
               <a:ext uri="{FF2B5EF4-FFF2-40B4-BE49-F238E27FC236}">
-                <a16:creationId xmlns:a16="http://schemas.microsoft.com/office/drawing/2014/main" id="{9E221E3F-2315-4490-B6A9-771D16069612}"/>
+                <a16:creationId xmlns:a16="http://schemas.microsoft.com/office/drawing/2014/main" id="{FA5509EE-09A4-42BE-8204-CB4E7B019E27}"/>
               </a:ext>
             </a:extLst>
           </p:cNvPr>
@@ -5833,7 +5833,7 @@
           <p:cNvPr id="64" name="cell-4-4-180">
             <a:extLst xmlns:a="http://schemas.openxmlformats.org/drawingml/2006/main">
               <a:ext uri="{FF2B5EF4-FFF2-40B4-BE49-F238E27FC236}">
-                <a16:creationId xmlns:a16="http://schemas.microsoft.com/office/drawing/2014/main" id="{CBB381AE-C222-4415-929A-7426468D624C}"/>
+                <a16:creationId xmlns:a16="http://schemas.microsoft.com/office/drawing/2014/main" id="{F065E117-FE45-4039-8A34-D60870B6CEDA}"/>
               </a:ext>
             </a:extLst>
           </p:cNvPr>
@@ -5889,7 +5889,7 @@
     </p:spTree>
     <p:extLst>
       <p:ext uri="{BB962C8B-B14F-4D97-AF65-F5344CB8AC3E}">
-        <p14:creationId xmlns:p14="http://schemas.microsoft.com/office/powerpoint/2010/main" val="1254271625"/>
+        <p14:creationId xmlns:p14="http://schemas.microsoft.com/office/powerpoint/2010/main" val="645382484"/>
       </p:ext>
     </p:extLst>
   </p:cSld>
@@ -5920,7 +5920,7 @@
           <p:cNvPr id="13" name="title-4">
             <a:extLst xmlns:a="http://schemas.openxmlformats.org/drawingml/2006/main">
               <a:ext uri="{FF2B5EF4-FFF2-40B4-BE49-F238E27FC236}">
-                <a16:creationId xmlns:a16="http://schemas.microsoft.com/office/drawing/2014/main" id="{AC0E2F33-8AB5-465C-BB5C-C81D21A6E25D}"/>
+                <a16:creationId xmlns:a16="http://schemas.microsoft.com/office/drawing/2014/main" id="{836237A4-F51D-4F12-BB9C-71253759B4DF}"/>
               </a:ext>
             </a:extLst>
           </p:cNvPr>
@@ -5978,7 +5978,7 @@
           <p:cNvPr id="2" name="subtitle-4">
             <a:extLst xmlns:a="http://schemas.openxmlformats.org/drawingml/2006/main">
               <a:ext uri="{FF2B5EF4-FFF2-40B4-BE49-F238E27FC236}">
-                <a16:creationId xmlns:a16="http://schemas.microsoft.com/office/drawing/2014/main" id="{EBC86A83-34B3-46D9-8412-2C4FF4843AF9}"/>
+                <a16:creationId xmlns:a16="http://schemas.microsoft.com/office/drawing/2014/main" id="{01D27699-414D-43B5-92F3-A26F71AEFE32}"/>
               </a:ext>
             </a:extLst>
           </p:cNvPr>
@@ -6026,7 +6026,7 @@
                 <a:ea typeface="PingFang SC"/>
                 <a:cs typeface="PingFang SC"/>
               </a:rPr>
-              <a:t>BUG-102 / PR #202 / changes requested</a:t>
+              <a:t>BUG-102 / PR #9 / changes requested</a:t>
             </a:r>
           </a:p>
         </p:txBody>
@@ -6036,7 +6036,7 @@
           <p:cNvPr id="3" name="footer-4">
             <a:extLst xmlns:a="http://schemas.openxmlformats.org/drawingml/2006/main">
               <a:ext uri="{FF2B5EF4-FFF2-40B4-BE49-F238E27FC236}">
-                <a16:creationId xmlns:a16="http://schemas.microsoft.com/office/drawing/2014/main" id="{F3FDE462-E6AE-4304-9F1B-6169646535B5}"/>
+                <a16:creationId xmlns:a16="http://schemas.microsoft.com/office/drawing/2014/main" id="{8BEEA030-6AD9-435F-983C-50DDEE75724D}"/>
               </a:ext>
             </a:extLst>
           </p:cNvPr>
@@ -6084,7 +6084,7 @@
                 <a:ea typeface="PingFang SC"/>
                 <a:cs typeface="PingFang SC"/>
               </a:rPr>
-              <a:t>ShopFlow v2.6  |  shopflow-41d613d1137b</a:t>
+              <a:t>ShopFlow v2.6  |  shopflow-fcbc6c1cd435</a:t>
             </a:r>
           </a:p>
         </p:txBody>
@@ -6094,7 +6094,7 @@
           <p:cNvPr id="4" name="page-4">
             <a:extLst xmlns:a="http://schemas.openxmlformats.org/drawingml/2006/main">
               <a:ext uri="{FF2B5EF4-FFF2-40B4-BE49-F238E27FC236}">
-                <a16:creationId xmlns:a16="http://schemas.microsoft.com/office/drawing/2014/main" id="{744CD394-9E80-4A73-9C6E-49F2E3D8ADA6}"/>
+                <a16:creationId xmlns:a16="http://schemas.microsoft.com/office/drawing/2014/main" id="{76D12270-3DA3-4F9A-98DF-9A626A6F59FE}"/>
               </a:ext>
             </a:extLst>
           </p:cNvPr>
@@ -6152,7 +6152,7 @@
           <p:cNvPr id="5" name="bug-left">
             <a:extLst xmlns:a="http://schemas.openxmlformats.org/drawingml/2006/main">
               <a:ext uri="{FF2B5EF4-FFF2-40B4-BE49-F238E27FC236}">
-                <a16:creationId xmlns:a16="http://schemas.microsoft.com/office/drawing/2014/main" id="{C9F47268-F66B-4F0C-9F0F-FB64E33D94A3}"/>
+                <a16:creationId xmlns:a16="http://schemas.microsoft.com/office/drawing/2014/main" id="{B2A9286E-9DED-4314-BE6B-494DF988483C}"/>
               </a:ext>
             </a:extLst>
           </p:cNvPr>
@@ -6183,7 +6183,7 @@
           <p:cNvPr id="6" name="bug-code-title">
             <a:extLst xmlns:a="http://schemas.openxmlformats.org/drawingml/2006/main">
               <a:ext uri="{FF2B5EF4-FFF2-40B4-BE49-F238E27FC236}">
-                <a16:creationId xmlns:a16="http://schemas.microsoft.com/office/drawing/2014/main" id="{9A04A521-A170-427A-9E8B-F15179A582DF}"/>
+                <a16:creationId xmlns:a16="http://schemas.microsoft.com/office/drawing/2014/main" id="{02E0006A-C681-4F0E-87F3-6EF2A3E491A1}"/>
               </a:ext>
             </a:extLst>
           </p:cNvPr>
@@ -6241,7 +6241,7 @@
           <p:cNvPr id="7" name="bug-code">
             <a:extLst xmlns:a="http://schemas.openxmlformats.org/drawingml/2006/main">
               <a:ext uri="{FF2B5EF4-FFF2-40B4-BE49-F238E27FC236}">
-                <a16:creationId xmlns:a16="http://schemas.microsoft.com/office/drawing/2014/main" id="{25D7741F-1B9D-47A4-A84D-7A7B302BA71C}"/>
+                <a16:creationId xmlns:a16="http://schemas.microsoft.com/office/drawing/2014/main" id="{8D5D9FBF-F20D-49F2-BC6B-2FF129F8F077}"/>
               </a:ext>
             </a:extLst>
           </p:cNvPr>
@@ -6289,7 +6289,7 @@
                 <a:ea typeface="Menlo"/>
                 <a:cs typeface="Menlo"/>
               </a:rPr>
-              <a:t>分支    fix/bug-102-oversell</a:t>
+              <a:t>分支    scenario/bug-102-first-attempt</a:t>
             </a:r>
           </a:p>
           <a:p xmlns:a="http://schemas.openxmlformats.org/drawingml/2006/main">
@@ -6312,7 +6312,7 @@
                 <a:ea typeface="Menlo"/>
                 <a:cs typeface="Menlo"/>
               </a:rPr>
-              <a:t>SHA     80fcfb3035</a:t>
+              <a:t>SHA     c6db6785fe</a:t>
             </a:r>
           </a:p>
           <a:p xmlns:a="http://schemas.openxmlformats.org/drawingml/2006/main">
@@ -6437,7 +6437,7 @@
           <p:cNvPr id="8" name="bug-risk">
             <a:extLst xmlns:a="http://schemas.openxmlformats.org/drawingml/2006/main">
               <a:ext uri="{FF2B5EF4-FFF2-40B4-BE49-F238E27FC236}">
-                <a16:creationId xmlns:a16="http://schemas.microsoft.com/office/drawing/2014/main" id="{B36FA824-AB22-4E70-BFDE-130506E160BA}"/>
+                <a16:creationId xmlns:a16="http://schemas.microsoft.com/office/drawing/2014/main" id="{8E26CE9B-F21F-4A20-8F51-6CEE407F1BFF}"/>
               </a:ext>
             </a:extLst>
           </p:cNvPr>
@@ -6468,7 +6468,7 @@
           <p:cNvPr id="9" name="bug-risk-title">
             <a:extLst xmlns:a="http://schemas.openxmlformats.org/drawingml/2006/main">
               <a:ext uri="{FF2B5EF4-FFF2-40B4-BE49-F238E27FC236}">
-                <a16:creationId xmlns:a16="http://schemas.microsoft.com/office/drawing/2014/main" id="{ADB6104B-933F-43E1-8761-31D33A409F65}"/>
+                <a16:creationId xmlns:a16="http://schemas.microsoft.com/office/drawing/2014/main" id="{52045425-1531-4818-B9B8-D4878FC71136}"/>
               </a:ext>
             </a:extLst>
           </p:cNvPr>
@@ -6526,7 +6526,7 @@
           <p:cNvPr id="10" name="bug-risk-body">
             <a:extLst xmlns:a="http://schemas.openxmlformats.org/drawingml/2006/main">
               <a:ext uri="{FF2B5EF4-FFF2-40B4-BE49-F238E27FC236}">
-                <a16:creationId xmlns:a16="http://schemas.microsoft.com/office/drawing/2014/main" id="{DCEBFB52-33AD-49C8-B3F5-9FC9443E6566}"/>
+                <a16:creationId xmlns:a16="http://schemas.microsoft.com/office/drawing/2014/main" id="{4FF2DDB4-BEBC-4150-95DC-051C4DCEFBB3}"/>
               </a:ext>
             </a:extLst>
           </p:cNvPr>
@@ -6584,7 +6584,7 @@
           <p:cNvPr id="11" name="bug-action-title">
             <a:extLst xmlns:a="http://schemas.openxmlformats.org/drawingml/2006/main">
               <a:ext uri="{FF2B5EF4-FFF2-40B4-BE49-F238E27FC236}">
-                <a16:creationId xmlns:a16="http://schemas.microsoft.com/office/drawing/2014/main" id="{2443B965-2948-452E-B364-29DFE681507E}"/>
+                <a16:creationId xmlns:a16="http://schemas.microsoft.com/office/drawing/2014/main" id="{4DF404CA-41A4-46A9-9CC3-CA5754912AAC}"/>
               </a:ext>
             </a:extLst>
           </p:cNvPr>
@@ -6642,7 +6642,7 @@
           <p:cNvPr id="12" name="bug-action-body">
             <a:extLst xmlns:a="http://schemas.openxmlformats.org/drawingml/2006/main">
               <a:ext uri="{FF2B5EF4-FFF2-40B4-BE49-F238E27FC236}">
-                <a16:creationId xmlns:a16="http://schemas.microsoft.com/office/drawing/2014/main" id="{10F74690-084A-43C3-B3E7-17E2569CDE43}"/>
+                <a16:creationId xmlns:a16="http://schemas.microsoft.com/office/drawing/2014/main" id="{2E395779-8029-4B1B-9450-A824B5A8DF37}"/>
               </a:ext>
             </a:extLst>
           </p:cNvPr>
@@ -6767,7 +6767,7 @@
     </p:spTree>
     <p:extLst>
       <p:ext uri="{BB962C8B-B14F-4D97-AF65-F5344CB8AC3E}">
-        <p14:creationId xmlns:p14="http://schemas.microsoft.com/office/powerpoint/2010/main" val="29300738"/>
+        <p14:creationId xmlns:p14="http://schemas.microsoft.com/office/powerpoint/2010/main" val="812731842"/>
       </p:ext>
     </p:extLst>
   </p:cSld>
@@ -6798,7 +6798,7 @@
           <p:cNvPr id="45" name="title-5">
             <a:extLst xmlns:a="http://schemas.openxmlformats.org/drawingml/2006/main">
               <a:ext uri="{FF2B5EF4-FFF2-40B4-BE49-F238E27FC236}">
-                <a16:creationId xmlns:a16="http://schemas.microsoft.com/office/drawing/2014/main" id="{94B07579-9F7E-4086-9D42-844FDA2ACC78}"/>
+                <a16:creationId xmlns:a16="http://schemas.microsoft.com/office/drawing/2014/main" id="{B17FA513-02CA-48AF-B8CD-D00B917CFFFE}"/>
               </a:ext>
             </a:extLst>
           </p:cNvPr>
@@ -6856,7 +6856,7 @@
           <p:cNvPr id="2" name="subtitle-5">
             <a:extLst xmlns:a="http://schemas.openxmlformats.org/drawingml/2006/main">
               <a:ext uri="{FF2B5EF4-FFF2-40B4-BE49-F238E27FC236}">
-                <a16:creationId xmlns:a16="http://schemas.microsoft.com/office/drawing/2014/main" id="{BEE1FCC3-68CD-4407-9B63-312A8B840D24}"/>
+                <a16:creationId xmlns:a16="http://schemas.microsoft.com/office/drawing/2014/main" id="{D185E6BC-A014-481C-8047-6F645A038B8A}"/>
               </a:ext>
             </a:extLst>
           </p:cNvPr>
@@ -6914,7 +6914,7 @@
           <p:cNvPr id="3" name="footer-5">
             <a:extLst xmlns:a="http://schemas.openxmlformats.org/drawingml/2006/main">
               <a:ext uri="{FF2B5EF4-FFF2-40B4-BE49-F238E27FC236}">
-                <a16:creationId xmlns:a16="http://schemas.microsoft.com/office/drawing/2014/main" id="{0CC35BBC-CA74-4FEF-980A-BA5E2FDAC072}"/>
+                <a16:creationId xmlns:a16="http://schemas.microsoft.com/office/drawing/2014/main" id="{7B8CC345-1E96-46FA-8149-D9AE13EBEBD1}"/>
               </a:ext>
             </a:extLst>
           </p:cNvPr>
@@ -6962,7 +6962,7 @@
                 <a:ea typeface="PingFang SC"/>
                 <a:cs typeface="PingFang SC"/>
               </a:rPr>
-              <a:t>ShopFlow v2.6  |  shopflow-41d613d1137b</a:t>
+              <a:t>ShopFlow v2.6  |  shopflow-fcbc6c1cd435</a:t>
             </a:r>
           </a:p>
         </p:txBody>
@@ -6972,7 +6972,7 @@
           <p:cNvPr id="4" name="page-5">
             <a:extLst xmlns:a="http://schemas.openxmlformats.org/drawingml/2006/main">
               <a:ext uri="{FF2B5EF4-FFF2-40B4-BE49-F238E27FC236}">
-                <a16:creationId xmlns:a16="http://schemas.microsoft.com/office/drawing/2014/main" id="{C3D7BE62-0EC7-4826-8485-D17AC5B832B9}"/>
+                <a16:creationId xmlns:a16="http://schemas.microsoft.com/office/drawing/2014/main" id="{D5C480D0-CDCE-42E5-8CD1-EB715AFF6395}"/>
               </a:ext>
             </a:extLst>
           </p:cNvPr>
@@ -7030,7 +7030,7 @@
           <p:cNvPr id="5" name="impact-head-bg-0">
             <a:extLst xmlns:a="http://schemas.openxmlformats.org/drawingml/2006/main">
               <a:ext uri="{FF2B5EF4-FFF2-40B4-BE49-F238E27FC236}">
-                <a16:creationId xmlns:a16="http://schemas.microsoft.com/office/drawing/2014/main" id="{4646D9C7-F6B3-47AD-AA08-1C656EDCFC0D}"/>
+                <a16:creationId xmlns:a16="http://schemas.microsoft.com/office/drawing/2014/main" id="{4A4E4C31-DBC7-4D28-BC8B-345E71296174}"/>
               </a:ext>
             </a:extLst>
           </p:cNvPr>
@@ -7061,7 +7061,7 @@
           <p:cNvPr id="6" name="impact-head-0">
             <a:extLst xmlns:a="http://schemas.openxmlformats.org/drawingml/2006/main">
               <a:ext uri="{FF2B5EF4-FFF2-40B4-BE49-F238E27FC236}">
-                <a16:creationId xmlns:a16="http://schemas.microsoft.com/office/drawing/2014/main" id="{CB92DB5F-D8B4-4EE6-AA74-0D192AADC2EB}"/>
+                <a16:creationId xmlns:a16="http://schemas.microsoft.com/office/drawing/2014/main" id="{04B00B00-0155-461B-AB21-06ADBAE9CD4E}"/>
               </a:ext>
             </a:extLst>
           </p:cNvPr>
@@ -7119,7 +7119,7 @@
           <p:cNvPr id="7" name="impact-head-bg-1">
             <a:extLst xmlns:a="http://schemas.openxmlformats.org/drawingml/2006/main">
               <a:ext uri="{FF2B5EF4-FFF2-40B4-BE49-F238E27FC236}">
-                <a16:creationId xmlns:a16="http://schemas.microsoft.com/office/drawing/2014/main" id="{EB85BFC5-030E-41F0-B008-C539F8382C94}"/>
+                <a16:creationId xmlns:a16="http://schemas.microsoft.com/office/drawing/2014/main" id="{3235C0D5-F4FA-431C-824F-D954A0649685}"/>
               </a:ext>
             </a:extLst>
           </p:cNvPr>
@@ -7150,7 +7150,7 @@
           <p:cNvPr id="8" name="impact-head-1">
             <a:extLst xmlns:a="http://schemas.openxmlformats.org/drawingml/2006/main">
               <a:ext uri="{FF2B5EF4-FFF2-40B4-BE49-F238E27FC236}">
-                <a16:creationId xmlns:a16="http://schemas.microsoft.com/office/drawing/2014/main" id="{3D7801AA-7DD7-4B63-8802-F5EACF8F2D35}"/>
+                <a16:creationId xmlns:a16="http://schemas.microsoft.com/office/drawing/2014/main" id="{F1788944-C8A6-495A-AA3F-A2D4A5E41296}"/>
               </a:ext>
             </a:extLst>
           </p:cNvPr>
@@ -7208,7 +7208,7 @@
           <p:cNvPr id="9" name="impact-head-bg-2">
             <a:extLst xmlns:a="http://schemas.openxmlformats.org/drawingml/2006/main">
               <a:ext uri="{FF2B5EF4-FFF2-40B4-BE49-F238E27FC236}">
-                <a16:creationId xmlns:a16="http://schemas.microsoft.com/office/drawing/2014/main" id="{87E02FE9-33CF-4FA8-8ECE-D9C2795EA6C5}"/>
+                <a16:creationId xmlns:a16="http://schemas.microsoft.com/office/drawing/2014/main" id="{3A9016BE-FEE6-499C-9F95-1CAF4D83F4CD}"/>
               </a:ext>
             </a:extLst>
           </p:cNvPr>
@@ -7239,7 +7239,7 @@
           <p:cNvPr id="10" name="impact-head-2">
             <a:extLst xmlns:a="http://schemas.openxmlformats.org/drawingml/2006/main">
               <a:ext uri="{FF2B5EF4-FFF2-40B4-BE49-F238E27FC236}">
-                <a16:creationId xmlns:a16="http://schemas.microsoft.com/office/drawing/2014/main" id="{E402667E-9611-4B76-84D4-C4C5D9C2BEBD}"/>
+                <a16:creationId xmlns:a16="http://schemas.microsoft.com/office/drawing/2014/main" id="{8F5019D8-EBED-4FD0-A2FA-6A95323D7B9D}"/>
               </a:ext>
             </a:extLst>
           </p:cNvPr>
@@ -7297,7 +7297,7 @@
           <p:cNvPr id="11" name="impact-head-bg-3">
             <a:extLst xmlns:a="http://schemas.openxmlformats.org/drawingml/2006/main">
               <a:ext uri="{FF2B5EF4-FFF2-40B4-BE49-F238E27FC236}">
-                <a16:creationId xmlns:a16="http://schemas.microsoft.com/office/drawing/2014/main" id="{5C775133-1193-492B-97BA-34D784A7D971}"/>
+                <a16:creationId xmlns:a16="http://schemas.microsoft.com/office/drawing/2014/main" id="{16FF2EA1-9A35-49B9-B1B2-329EAD4F8728}"/>
               </a:ext>
             </a:extLst>
           </p:cNvPr>
@@ -7328,7 +7328,7 @@
           <p:cNvPr id="12" name="impact-head-3">
             <a:extLst xmlns:a="http://schemas.openxmlformats.org/drawingml/2006/main">
               <a:ext uri="{FF2B5EF4-FFF2-40B4-BE49-F238E27FC236}">
-                <a16:creationId xmlns:a16="http://schemas.microsoft.com/office/drawing/2014/main" id="{2C922B63-FE99-43B6-96FE-3C5C0B3F9FC6}"/>
+                <a16:creationId xmlns:a16="http://schemas.microsoft.com/office/drawing/2014/main" id="{BD5771BF-6300-4E15-A93E-2A01C69CF017}"/>
               </a:ext>
             </a:extLst>
           </p:cNvPr>
@@ -7386,7 +7386,7 @@
           <p:cNvPr id="13" name="impact-bg-0-0">
             <a:extLst xmlns:a="http://schemas.openxmlformats.org/drawingml/2006/main">
               <a:ext uri="{FF2B5EF4-FFF2-40B4-BE49-F238E27FC236}">
-                <a16:creationId xmlns:a16="http://schemas.microsoft.com/office/drawing/2014/main" id="{8520F993-567C-4C36-A343-FFC0F7EB49B0}"/>
+                <a16:creationId xmlns:a16="http://schemas.microsoft.com/office/drawing/2014/main" id="{58A9663D-CE3B-4F10-B3DA-E26B771A4FBA}"/>
               </a:ext>
             </a:extLst>
           </p:cNvPr>
@@ -7419,7 +7419,7 @@
           <p:cNvPr id="14" name="impact-0-0">
             <a:extLst xmlns:a="http://schemas.openxmlformats.org/drawingml/2006/main">
               <a:ext uri="{FF2B5EF4-FFF2-40B4-BE49-F238E27FC236}">
-                <a16:creationId xmlns:a16="http://schemas.microsoft.com/office/drawing/2014/main" id="{47BC976A-94B5-44C0-8D5A-FCA9E5927BAC}"/>
+                <a16:creationId xmlns:a16="http://schemas.microsoft.com/office/drawing/2014/main" id="{5709CD5D-44A7-4E15-B48C-0E998825F0BB}"/>
               </a:ext>
             </a:extLst>
           </p:cNvPr>
@@ -7467,7 +7467,7 @@
                 <a:ea typeface="PingFang SC"/>
                 <a:cs typeface="PingFang SC"/>
               </a:rPr>
-              <a:t>PR #202</a:t>
+              <a:t>PR #9</a:t>
             </a:r>
           </a:p>
         </p:txBody>
@@ -7477,7 +7477,7 @@
           <p:cNvPr id="15" name="impact-bg-0-1">
             <a:extLst xmlns:a="http://schemas.openxmlformats.org/drawingml/2006/main">
               <a:ext uri="{FF2B5EF4-FFF2-40B4-BE49-F238E27FC236}">
-                <a16:creationId xmlns:a16="http://schemas.microsoft.com/office/drawing/2014/main" id="{8CD1D23A-AB66-4331-A669-1400193E45EF}"/>
+                <a16:creationId xmlns:a16="http://schemas.microsoft.com/office/drawing/2014/main" id="{B93398B8-DE71-41B4-AE99-CC8080770CEC}"/>
               </a:ext>
             </a:extLst>
           </p:cNvPr>
@@ -7510,7 +7510,7 @@
           <p:cNvPr id="16" name="impact-0-1">
             <a:extLst xmlns:a="http://schemas.openxmlformats.org/drawingml/2006/main">
               <a:ext uri="{FF2B5EF4-FFF2-40B4-BE49-F238E27FC236}">
-                <a16:creationId xmlns:a16="http://schemas.microsoft.com/office/drawing/2014/main" id="{0986C5EC-210E-406E-9115-5DD0A45BD11F}"/>
+                <a16:creationId xmlns:a16="http://schemas.microsoft.com/office/drawing/2014/main" id="{2DA54FF6-25CA-413A-B067-8B2A7CE8B307}"/>
               </a:ext>
             </a:extLst>
           </p:cNvPr>
@@ -7568,7 +7568,7 @@
           <p:cNvPr id="17" name="impact-bg-0-2">
             <a:extLst xmlns:a="http://schemas.openxmlformats.org/drawingml/2006/main">
               <a:ext uri="{FF2B5EF4-FFF2-40B4-BE49-F238E27FC236}">
-                <a16:creationId xmlns:a16="http://schemas.microsoft.com/office/drawing/2014/main" id="{4CF2ABFC-5D75-48FA-97B7-0FBE37AF31E1}"/>
+                <a16:creationId xmlns:a16="http://schemas.microsoft.com/office/drawing/2014/main" id="{018E3229-07D8-4C8C-B729-1C30FDDA6206}"/>
               </a:ext>
             </a:extLst>
           </p:cNvPr>
@@ -7601,7 +7601,7 @@
           <p:cNvPr id="18" name="impact-0-2">
             <a:extLst xmlns:a="http://schemas.openxmlformats.org/drawingml/2006/main">
               <a:ext uri="{FF2B5EF4-FFF2-40B4-BE49-F238E27FC236}">
-                <a16:creationId xmlns:a16="http://schemas.microsoft.com/office/drawing/2014/main" id="{C1B8C47C-4856-45AD-9D4E-1053B011B10F}"/>
+                <a16:creationId xmlns:a16="http://schemas.microsoft.com/office/drawing/2014/main" id="{8B6E5C68-5F7C-41BF-A17C-610F206395CA}"/>
               </a:ext>
             </a:extLst>
           </p:cNvPr>
@@ -7659,7 +7659,7 @@
           <p:cNvPr id="19" name="impact-bg-0-3">
             <a:extLst xmlns:a="http://schemas.openxmlformats.org/drawingml/2006/main">
               <a:ext uri="{FF2B5EF4-FFF2-40B4-BE49-F238E27FC236}">
-                <a16:creationId xmlns:a16="http://schemas.microsoft.com/office/drawing/2014/main" id="{7C5E73BC-70E8-4754-895B-97E393DA2D79}"/>
+                <a16:creationId xmlns:a16="http://schemas.microsoft.com/office/drawing/2014/main" id="{B6607C82-BC8C-4654-8D17-994CD57BA252}"/>
               </a:ext>
             </a:extLst>
           </p:cNvPr>
@@ -7692,7 +7692,7 @@
           <p:cNvPr id="20" name="impact-0-3">
             <a:extLst xmlns:a="http://schemas.openxmlformats.org/drawingml/2006/main">
               <a:ext uri="{FF2B5EF4-FFF2-40B4-BE49-F238E27FC236}">
-                <a16:creationId xmlns:a16="http://schemas.microsoft.com/office/drawing/2014/main" id="{96BAF71B-D689-402A-81C8-A2BB34D6E9BF}"/>
+                <a16:creationId xmlns:a16="http://schemas.microsoft.com/office/drawing/2014/main" id="{5A4926CA-7E38-43A5-9AD6-D9452BB8C5B7}"/>
               </a:ext>
             </a:extLst>
           </p:cNvPr>
@@ -7750,7 +7750,7 @@
           <p:cNvPr id="21" name="impact-bg-1-0">
             <a:extLst xmlns:a="http://schemas.openxmlformats.org/drawingml/2006/main">
               <a:ext uri="{FF2B5EF4-FFF2-40B4-BE49-F238E27FC236}">
-                <a16:creationId xmlns:a16="http://schemas.microsoft.com/office/drawing/2014/main" id="{15F0399D-54E7-495F-9217-CE73E13C4555}"/>
+                <a16:creationId xmlns:a16="http://schemas.microsoft.com/office/drawing/2014/main" id="{3B3E17F3-A4F1-4459-92D1-0CBE61026EAC}"/>
               </a:ext>
             </a:extLst>
           </p:cNvPr>
@@ -7783,7 +7783,7 @@
           <p:cNvPr id="22" name="impact-1-0">
             <a:extLst xmlns:a="http://schemas.openxmlformats.org/drawingml/2006/main">
               <a:ext uri="{FF2B5EF4-FFF2-40B4-BE49-F238E27FC236}">
-                <a16:creationId xmlns:a16="http://schemas.microsoft.com/office/drawing/2014/main" id="{3C66DE44-E535-4DA3-A6C6-CCDDF85AD581}"/>
+                <a16:creationId xmlns:a16="http://schemas.microsoft.com/office/drawing/2014/main" id="{35138F72-86B6-466E-A2E3-E215F7D7B1F8}"/>
               </a:ext>
             </a:extLst>
           </p:cNvPr>
@@ -7831,7 +7831,7 @@
                 <a:ea typeface="PingFang SC"/>
                 <a:cs typeface="PingFang SC"/>
               </a:rPr>
-              <a:t>PR #203</a:t>
+              <a:t>Commit 8b67e3d</a:t>
             </a:r>
           </a:p>
         </p:txBody>
@@ -7841,7 +7841,7 @@
           <p:cNvPr id="23" name="impact-bg-1-1">
             <a:extLst xmlns:a="http://schemas.openxmlformats.org/drawingml/2006/main">
               <a:ext uri="{FF2B5EF4-FFF2-40B4-BE49-F238E27FC236}">
-                <a16:creationId xmlns:a16="http://schemas.microsoft.com/office/drawing/2014/main" id="{62A0971F-422C-4D8E-A967-9F352127B723}"/>
+                <a16:creationId xmlns:a16="http://schemas.microsoft.com/office/drawing/2014/main" id="{9A96448B-A766-41A9-B328-3DEB5AE63076}"/>
               </a:ext>
             </a:extLst>
           </p:cNvPr>
@@ -7874,7 +7874,7 @@
           <p:cNvPr id="24" name="impact-1-1">
             <a:extLst xmlns:a="http://schemas.openxmlformats.org/drawingml/2006/main">
               <a:ext uri="{FF2B5EF4-FFF2-40B4-BE49-F238E27FC236}">
-                <a16:creationId xmlns:a16="http://schemas.microsoft.com/office/drawing/2014/main" id="{57FC5EB3-EA3E-4CAB-9358-03581632029E}"/>
+                <a16:creationId xmlns:a16="http://schemas.microsoft.com/office/drawing/2014/main" id="{347D0449-D845-4B78-A539-257106BDF5D2}"/>
               </a:ext>
             </a:extLst>
           </p:cNvPr>
@@ -7932,7 +7932,7 @@
           <p:cNvPr id="25" name="impact-bg-1-2">
             <a:extLst xmlns:a="http://schemas.openxmlformats.org/drawingml/2006/main">
               <a:ext uri="{FF2B5EF4-FFF2-40B4-BE49-F238E27FC236}">
-                <a16:creationId xmlns:a16="http://schemas.microsoft.com/office/drawing/2014/main" id="{DB489DFF-1395-4CE6-B446-E6A7641DE655}"/>
+                <a16:creationId xmlns:a16="http://schemas.microsoft.com/office/drawing/2014/main" id="{4D149F85-72DF-46F4-B456-3AC1C7352145}"/>
               </a:ext>
             </a:extLst>
           </p:cNvPr>
@@ -7965,7 +7965,7 @@
           <p:cNvPr id="26" name="impact-1-2">
             <a:extLst xmlns:a="http://schemas.openxmlformats.org/drawingml/2006/main">
               <a:ext uri="{FF2B5EF4-FFF2-40B4-BE49-F238E27FC236}">
-                <a16:creationId xmlns:a16="http://schemas.microsoft.com/office/drawing/2014/main" id="{3BB48E97-22B6-48C8-814D-22DE19CDF64D}"/>
+                <a16:creationId xmlns:a16="http://schemas.microsoft.com/office/drawing/2014/main" id="{327E7B98-B42C-43D8-9636-E04A2C66D3FD}"/>
               </a:ext>
             </a:extLst>
           </p:cNvPr>
@@ -8023,7 +8023,7 @@
           <p:cNvPr id="27" name="impact-bg-1-3">
             <a:extLst xmlns:a="http://schemas.openxmlformats.org/drawingml/2006/main">
               <a:ext uri="{FF2B5EF4-FFF2-40B4-BE49-F238E27FC236}">
-                <a16:creationId xmlns:a16="http://schemas.microsoft.com/office/drawing/2014/main" id="{941BCE97-C64F-4E3F-9707-A1B86D1292FD}"/>
+                <a16:creationId xmlns:a16="http://schemas.microsoft.com/office/drawing/2014/main" id="{A18704FF-E40D-417D-BA1B-59F818122C58}"/>
               </a:ext>
             </a:extLst>
           </p:cNvPr>
@@ -8056,7 +8056,7 @@
           <p:cNvPr id="28" name="impact-1-3">
             <a:extLst xmlns:a="http://schemas.openxmlformats.org/drawingml/2006/main">
               <a:ext uri="{FF2B5EF4-FFF2-40B4-BE49-F238E27FC236}">
-                <a16:creationId xmlns:a16="http://schemas.microsoft.com/office/drawing/2014/main" id="{158B1E86-52B0-4062-ADD9-08BB4B13AAF7}"/>
+                <a16:creationId xmlns:a16="http://schemas.microsoft.com/office/drawing/2014/main" id="{36D2089B-B33F-4AC4-8F77-C2F5FA23737C}"/>
               </a:ext>
             </a:extLst>
           </p:cNvPr>
@@ -8114,7 +8114,7 @@
           <p:cNvPr id="29" name="impact-bg-2-0">
             <a:extLst xmlns:a="http://schemas.openxmlformats.org/drawingml/2006/main">
               <a:ext uri="{FF2B5EF4-FFF2-40B4-BE49-F238E27FC236}">
-                <a16:creationId xmlns:a16="http://schemas.microsoft.com/office/drawing/2014/main" id="{96EA28BC-B7A3-4B8A-B2F9-C33E16E9F7BA}"/>
+                <a16:creationId xmlns:a16="http://schemas.microsoft.com/office/drawing/2014/main" id="{B4C65439-F91A-4E5C-8699-38CFCF0376B6}"/>
               </a:ext>
             </a:extLst>
           </p:cNvPr>
@@ -8147,7 +8147,7 @@
           <p:cNvPr id="30" name="impact-2-0">
             <a:extLst xmlns:a="http://schemas.openxmlformats.org/drawingml/2006/main">
               <a:ext uri="{FF2B5EF4-FFF2-40B4-BE49-F238E27FC236}">
-                <a16:creationId xmlns:a16="http://schemas.microsoft.com/office/drawing/2014/main" id="{778E6559-5586-4EBF-8923-174F1775A6E0}"/>
+                <a16:creationId xmlns:a16="http://schemas.microsoft.com/office/drawing/2014/main" id="{3A8CF7FC-842A-4395-BA2F-8617F3549AB4}"/>
               </a:ext>
             </a:extLst>
           </p:cNvPr>
@@ -8195,7 +8195,7 @@
                 <a:ea typeface="PingFang SC"/>
                 <a:cs typeface="PingFang SC"/>
               </a:rPr>
-              <a:t>PR #204</a:t>
+              <a:t>PR #10</a:t>
             </a:r>
           </a:p>
         </p:txBody>
@@ -8205,7 +8205,7 @@
           <p:cNvPr id="31" name="impact-bg-2-1">
             <a:extLst xmlns:a="http://schemas.openxmlformats.org/drawingml/2006/main">
               <a:ext uri="{FF2B5EF4-FFF2-40B4-BE49-F238E27FC236}">
-                <a16:creationId xmlns:a16="http://schemas.microsoft.com/office/drawing/2014/main" id="{91346018-6AC0-4612-A1AC-7D837200BF20}"/>
+                <a16:creationId xmlns:a16="http://schemas.microsoft.com/office/drawing/2014/main" id="{B4139510-7DD1-456C-82AD-00BC512926A0}"/>
               </a:ext>
             </a:extLst>
           </p:cNvPr>
@@ -8238,7 +8238,7 @@
           <p:cNvPr id="32" name="impact-2-1">
             <a:extLst xmlns:a="http://schemas.openxmlformats.org/drawingml/2006/main">
               <a:ext uri="{FF2B5EF4-FFF2-40B4-BE49-F238E27FC236}">
-                <a16:creationId xmlns:a16="http://schemas.microsoft.com/office/drawing/2014/main" id="{CBA646B6-BB07-4478-B314-B02901E7D4F7}"/>
+                <a16:creationId xmlns:a16="http://schemas.microsoft.com/office/drawing/2014/main" id="{B9236C94-098A-4B19-9F9E-FAC722F9A0ED}"/>
               </a:ext>
             </a:extLst>
           </p:cNvPr>
@@ -8296,7 +8296,7 @@
           <p:cNvPr id="33" name="impact-bg-2-2">
             <a:extLst xmlns:a="http://schemas.openxmlformats.org/drawingml/2006/main">
               <a:ext uri="{FF2B5EF4-FFF2-40B4-BE49-F238E27FC236}">
-                <a16:creationId xmlns:a16="http://schemas.microsoft.com/office/drawing/2014/main" id="{CCEDEB6D-C8E8-4D13-BEAF-C76543E26F54}"/>
+                <a16:creationId xmlns:a16="http://schemas.microsoft.com/office/drawing/2014/main" id="{1EB0D00D-E506-4FE6-A78A-2FBADCCCBB03}"/>
               </a:ext>
             </a:extLst>
           </p:cNvPr>
@@ -8329,7 +8329,7 @@
           <p:cNvPr id="34" name="impact-2-2">
             <a:extLst xmlns:a="http://schemas.openxmlformats.org/drawingml/2006/main">
               <a:ext uri="{FF2B5EF4-FFF2-40B4-BE49-F238E27FC236}">
-                <a16:creationId xmlns:a16="http://schemas.microsoft.com/office/drawing/2014/main" id="{586FEE3E-AC93-454E-83C5-4F938FADC71E}"/>
+                <a16:creationId xmlns:a16="http://schemas.microsoft.com/office/drawing/2014/main" id="{1E0B2175-188B-41BF-8222-19B90D80D359}"/>
               </a:ext>
             </a:extLst>
           </p:cNvPr>
@@ -8387,7 +8387,7 @@
           <p:cNvPr id="35" name="impact-bg-2-3">
             <a:extLst xmlns:a="http://schemas.openxmlformats.org/drawingml/2006/main">
               <a:ext uri="{FF2B5EF4-FFF2-40B4-BE49-F238E27FC236}">
-                <a16:creationId xmlns:a16="http://schemas.microsoft.com/office/drawing/2014/main" id="{3223AC13-5D40-46ED-A74A-2F9911C304CB}"/>
+                <a16:creationId xmlns:a16="http://schemas.microsoft.com/office/drawing/2014/main" id="{1864522D-EDE3-4AFB-BF7A-DA316A93CAA4}"/>
               </a:ext>
             </a:extLst>
           </p:cNvPr>
@@ -8420,7 +8420,7 @@
           <p:cNvPr id="36" name="impact-2-3">
             <a:extLst xmlns:a="http://schemas.openxmlformats.org/drawingml/2006/main">
               <a:ext uri="{FF2B5EF4-FFF2-40B4-BE49-F238E27FC236}">
-                <a16:creationId xmlns:a16="http://schemas.microsoft.com/office/drawing/2014/main" id="{C8F7464A-8760-47CC-A24E-FA25A5EF2FCA}"/>
+                <a16:creationId xmlns:a16="http://schemas.microsoft.com/office/drawing/2014/main" id="{E5CA38BF-FC07-43BC-9CB7-BB71EA4B6398}"/>
               </a:ext>
             </a:extLst>
           </p:cNvPr>
@@ -8478,7 +8478,7 @@
           <p:cNvPr id="37" name="impact-bg-3-0">
             <a:extLst xmlns:a="http://schemas.openxmlformats.org/drawingml/2006/main">
               <a:ext uri="{FF2B5EF4-FFF2-40B4-BE49-F238E27FC236}">
-                <a16:creationId xmlns:a16="http://schemas.microsoft.com/office/drawing/2014/main" id="{A3CC654D-A6E5-4D90-AC18-28A80C9B7234}"/>
+                <a16:creationId xmlns:a16="http://schemas.microsoft.com/office/drawing/2014/main" id="{97196F54-1A88-4EF9-8786-AE55F74E7013}"/>
               </a:ext>
             </a:extLst>
           </p:cNvPr>
@@ -8511,7 +8511,7 @@
           <p:cNvPr id="38" name="impact-3-0">
             <a:extLst xmlns:a="http://schemas.openxmlformats.org/drawingml/2006/main">
               <a:ext uri="{FF2B5EF4-FFF2-40B4-BE49-F238E27FC236}">
-                <a16:creationId xmlns:a16="http://schemas.microsoft.com/office/drawing/2014/main" id="{D2183CB0-E306-401A-B1D2-0B5AE570BADC}"/>
+                <a16:creationId xmlns:a16="http://schemas.microsoft.com/office/drawing/2014/main" id="{69815EB8-A4B7-46A9-AA79-2E263EDEEA41}"/>
               </a:ext>
             </a:extLst>
           </p:cNvPr>
@@ -8569,7 +8569,7 @@
           <p:cNvPr id="39" name="impact-bg-3-1">
             <a:extLst xmlns:a="http://schemas.openxmlformats.org/drawingml/2006/main">
               <a:ext uri="{FF2B5EF4-FFF2-40B4-BE49-F238E27FC236}">
-                <a16:creationId xmlns:a16="http://schemas.microsoft.com/office/drawing/2014/main" id="{F0DF3BDB-4E7D-4CA3-B289-C6303D01FD69}"/>
+                <a16:creationId xmlns:a16="http://schemas.microsoft.com/office/drawing/2014/main" id="{1B843674-6217-40F2-961F-262A667E3B7C}"/>
               </a:ext>
             </a:extLst>
           </p:cNvPr>
@@ -8602,7 +8602,7 @@
           <p:cNvPr id="40" name="impact-3-1">
             <a:extLst xmlns:a="http://schemas.openxmlformats.org/drawingml/2006/main">
               <a:ext uri="{FF2B5EF4-FFF2-40B4-BE49-F238E27FC236}">
-                <a16:creationId xmlns:a16="http://schemas.microsoft.com/office/drawing/2014/main" id="{7F864FAE-0E0D-4597-9724-04D45A9D5FE5}"/>
+                <a16:creationId xmlns:a16="http://schemas.microsoft.com/office/drawing/2014/main" id="{AE6E643E-F6BE-4BB5-85B0-92FBEAA0759C}"/>
               </a:ext>
             </a:extLst>
           </p:cNvPr>
@@ -8660,7 +8660,7 @@
           <p:cNvPr id="41" name="impact-bg-3-2">
             <a:extLst xmlns:a="http://schemas.openxmlformats.org/drawingml/2006/main">
               <a:ext uri="{FF2B5EF4-FFF2-40B4-BE49-F238E27FC236}">
-                <a16:creationId xmlns:a16="http://schemas.microsoft.com/office/drawing/2014/main" id="{706CDC99-5E2A-48D9-BFA2-D87A8B974450}"/>
+                <a16:creationId xmlns:a16="http://schemas.microsoft.com/office/drawing/2014/main" id="{446AD3D0-BDE8-464B-8198-9AD24517593D}"/>
               </a:ext>
             </a:extLst>
           </p:cNvPr>
@@ -8693,7 +8693,7 @@
           <p:cNvPr id="42" name="impact-3-2">
             <a:extLst xmlns:a="http://schemas.openxmlformats.org/drawingml/2006/main">
               <a:ext uri="{FF2B5EF4-FFF2-40B4-BE49-F238E27FC236}">
-                <a16:creationId xmlns:a16="http://schemas.microsoft.com/office/drawing/2014/main" id="{8C4863DC-EA0D-44FA-8E90-463C9ACE7000}"/>
+                <a16:creationId xmlns:a16="http://schemas.microsoft.com/office/drawing/2014/main" id="{AEF488AA-0846-4F85-BFBA-7741CC7BA8F9}"/>
               </a:ext>
             </a:extLst>
           </p:cNvPr>
@@ -8751,7 +8751,7 @@
           <p:cNvPr id="43" name="impact-bg-3-3">
             <a:extLst xmlns:a="http://schemas.openxmlformats.org/drawingml/2006/main">
               <a:ext uri="{FF2B5EF4-FFF2-40B4-BE49-F238E27FC236}">
-                <a16:creationId xmlns:a16="http://schemas.microsoft.com/office/drawing/2014/main" id="{6F34C6BF-9F75-4892-A852-DD773ADEDBFA}"/>
+                <a16:creationId xmlns:a16="http://schemas.microsoft.com/office/drawing/2014/main" id="{49357826-21A2-41E3-89B9-21DC1677A3CF}"/>
               </a:ext>
             </a:extLst>
           </p:cNvPr>
@@ -8784,7 +8784,7 @@
           <p:cNvPr id="44" name="impact-3-3">
             <a:extLst xmlns:a="http://schemas.openxmlformats.org/drawingml/2006/main">
               <a:ext uri="{FF2B5EF4-FFF2-40B4-BE49-F238E27FC236}">
-                <a16:creationId xmlns:a16="http://schemas.microsoft.com/office/drawing/2014/main" id="{CCAB59B3-2BC4-402B-905A-8213494872A3}"/>
+                <a16:creationId xmlns:a16="http://schemas.microsoft.com/office/drawing/2014/main" id="{8FB4A1DD-F5C9-4472-8F0F-3F8F4AD61653}"/>
               </a:ext>
             </a:extLst>
           </p:cNvPr>
@@ -8840,7 +8840,7 @@
     </p:spTree>
     <p:extLst>
       <p:ext uri="{BB962C8B-B14F-4D97-AF65-F5344CB8AC3E}">
-        <p14:creationId xmlns:p14="http://schemas.microsoft.com/office/powerpoint/2010/main" val="1630612051"/>
+        <p14:creationId xmlns:p14="http://schemas.microsoft.com/office/powerpoint/2010/main" val="247869233"/>
       </p:ext>
     </p:extLst>
   </p:cSld>
@@ -8871,7 +8871,7 @@
           <p:cNvPr id="16" name="title-6">
             <a:extLst xmlns:a="http://schemas.openxmlformats.org/drawingml/2006/main">
               <a:ext uri="{FF2B5EF4-FFF2-40B4-BE49-F238E27FC236}">
-                <a16:creationId xmlns:a16="http://schemas.microsoft.com/office/drawing/2014/main" id="{0E83D678-70FD-4A9C-BEA6-9D0C9BBB827C}"/>
+                <a16:creationId xmlns:a16="http://schemas.microsoft.com/office/drawing/2014/main" id="{CD03C63B-A021-4E72-987B-CE73A3D4FDD4}"/>
               </a:ext>
             </a:extLst>
           </p:cNvPr>
@@ -8929,7 +8929,7 @@
           <p:cNvPr id="2" name="subtitle-6">
             <a:extLst xmlns:a="http://schemas.openxmlformats.org/drawingml/2006/main">
               <a:ext uri="{FF2B5EF4-FFF2-40B4-BE49-F238E27FC236}">
-                <a16:creationId xmlns:a16="http://schemas.microsoft.com/office/drawing/2014/main" id="{D9FE3AA5-BD32-4F2D-9A8F-8AE25DD3DBA4}"/>
+                <a16:creationId xmlns:a16="http://schemas.microsoft.com/office/drawing/2014/main" id="{9851C329-C4E9-4D48-8F69-51E24CF27445}"/>
               </a:ext>
             </a:extLst>
           </p:cNvPr>
@@ -8987,7 +8987,7 @@
           <p:cNvPr id="3" name="footer-6">
             <a:extLst xmlns:a="http://schemas.openxmlformats.org/drawingml/2006/main">
               <a:ext uri="{FF2B5EF4-FFF2-40B4-BE49-F238E27FC236}">
-                <a16:creationId xmlns:a16="http://schemas.microsoft.com/office/drawing/2014/main" id="{1399E8C5-E02B-4083-B274-70598C4BA09B}"/>
+                <a16:creationId xmlns:a16="http://schemas.microsoft.com/office/drawing/2014/main" id="{8BE68EA2-8CED-4077-9100-A6CD65DE85FA}"/>
               </a:ext>
             </a:extLst>
           </p:cNvPr>
@@ -9035,7 +9035,7 @@
                 <a:ea typeface="PingFang SC"/>
                 <a:cs typeface="PingFang SC"/>
               </a:rPr>
-              <a:t>ShopFlow v2.6  |  shopflow-41d613d1137b</a:t>
+              <a:t>ShopFlow v2.6  |  shopflow-fcbc6c1cd435</a:t>
             </a:r>
           </a:p>
         </p:txBody>
@@ -9045,7 +9045,7 @@
           <p:cNvPr id="4" name="page-6">
             <a:extLst xmlns:a="http://schemas.openxmlformats.org/drawingml/2006/main">
               <a:ext uri="{FF2B5EF4-FFF2-40B4-BE49-F238E27FC236}">
-                <a16:creationId xmlns:a16="http://schemas.microsoft.com/office/drawing/2014/main" id="{351C5986-6A79-4F1F-AC1E-BB1A72005AC0}"/>
+                <a16:creationId xmlns:a16="http://schemas.microsoft.com/office/drawing/2014/main" id="{638A9A60-0FA1-43CE-81B7-57D2697C4E6B}"/>
               </a:ext>
             </a:extLst>
           </p:cNvPr>
@@ -9103,7 +9103,7 @@
           <p:cNvPr id="5" name="knowledge-band">
             <a:extLst xmlns:a="http://schemas.openxmlformats.org/drawingml/2006/main">
               <a:ext uri="{FF2B5EF4-FFF2-40B4-BE49-F238E27FC236}">
-                <a16:creationId xmlns:a16="http://schemas.microsoft.com/office/drawing/2014/main" id="{E0E454EF-45CA-43BB-89F2-7589013E59B8}"/>
+                <a16:creationId xmlns:a16="http://schemas.microsoft.com/office/drawing/2014/main" id="{60E61207-0549-4C2E-9366-43BD6A99F208}"/>
               </a:ext>
             </a:extLst>
           </p:cNvPr>
@@ -9134,7 +9134,7 @@
           <p:cNvPr id="6" name="knowledge-label">
             <a:extLst xmlns:a="http://schemas.openxmlformats.org/drawingml/2006/main">
               <a:ext uri="{FF2B5EF4-FFF2-40B4-BE49-F238E27FC236}">
-                <a16:creationId xmlns:a16="http://schemas.microsoft.com/office/drawing/2014/main" id="{951B7ACE-3C3D-4FC4-8C7F-F590BD542180}"/>
+                <a16:creationId xmlns:a16="http://schemas.microsoft.com/office/drawing/2014/main" id="{480D40F7-6E9B-48DA-83C6-85851AF4162B}"/>
               </a:ext>
             </a:extLst>
           </p:cNvPr>
@@ -9192,7 +9192,7 @@
           <p:cNvPr id="7" name="knowledge-title">
             <a:extLst xmlns:a="http://schemas.openxmlformats.org/drawingml/2006/main">
               <a:ext uri="{FF2B5EF4-FFF2-40B4-BE49-F238E27FC236}">
-                <a16:creationId xmlns:a16="http://schemas.microsoft.com/office/drawing/2014/main" id="{D7FE8AB8-422D-4BFF-90BF-11E06404AF50}"/>
+                <a16:creationId xmlns:a16="http://schemas.microsoft.com/office/drawing/2014/main" id="{082B8AD6-1C44-4672-A852-A7EFAD40CE81}"/>
               </a:ext>
             </a:extLst>
           </p:cNvPr>
@@ -9250,7 +9250,7 @@
           <p:cNvPr id="8" name="knowledge-claim">
             <a:extLst xmlns:a="http://schemas.openxmlformats.org/drawingml/2006/main">
               <a:ext uri="{FF2B5EF4-FFF2-40B4-BE49-F238E27FC236}">
-                <a16:creationId xmlns:a16="http://schemas.microsoft.com/office/drawing/2014/main" id="{A8DD5604-6A90-4E8E-91CD-0E8C4FCAB3BC}"/>
+                <a16:creationId xmlns:a16="http://schemas.microsoft.com/office/drawing/2014/main" id="{2EC85CD9-29F0-424F-AFFF-28A9D28DFE62}"/>
               </a:ext>
             </a:extLst>
           </p:cNvPr>
@@ -9308,7 +9308,7 @@
           <p:cNvPr id="9" name="knowledge-source">
             <a:extLst xmlns:a="http://schemas.openxmlformats.org/drawingml/2006/main">
               <a:ext uri="{FF2B5EF4-FFF2-40B4-BE49-F238E27FC236}">
-                <a16:creationId xmlns:a16="http://schemas.microsoft.com/office/drawing/2014/main" id="{2F7B5CE2-0D22-4648-83BB-620D93CB7D72}"/>
+                <a16:creationId xmlns:a16="http://schemas.microsoft.com/office/drawing/2014/main" id="{3B7A4BAE-13CF-417C-8E42-2F648E235D79}"/>
               </a:ext>
             </a:extLst>
           </p:cNvPr>
@@ -9366,7 +9366,7 @@
           <p:cNvPr id="10" name="expert-band">
             <a:extLst xmlns:a="http://schemas.openxmlformats.org/drawingml/2006/main">
               <a:ext uri="{FF2B5EF4-FFF2-40B4-BE49-F238E27FC236}">
-                <a16:creationId xmlns:a16="http://schemas.microsoft.com/office/drawing/2014/main" id="{EA440BA3-A6BB-4154-89C5-EC1943603C9D}"/>
+                <a16:creationId xmlns:a16="http://schemas.microsoft.com/office/drawing/2014/main" id="{45DCEC48-7A5F-43DB-9BD8-BD39C6BD4F95}"/>
               </a:ext>
             </a:extLst>
           </p:cNvPr>
@@ -9397,7 +9397,7 @@
           <p:cNvPr id="11" name="expert-label">
             <a:extLst xmlns:a="http://schemas.openxmlformats.org/drawingml/2006/main">
               <a:ext uri="{FF2B5EF4-FFF2-40B4-BE49-F238E27FC236}">
-                <a16:creationId xmlns:a16="http://schemas.microsoft.com/office/drawing/2014/main" id="{D621A1AC-30FC-4463-9400-DF8DD3A72439}"/>
+                <a16:creationId xmlns:a16="http://schemas.microsoft.com/office/drawing/2014/main" id="{4E43BAF0-9710-4AFF-9E73-22F16E9B9C3C}"/>
               </a:ext>
             </a:extLst>
           </p:cNvPr>
@@ -9455,7 +9455,7 @@
           <p:cNvPr id="12" name="expert-name">
             <a:extLst xmlns:a="http://schemas.openxmlformats.org/drawingml/2006/main">
               <a:ext uri="{FF2B5EF4-FFF2-40B4-BE49-F238E27FC236}">
-                <a16:creationId xmlns:a16="http://schemas.microsoft.com/office/drawing/2014/main" id="{B107418A-C62C-4EEF-958C-F7D5C2B3B6F5}"/>
+                <a16:creationId xmlns:a16="http://schemas.microsoft.com/office/drawing/2014/main" id="{377EF33A-77E6-4E5B-8C57-17F8F299FEEE}"/>
               </a:ext>
             </a:extLst>
           </p:cNvPr>
@@ -9513,7 +9513,7 @@
           <p:cNvPr id="13" name="expert-reason">
             <a:extLst xmlns:a="http://schemas.openxmlformats.org/drawingml/2006/main">
               <a:ext uri="{FF2B5EF4-FFF2-40B4-BE49-F238E27FC236}">
-                <a16:creationId xmlns:a16="http://schemas.microsoft.com/office/drawing/2014/main" id="{8D44549A-4595-4121-90A9-81808085D1A4}"/>
+                <a16:creationId xmlns:a16="http://schemas.microsoft.com/office/drawing/2014/main" id="{C745E27C-E092-422A-BDF8-645C999B6A71}"/>
               </a:ext>
             </a:extLst>
           </p:cNvPr>
@@ -9617,7 +9617,7 @@
           <p:cNvPr id="14" name="expert-contact">
             <a:extLst xmlns:a="http://schemas.openxmlformats.org/drawingml/2006/main">
               <a:ext uri="{FF2B5EF4-FFF2-40B4-BE49-F238E27FC236}">
-                <a16:creationId xmlns:a16="http://schemas.microsoft.com/office/drawing/2014/main" id="{D9AD5646-7FFB-44AC-A2E9-CA2EB8AA3AC6}"/>
+                <a16:creationId xmlns:a16="http://schemas.microsoft.com/office/drawing/2014/main" id="{2139761E-0ED0-4C62-A43E-AA092BA421EF}"/>
               </a:ext>
             </a:extLst>
           </p:cNvPr>
@@ -9675,7 +9675,7 @@
           <p:cNvPr id="15" name="knowledge-action">
             <a:extLst xmlns:a="http://schemas.openxmlformats.org/drawingml/2006/main">
               <a:ext uri="{FF2B5EF4-FFF2-40B4-BE49-F238E27FC236}">
-                <a16:creationId xmlns:a16="http://schemas.microsoft.com/office/drawing/2014/main" id="{5EB820E5-FDA6-4E87-BD6A-27CEAB556D6C}"/>
+                <a16:creationId xmlns:a16="http://schemas.microsoft.com/office/drawing/2014/main" id="{8B88F402-80A7-4BFE-B809-26A7E07CA088}"/>
               </a:ext>
             </a:extLst>
           </p:cNvPr>
@@ -9731,7 +9731,7 @@
     </p:spTree>
     <p:extLst>
       <p:ext uri="{BB962C8B-B14F-4D97-AF65-F5344CB8AC3E}">
-        <p14:creationId xmlns:p14="http://schemas.microsoft.com/office/powerpoint/2010/main" val="1180532045"/>
+        <p14:creationId xmlns:p14="http://schemas.microsoft.com/office/powerpoint/2010/main" val="1974890901"/>
       </p:ext>
     </p:extLst>
   </p:cSld>
@@ -9762,7 +9762,7 @@
           <p:cNvPr id="20" name="title-7">
             <a:extLst xmlns:a="http://schemas.openxmlformats.org/drawingml/2006/main">
               <a:ext uri="{FF2B5EF4-FFF2-40B4-BE49-F238E27FC236}">
-                <a16:creationId xmlns:a16="http://schemas.microsoft.com/office/drawing/2014/main" id="{C35B47FF-D1AF-4536-8902-B8D06A8C8BA0}"/>
+                <a16:creationId xmlns:a16="http://schemas.microsoft.com/office/drawing/2014/main" id="{CA3B1D23-1085-4C82-8F1F-94863CFAB89E}"/>
               </a:ext>
             </a:extLst>
           </p:cNvPr>
@@ -9820,7 +9820,7 @@
           <p:cNvPr id="2" name="subtitle-7">
             <a:extLst xmlns:a="http://schemas.openxmlformats.org/drawingml/2006/main">
               <a:ext uri="{FF2B5EF4-FFF2-40B4-BE49-F238E27FC236}">
-                <a16:creationId xmlns:a16="http://schemas.microsoft.com/office/drawing/2014/main" id="{A9D4896A-2B60-44F3-8F6A-00B5282F3E38}"/>
+                <a16:creationId xmlns:a16="http://schemas.microsoft.com/office/drawing/2014/main" id="{77712FD2-71A9-4EAB-A09B-4AC2311042B0}"/>
               </a:ext>
             </a:extLst>
           </p:cNvPr>
@@ -9878,7 +9878,7 @@
           <p:cNvPr id="3" name="footer-7">
             <a:extLst xmlns:a="http://schemas.openxmlformats.org/drawingml/2006/main">
               <a:ext uri="{FF2B5EF4-FFF2-40B4-BE49-F238E27FC236}">
-                <a16:creationId xmlns:a16="http://schemas.microsoft.com/office/drawing/2014/main" id="{3580BAC7-CE19-4046-9E0D-A805A804F5F6}"/>
+                <a16:creationId xmlns:a16="http://schemas.microsoft.com/office/drawing/2014/main" id="{A9542393-CD07-4E4E-9250-F2C86367C6D6}"/>
               </a:ext>
             </a:extLst>
           </p:cNvPr>
@@ -9926,7 +9926,7 @@
                 <a:ea typeface="PingFang SC"/>
                 <a:cs typeface="PingFang SC"/>
               </a:rPr>
-              <a:t>ShopFlow v2.6  |  shopflow-41d613d1137b</a:t>
+              <a:t>ShopFlow v2.6  |  shopflow-fcbc6c1cd435</a:t>
             </a:r>
           </a:p>
         </p:txBody>
@@ -9936,7 +9936,7 @@
           <p:cNvPr id="4" name="page-7">
             <a:extLst xmlns:a="http://schemas.openxmlformats.org/drawingml/2006/main">
               <a:ext uri="{FF2B5EF4-FFF2-40B4-BE49-F238E27FC236}">
-                <a16:creationId xmlns:a16="http://schemas.microsoft.com/office/drawing/2014/main" id="{097923E2-DE0F-4EE4-BF7C-E91913D496ED}"/>
+                <a16:creationId xmlns:a16="http://schemas.microsoft.com/office/drawing/2014/main" id="{AFDC8F49-C85A-48C9-886F-C8C04D78C8D8}"/>
               </a:ext>
             </a:extLst>
           </p:cNvPr>
@@ -9994,7 +9994,7 @@
           <p:cNvPr id="5" name="timeline">
             <a:extLst xmlns:a="http://schemas.openxmlformats.org/drawingml/2006/main">
               <a:ext uri="{FF2B5EF4-FFF2-40B4-BE49-F238E27FC236}">
-                <a16:creationId xmlns:a16="http://schemas.microsoft.com/office/drawing/2014/main" id="{9FF0AC6F-EC7D-42A7-841D-8B46EA89C56F}"/>
+                <a16:creationId xmlns:a16="http://schemas.microsoft.com/office/drawing/2014/main" id="{551B0390-BDD0-4655-BE21-1CF0837FF65F}"/>
               </a:ext>
             </a:extLst>
           </p:cNvPr>
@@ -10025,7 +10025,7 @@
           <p:cNvPr id="6" name="timeline-dot-0">
             <a:extLst xmlns:a="http://schemas.openxmlformats.org/drawingml/2006/main">
               <a:ext uri="{FF2B5EF4-FFF2-40B4-BE49-F238E27FC236}">
-                <a16:creationId xmlns:a16="http://schemas.microsoft.com/office/drawing/2014/main" id="{535D062A-8E08-491D-8DCE-4A0B7D9594AA}"/>
+                <a16:creationId xmlns:a16="http://schemas.microsoft.com/office/drawing/2014/main" id="{9585BA94-4AF7-4CAA-B852-EF33A78CA667}"/>
               </a:ext>
             </a:extLst>
           </p:cNvPr>
@@ -10056,7 +10056,7 @@
           <p:cNvPr id="7" name="timeline-time-0">
             <a:extLst xmlns:a="http://schemas.openxmlformats.org/drawingml/2006/main">
               <a:ext uri="{FF2B5EF4-FFF2-40B4-BE49-F238E27FC236}">
-                <a16:creationId xmlns:a16="http://schemas.microsoft.com/office/drawing/2014/main" id="{1FAF9DBE-4152-4B77-8319-3D11CEE3BB47}"/>
+                <a16:creationId xmlns:a16="http://schemas.microsoft.com/office/drawing/2014/main" id="{F724F5C2-E960-4E10-8F69-C1A24EADC9AE}"/>
               </a:ext>
             </a:extLst>
           </p:cNvPr>
@@ -10114,7 +10114,7 @@
           <p:cNvPr id="8" name="timeline-title-0">
             <a:extLst xmlns:a="http://schemas.openxmlformats.org/drawingml/2006/main">
               <a:ext uri="{FF2B5EF4-FFF2-40B4-BE49-F238E27FC236}">
-                <a16:creationId xmlns:a16="http://schemas.microsoft.com/office/drawing/2014/main" id="{B048225E-3136-405B-BADF-5C4D672F417A}"/>
+                <a16:creationId xmlns:a16="http://schemas.microsoft.com/office/drawing/2014/main" id="{E9EC0A33-A537-4E9B-916F-8A3DCE12D80A}"/>
               </a:ext>
             </a:extLst>
           </p:cNvPr>
@@ -10172,7 +10172,7 @@
           <p:cNvPr id="9" name="timeline-owner-0">
             <a:extLst xmlns:a="http://schemas.openxmlformats.org/drawingml/2006/main">
               <a:ext uri="{FF2B5EF4-FFF2-40B4-BE49-F238E27FC236}">
-                <a16:creationId xmlns:a16="http://schemas.microsoft.com/office/drawing/2014/main" id="{FB425742-7D12-468D-9183-187C5B7D654B}"/>
+                <a16:creationId xmlns:a16="http://schemas.microsoft.com/office/drawing/2014/main" id="{2F329C2C-84AC-4397-B56C-30BCC3E68E15}"/>
               </a:ext>
             </a:extLst>
           </p:cNvPr>
@@ -10230,7 +10230,7 @@
           <p:cNvPr id="10" name="timeline-dot-1">
             <a:extLst xmlns:a="http://schemas.openxmlformats.org/drawingml/2006/main">
               <a:ext uri="{FF2B5EF4-FFF2-40B4-BE49-F238E27FC236}">
-                <a16:creationId xmlns:a16="http://schemas.microsoft.com/office/drawing/2014/main" id="{F9EF6095-73B9-4EC5-84C8-23447526D3E2}"/>
+                <a16:creationId xmlns:a16="http://schemas.microsoft.com/office/drawing/2014/main" id="{09A63432-D7E3-44DC-8797-1A9C81BBBD89}"/>
               </a:ext>
             </a:extLst>
           </p:cNvPr>
@@ -10261,7 +10261,7 @@
           <p:cNvPr id="11" name="timeline-time-1">
             <a:extLst xmlns:a="http://schemas.openxmlformats.org/drawingml/2006/main">
               <a:ext uri="{FF2B5EF4-FFF2-40B4-BE49-F238E27FC236}">
-                <a16:creationId xmlns:a16="http://schemas.microsoft.com/office/drawing/2014/main" id="{FDEAFCFF-5F9C-4E06-A2CB-070EBF2AD109}"/>
+                <a16:creationId xmlns:a16="http://schemas.microsoft.com/office/drawing/2014/main" id="{54C41421-6243-4F1A-90ED-289C0358EABF}"/>
               </a:ext>
             </a:extLst>
           </p:cNvPr>
@@ -10319,7 +10319,7 @@
           <p:cNvPr id="12" name="timeline-title-1">
             <a:extLst xmlns:a="http://schemas.openxmlformats.org/drawingml/2006/main">
               <a:ext uri="{FF2B5EF4-FFF2-40B4-BE49-F238E27FC236}">
-                <a16:creationId xmlns:a16="http://schemas.microsoft.com/office/drawing/2014/main" id="{09702EE6-86BF-49D2-8BA7-89A4796D0228}"/>
+                <a16:creationId xmlns:a16="http://schemas.microsoft.com/office/drawing/2014/main" id="{A9C07556-78E1-4226-9FC4-5A30E6F493F9}"/>
               </a:ext>
             </a:extLst>
           </p:cNvPr>
@@ -10377,7 +10377,7 @@
           <p:cNvPr id="13" name="timeline-owner-1">
             <a:extLst xmlns:a="http://schemas.openxmlformats.org/drawingml/2006/main">
               <a:ext uri="{FF2B5EF4-FFF2-40B4-BE49-F238E27FC236}">
-                <a16:creationId xmlns:a16="http://schemas.microsoft.com/office/drawing/2014/main" id="{2FB01B8F-7CF9-4DEC-95D8-9DE918E0C6AC}"/>
+                <a16:creationId xmlns:a16="http://schemas.microsoft.com/office/drawing/2014/main" id="{04924819-F8BC-4E27-B813-A8C4208C957F}"/>
               </a:ext>
             </a:extLst>
           </p:cNvPr>
@@ -10435,7 +10435,7 @@
           <p:cNvPr id="14" name="timeline-dot-2">
             <a:extLst xmlns:a="http://schemas.openxmlformats.org/drawingml/2006/main">
               <a:ext uri="{FF2B5EF4-FFF2-40B4-BE49-F238E27FC236}">
-                <a16:creationId xmlns:a16="http://schemas.microsoft.com/office/drawing/2014/main" id="{F39FD99E-B37B-41FB-B531-3E35ECFE44C6}"/>
+                <a16:creationId xmlns:a16="http://schemas.microsoft.com/office/drawing/2014/main" id="{C9106D6C-52B3-4A2A-A416-1D1E7638DEA3}"/>
               </a:ext>
             </a:extLst>
           </p:cNvPr>
@@ -10466,7 +10466,7 @@
           <p:cNvPr id="15" name="timeline-time-2">
             <a:extLst xmlns:a="http://schemas.openxmlformats.org/drawingml/2006/main">
               <a:ext uri="{FF2B5EF4-FFF2-40B4-BE49-F238E27FC236}">
-                <a16:creationId xmlns:a16="http://schemas.microsoft.com/office/drawing/2014/main" id="{CB41BCA6-B470-48EC-8220-89D3D60A1801}"/>
+                <a16:creationId xmlns:a16="http://schemas.microsoft.com/office/drawing/2014/main" id="{C3A69A5F-1DF5-4694-AB62-BAF1A63E13B4}"/>
               </a:ext>
             </a:extLst>
           </p:cNvPr>
@@ -10524,7 +10524,7 @@
           <p:cNvPr id="16" name="timeline-title-2">
             <a:extLst xmlns:a="http://schemas.openxmlformats.org/drawingml/2006/main">
               <a:ext uri="{FF2B5EF4-FFF2-40B4-BE49-F238E27FC236}">
-                <a16:creationId xmlns:a16="http://schemas.microsoft.com/office/drawing/2014/main" id="{9B1FBF06-D7E0-449A-9307-207F3F8A73EA}"/>
+                <a16:creationId xmlns:a16="http://schemas.microsoft.com/office/drawing/2014/main" id="{CA6E7B8E-1DAA-491B-A1A0-EE22BA933C0E}"/>
               </a:ext>
             </a:extLst>
           </p:cNvPr>
@@ -10582,7 +10582,7 @@
           <p:cNvPr id="17" name="timeline-owner-2">
             <a:extLst xmlns:a="http://schemas.openxmlformats.org/drawingml/2006/main">
               <a:ext uri="{FF2B5EF4-FFF2-40B4-BE49-F238E27FC236}">
-                <a16:creationId xmlns:a16="http://schemas.microsoft.com/office/drawing/2014/main" id="{78A63F0B-245F-42F7-AB29-71458F13CC59}"/>
+                <a16:creationId xmlns:a16="http://schemas.microsoft.com/office/drawing/2014/main" id="{20724D2D-C0B1-4752-B9EF-E5CD59C5C536}"/>
               </a:ext>
             </a:extLst>
           </p:cNvPr>
@@ -10640,7 +10640,7 @@
           <p:cNvPr id="18" name="decision-band">
             <a:extLst xmlns:a="http://schemas.openxmlformats.org/drawingml/2006/main">
               <a:ext uri="{FF2B5EF4-FFF2-40B4-BE49-F238E27FC236}">
-                <a16:creationId xmlns:a16="http://schemas.microsoft.com/office/drawing/2014/main" id="{E19BAC1D-A0CB-498B-B829-5FF2AB6F55E2}"/>
+                <a16:creationId xmlns:a16="http://schemas.microsoft.com/office/drawing/2014/main" id="{14D5CAD4-F49A-4FFC-9DE4-36C86E6A81A4}"/>
               </a:ext>
             </a:extLst>
           </p:cNvPr>
@@ -10671,7 +10671,7 @@
           <p:cNvPr id="19" name="decision-text">
             <a:extLst xmlns:a="http://schemas.openxmlformats.org/drawingml/2006/main">
               <a:ext uri="{FF2B5EF4-FFF2-40B4-BE49-F238E27FC236}">
-                <a16:creationId xmlns:a16="http://schemas.microsoft.com/office/drawing/2014/main" id="{3E312540-68D4-4B8C-98AC-0C18AB043088}"/>
+                <a16:creationId xmlns:a16="http://schemas.microsoft.com/office/drawing/2014/main" id="{B7471581-A9CD-4D07-A64B-07A01D02F4D9}"/>
               </a:ext>
             </a:extLst>
           </p:cNvPr>
@@ -10727,7 +10727,7 @@
     </p:spTree>
     <p:extLst>
       <p:ext uri="{BB962C8B-B14F-4D97-AF65-F5344CB8AC3E}">
-        <p14:creationId xmlns:p14="http://schemas.microsoft.com/office/powerpoint/2010/main" val="1855882899"/>
+        <p14:creationId xmlns:p14="http://schemas.microsoft.com/office/powerpoint/2010/main" val="1923844370"/>
       </p:ext>
     </p:extLst>
   </p:cSld>
